--- a/evals/previews/aurora-synthetic-benchmark/aurora-synthetic-benchmark.pptx
+++ b/evals/previews/aurora-synthetic-benchmark/aurora-synthetic-benchmark.pptx
@@ -2,13 +2,13 @@
 <file path=ppt/presentation.xml><?xml version="1.0" encoding="utf-8"?>
 <p:presentation xmlns:p="http://schemas.openxmlformats.org/presentationml/2006/main">
   <p:sldMasterIdLst>
-    <p:sldMasterId xmlns:r="http://schemas.openxmlformats.org/officeDocument/2006/relationships" id="2147483648" r:id="R9d3a45125bec44a7"/>
+    <p:sldMasterId xmlns:r="http://schemas.openxmlformats.org/officeDocument/2006/relationships" id="2147483648" r:id="R335b990f9bb746b3"/>
   </p:sldMasterIdLst>
   <p:notesMasterIdLst>
-    <p:notesMasterId xmlns:r="http://schemas.openxmlformats.org/officeDocument/2006/relationships" r:id="Re856f05cb4574522"/>
+    <p:notesMasterId xmlns:r="http://schemas.openxmlformats.org/officeDocument/2006/relationships" r:id="R8fd7a68502194b63"/>
   </p:notesMasterIdLst>
   <p:sldIdLst>
-    <p:sldId xmlns:r="http://schemas.openxmlformats.org/officeDocument/2006/relationships" id="256" r:id="Rdf958c27dbcd4aeb"/>
+    <p:sldId xmlns:r="http://schemas.openxmlformats.org/officeDocument/2006/relationships" id="256" r:id="Rbbdf3b8e2f7b4424"/>
   </p:sldIdLst>
   <p:sldSz cx="42805350" cy="30279975"/>
   <p:notesSz cx="6858000" cy="9144000"/>
@@ -525,7 +525,7 @@
   </p:cSld>
   <p:clrMap bg1="lt1" tx1="dk1" bg2="lt2" tx2="dk2" accent1="accent1" accent2="accent2" accent3="accent3" accent4="accent4" accent5="accent5" accent6="accent6" hlink="hlink" folHlink="folHlink"/>
   <p:sldLayoutIdLst>
-    <p:sldLayoutId xmlns:r="http://schemas.openxmlformats.org/officeDocument/2006/relationships" id="2147483649" r:id="R81abc35f52dd4bf5"/>
+    <p:sldLayoutId xmlns:r="http://schemas.openxmlformats.org/officeDocument/2006/relationships" id="2147483649" r:id="R9537e67419124b55"/>
   </p:sldLayoutIdLst>
   <p:txStyles>
     <p:titleStyle>
@@ -1058,7 +1058,7 @@
     <p:bg>
       <p:bgPr>
         <a:solidFill xmlns:a="http://schemas.openxmlformats.org/drawingml/2006/main">
-          <a:srgbClr val="F6F8FA"/>
+          <a:srgbClr val="F6F2EE"/>
         </a:solidFill>
       </p:bgPr>
     </p:bg>
@@ -1073,10 +1073,10 @@
       </p:grpSpPr>
       <p:sp>
         <p:nvSpPr>
-          <p:cNvPr id="92" name="header-band">
-            <a:extLst xmlns:a="http://schemas.openxmlformats.org/drawingml/2006/main">
-              <a:ext uri="{FF2B5EF4-FFF2-40B4-BE49-F238E27FC236}">
-                <a16:creationId xmlns:a16="http://schemas.microsoft.com/office/drawing/2014/main" id="{D5F4EED0-94E4-4C13-88F6-D35CC0B80A67}"/>
+          <p:cNvPr id="187" name="header-band">
+            <a:extLst xmlns:a="http://schemas.openxmlformats.org/drawingml/2006/main">
+              <a:ext uri="{FF2B5EF4-FFF2-40B4-BE49-F238E27FC236}">
+                <a16:creationId xmlns:a16="http://schemas.microsoft.com/office/drawing/2014/main" id="{E2C0ACCE-75DF-4847-B6F5-BFAE51E93135}"/>
               </a:ext>
             </a:extLst>
           </p:cNvPr>
@@ -1096,20 +1096,20 @@
             </a:avLst>
           </a:prstGeom>
           <a:solidFill xmlns:a="http://schemas.openxmlformats.org/drawingml/2006/main">
-            <a:srgbClr val="0F5F73"/>
-          </a:solidFill>
-          <a:ln xmlns:a="http://schemas.openxmlformats.org/drawingml/2006/main" w="0">
-            <a:noFill/>
-            <a:prstDash val="solid"/>
-          </a:ln>
-        </p:spPr>
-      </p:sp>
-      <p:sp>
-        <p:nvSpPr>
-          <p:cNvPr id="2" name="top-accent">
-            <a:extLst xmlns:a="http://schemas.openxmlformats.org/drawingml/2006/main">
-              <a:ext uri="{FF2B5EF4-FFF2-40B4-BE49-F238E27FC236}">
-                <a16:creationId xmlns:a16="http://schemas.microsoft.com/office/drawing/2014/main" id="{8E58B154-3E92-4BA2-AE8B-5F1B58D28DF2}"/>
+            <a:srgbClr val="3E5C78"/>
+          </a:solidFill>
+          <a:ln xmlns:a="http://schemas.openxmlformats.org/drawingml/2006/main" w="0">
+            <a:noFill/>
+            <a:prstDash val="solid"/>
+          </a:ln>
+        </p:spPr>
+      </p:sp>
+      <p:sp>
+        <p:nvSpPr>
+          <p:cNvPr id="2" name="top-cape-gradient-1">
+            <a:extLst xmlns:a="http://schemas.openxmlformats.org/drawingml/2006/main">
+              <a:ext uri="{FF2B5EF4-FFF2-40B4-BE49-F238E27FC236}">
+                <a16:creationId xmlns:a16="http://schemas.microsoft.com/office/drawing/2014/main" id="{4B5C5904-0DDE-4914-BAF8-FC151D628453}"/>
               </a:ext>
             </a:extLst>
           </p:cNvPr>
@@ -1121,28 +1121,2107 @@
         <p:spPr>
           <a:xfrm xmlns:a="http://schemas.openxmlformats.org/drawingml/2006/main">
             <a:off x="0" y="0"/>
-            <a:ext cx="42805350" cy="285750"/>
-          </a:xfrm>
-          <a:prstGeom xmlns:a="http://schemas.openxmlformats.org/drawingml/2006/main" prst="roundRect">
-            <a:avLst>
-              <a:gd name="adj" fmla="val 0"/>
-            </a:avLst>
-          </a:prstGeom>
-          <a:solidFill xmlns:a="http://schemas.openxmlformats.org/drawingml/2006/main">
-            <a:srgbClr val="E8B44C"/>
-          </a:solidFill>
-          <a:ln xmlns:a="http://schemas.openxmlformats.org/drawingml/2006/main" w="0">
-            <a:noFill/>
-            <a:prstDash val="solid"/>
-          </a:ln>
-        </p:spPr>
-      </p:sp>
-      <p:sp>
-        <p:nvSpPr>
-          <p:cNvPr id="3" name="poster-title">
-            <a:extLst xmlns:a="http://schemas.openxmlformats.org/drawingml/2006/main">
-              <a:ext uri="{FF2B5EF4-FFF2-40B4-BE49-F238E27FC236}">
-                <a16:creationId xmlns:a16="http://schemas.microsoft.com/office/drawing/2014/main" id="{7EFD8F26-FFA2-420C-AB14-76AA7D489931}"/>
+            <a:ext cx="1347192" cy="285750"/>
+          </a:xfrm>
+          <a:prstGeom xmlns:a="http://schemas.openxmlformats.org/drawingml/2006/main" prst="roundRect">
+            <a:avLst>
+              <a:gd name="adj" fmla="val 0"/>
+            </a:avLst>
+          </a:prstGeom>
+          <a:solidFill xmlns:a="http://schemas.openxmlformats.org/drawingml/2006/main">
+            <a:srgbClr val="293F55"/>
+          </a:solidFill>
+          <a:ln xmlns:a="http://schemas.openxmlformats.org/drawingml/2006/main" w="0">
+            <a:noFill/>
+            <a:prstDash val="solid"/>
+          </a:ln>
+        </p:spPr>
+      </p:sp>
+      <p:sp>
+        <p:nvSpPr>
+          <p:cNvPr id="3" name="top-cape-gradient-2">
+            <a:extLst xmlns:a="http://schemas.openxmlformats.org/drawingml/2006/main">
+              <a:ext uri="{FF2B5EF4-FFF2-40B4-BE49-F238E27FC236}">
+                <a16:creationId xmlns:a16="http://schemas.microsoft.com/office/drawing/2014/main" id="{504060CB-225A-4E19-99CA-88F1FA96457B}"/>
+              </a:ext>
+            </a:extLst>
+          </p:cNvPr>
+          <p:cNvSpPr>
+            <a:spLocks xmlns:a="http://schemas.openxmlformats.org/drawingml/2006/main" noGrp="1"/>
+          </p:cNvSpPr>
+          <p:nvPr/>
+        </p:nvSpPr>
+        <p:spPr>
+          <a:xfrm xmlns:a="http://schemas.openxmlformats.org/drawingml/2006/main">
+            <a:off x="1337667" y="0"/>
+            <a:ext cx="1347192" cy="285750"/>
+          </a:xfrm>
+          <a:prstGeom xmlns:a="http://schemas.openxmlformats.org/drawingml/2006/main" prst="roundRect">
+            <a:avLst>
+              <a:gd name="adj" fmla="val 0"/>
+            </a:avLst>
+          </a:prstGeom>
+          <a:solidFill xmlns:a="http://schemas.openxmlformats.org/drawingml/2006/main">
+            <a:srgbClr val="2B4258"/>
+          </a:solidFill>
+          <a:ln xmlns:a="http://schemas.openxmlformats.org/drawingml/2006/main" w="0">
+            <a:noFill/>
+            <a:prstDash val="solid"/>
+          </a:ln>
+        </p:spPr>
+      </p:sp>
+      <p:sp>
+        <p:nvSpPr>
+          <p:cNvPr id="4" name="top-cape-gradient-3">
+            <a:extLst xmlns:a="http://schemas.openxmlformats.org/drawingml/2006/main">
+              <a:ext uri="{FF2B5EF4-FFF2-40B4-BE49-F238E27FC236}">
+                <a16:creationId xmlns:a16="http://schemas.microsoft.com/office/drawing/2014/main" id="{4A8E8480-AFDB-4190-BED9-E25F0DD86FC4}"/>
+              </a:ext>
+            </a:extLst>
+          </p:cNvPr>
+          <p:cNvSpPr>
+            <a:spLocks xmlns:a="http://schemas.openxmlformats.org/drawingml/2006/main" noGrp="1"/>
+          </p:cNvSpPr>
+          <p:nvPr/>
+        </p:nvSpPr>
+        <p:spPr>
+          <a:xfrm xmlns:a="http://schemas.openxmlformats.org/drawingml/2006/main">
+            <a:off x="2675334" y="0"/>
+            <a:ext cx="1347192" cy="285750"/>
+          </a:xfrm>
+          <a:prstGeom xmlns:a="http://schemas.openxmlformats.org/drawingml/2006/main" prst="roundRect">
+            <a:avLst>
+              <a:gd name="adj" fmla="val 0"/>
+            </a:avLst>
+          </a:prstGeom>
+          <a:solidFill xmlns:a="http://schemas.openxmlformats.org/drawingml/2006/main">
+            <a:srgbClr val="2D455C"/>
+          </a:solidFill>
+          <a:ln xmlns:a="http://schemas.openxmlformats.org/drawingml/2006/main" w="0">
+            <a:noFill/>
+            <a:prstDash val="solid"/>
+          </a:ln>
+        </p:spPr>
+      </p:sp>
+      <p:sp>
+        <p:nvSpPr>
+          <p:cNvPr id="5" name="top-cape-gradient-4">
+            <a:extLst xmlns:a="http://schemas.openxmlformats.org/drawingml/2006/main">
+              <a:ext uri="{FF2B5EF4-FFF2-40B4-BE49-F238E27FC236}">
+                <a16:creationId xmlns:a16="http://schemas.microsoft.com/office/drawing/2014/main" id="{B18FA27B-0219-4ABC-9CAC-4DE7AD1250AA}"/>
+              </a:ext>
+            </a:extLst>
+          </p:cNvPr>
+          <p:cNvSpPr>
+            <a:spLocks xmlns:a="http://schemas.openxmlformats.org/drawingml/2006/main" noGrp="1"/>
+          </p:cNvSpPr>
+          <p:nvPr/>
+        </p:nvSpPr>
+        <p:spPr>
+          <a:xfrm xmlns:a="http://schemas.openxmlformats.org/drawingml/2006/main">
+            <a:off x="4013002" y="0"/>
+            <a:ext cx="1347192" cy="285750"/>
+          </a:xfrm>
+          <a:prstGeom xmlns:a="http://schemas.openxmlformats.org/drawingml/2006/main" prst="roundRect">
+            <a:avLst>
+              <a:gd name="adj" fmla="val 0"/>
+            </a:avLst>
+          </a:prstGeom>
+          <a:solidFill xmlns:a="http://schemas.openxmlformats.org/drawingml/2006/main">
+            <a:srgbClr val="2F475F"/>
+          </a:solidFill>
+          <a:ln xmlns:a="http://schemas.openxmlformats.org/drawingml/2006/main" w="0">
+            <a:noFill/>
+            <a:prstDash val="solid"/>
+          </a:ln>
+        </p:spPr>
+      </p:sp>
+      <p:sp>
+        <p:nvSpPr>
+          <p:cNvPr id="6" name="top-cape-gradient-5">
+            <a:extLst xmlns:a="http://schemas.openxmlformats.org/drawingml/2006/main">
+              <a:ext uri="{FF2B5EF4-FFF2-40B4-BE49-F238E27FC236}">
+                <a16:creationId xmlns:a16="http://schemas.microsoft.com/office/drawing/2014/main" id="{C3E4CF1A-D39F-4309-A13F-E70808C34BCB}"/>
+              </a:ext>
+            </a:extLst>
+          </p:cNvPr>
+          <p:cNvSpPr>
+            <a:spLocks xmlns:a="http://schemas.openxmlformats.org/drawingml/2006/main" noGrp="1"/>
+          </p:cNvSpPr>
+          <p:nvPr/>
+        </p:nvSpPr>
+        <p:spPr>
+          <a:xfrm xmlns:a="http://schemas.openxmlformats.org/drawingml/2006/main">
+            <a:off x="5350669" y="0"/>
+            <a:ext cx="1347192" cy="285750"/>
+          </a:xfrm>
+          <a:prstGeom xmlns:a="http://schemas.openxmlformats.org/drawingml/2006/main" prst="roundRect">
+            <a:avLst>
+              <a:gd name="adj" fmla="val 0"/>
+            </a:avLst>
+          </a:prstGeom>
+          <a:solidFill xmlns:a="http://schemas.openxmlformats.org/drawingml/2006/main">
+            <a:srgbClr val="314A63"/>
+          </a:solidFill>
+          <a:ln xmlns:a="http://schemas.openxmlformats.org/drawingml/2006/main" w="0">
+            <a:noFill/>
+            <a:prstDash val="solid"/>
+          </a:ln>
+        </p:spPr>
+      </p:sp>
+      <p:sp>
+        <p:nvSpPr>
+          <p:cNvPr id="7" name="top-cape-gradient-6">
+            <a:extLst xmlns:a="http://schemas.openxmlformats.org/drawingml/2006/main">
+              <a:ext uri="{FF2B5EF4-FFF2-40B4-BE49-F238E27FC236}">
+                <a16:creationId xmlns:a16="http://schemas.microsoft.com/office/drawing/2014/main" id="{3B43D6FB-BCD1-4562-BBAB-6066E1D882D8}"/>
+              </a:ext>
+            </a:extLst>
+          </p:cNvPr>
+          <p:cNvSpPr>
+            <a:spLocks xmlns:a="http://schemas.openxmlformats.org/drawingml/2006/main" noGrp="1"/>
+          </p:cNvSpPr>
+          <p:nvPr/>
+        </p:nvSpPr>
+        <p:spPr>
+          <a:xfrm xmlns:a="http://schemas.openxmlformats.org/drawingml/2006/main">
+            <a:off x="6688336" y="0"/>
+            <a:ext cx="1347192" cy="285750"/>
+          </a:xfrm>
+          <a:prstGeom xmlns:a="http://schemas.openxmlformats.org/drawingml/2006/main" prst="roundRect">
+            <a:avLst>
+              <a:gd name="adj" fmla="val 0"/>
+            </a:avLst>
+          </a:prstGeom>
+          <a:solidFill xmlns:a="http://schemas.openxmlformats.org/drawingml/2006/main">
+            <a:srgbClr val="334D66"/>
+          </a:solidFill>
+          <a:ln xmlns:a="http://schemas.openxmlformats.org/drawingml/2006/main" w="0">
+            <a:noFill/>
+            <a:prstDash val="solid"/>
+          </a:ln>
+        </p:spPr>
+      </p:sp>
+      <p:sp>
+        <p:nvSpPr>
+          <p:cNvPr id="8" name="top-cape-gradient-7">
+            <a:extLst xmlns:a="http://schemas.openxmlformats.org/drawingml/2006/main">
+              <a:ext uri="{FF2B5EF4-FFF2-40B4-BE49-F238E27FC236}">
+                <a16:creationId xmlns:a16="http://schemas.microsoft.com/office/drawing/2014/main" id="{1FF9B1DE-E8ED-41B9-A459-DEC9CD13ABF6}"/>
+              </a:ext>
+            </a:extLst>
+          </p:cNvPr>
+          <p:cNvSpPr>
+            <a:spLocks xmlns:a="http://schemas.openxmlformats.org/drawingml/2006/main" noGrp="1"/>
+          </p:cNvSpPr>
+          <p:nvPr/>
+        </p:nvSpPr>
+        <p:spPr>
+          <a:xfrm xmlns:a="http://schemas.openxmlformats.org/drawingml/2006/main">
+            <a:off x="8026003" y="0"/>
+            <a:ext cx="1347192" cy="285750"/>
+          </a:xfrm>
+          <a:prstGeom xmlns:a="http://schemas.openxmlformats.org/drawingml/2006/main" prst="roundRect">
+            <a:avLst>
+              <a:gd name="adj" fmla="val 0"/>
+            </a:avLst>
+          </a:prstGeom>
+          <a:solidFill xmlns:a="http://schemas.openxmlformats.org/drawingml/2006/main">
+            <a:srgbClr val="355069"/>
+          </a:solidFill>
+          <a:ln xmlns:a="http://schemas.openxmlformats.org/drawingml/2006/main" w="0">
+            <a:noFill/>
+            <a:prstDash val="solid"/>
+          </a:ln>
+        </p:spPr>
+      </p:sp>
+      <p:sp>
+        <p:nvSpPr>
+          <p:cNvPr id="9" name="top-cape-gradient-8">
+            <a:extLst xmlns:a="http://schemas.openxmlformats.org/drawingml/2006/main">
+              <a:ext uri="{FF2B5EF4-FFF2-40B4-BE49-F238E27FC236}">
+                <a16:creationId xmlns:a16="http://schemas.microsoft.com/office/drawing/2014/main" id="{793AE08B-4361-42FF-A7CA-3BF712783EF4}"/>
+              </a:ext>
+            </a:extLst>
+          </p:cNvPr>
+          <p:cNvSpPr>
+            <a:spLocks xmlns:a="http://schemas.openxmlformats.org/drawingml/2006/main" noGrp="1"/>
+          </p:cNvSpPr>
+          <p:nvPr/>
+        </p:nvSpPr>
+        <p:spPr>
+          <a:xfrm xmlns:a="http://schemas.openxmlformats.org/drawingml/2006/main">
+            <a:off x="9363670" y="0"/>
+            <a:ext cx="1347192" cy="285750"/>
+          </a:xfrm>
+          <a:prstGeom xmlns:a="http://schemas.openxmlformats.org/drawingml/2006/main" prst="roundRect">
+            <a:avLst>
+              <a:gd name="adj" fmla="val 0"/>
+            </a:avLst>
+          </a:prstGeom>
+          <a:solidFill xmlns:a="http://schemas.openxmlformats.org/drawingml/2006/main">
+            <a:srgbClr val="37536D"/>
+          </a:solidFill>
+          <a:ln xmlns:a="http://schemas.openxmlformats.org/drawingml/2006/main" w="0">
+            <a:noFill/>
+            <a:prstDash val="solid"/>
+          </a:ln>
+        </p:spPr>
+      </p:sp>
+      <p:sp>
+        <p:nvSpPr>
+          <p:cNvPr id="10" name="top-cape-gradient-9">
+            <a:extLst xmlns:a="http://schemas.openxmlformats.org/drawingml/2006/main">
+              <a:ext uri="{FF2B5EF4-FFF2-40B4-BE49-F238E27FC236}">
+                <a16:creationId xmlns:a16="http://schemas.microsoft.com/office/drawing/2014/main" id="{64999B61-F90F-4571-B69F-8076705D1FB7}"/>
+              </a:ext>
+            </a:extLst>
+          </p:cNvPr>
+          <p:cNvSpPr>
+            <a:spLocks xmlns:a="http://schemas.openxmlformats.org/drawingml/2006/main" noGrp="1"/>
+          </p:cNvSpPr>
+          <p:nvPr/>
+        </p:nvSpPr>
+        <p:spPr>
+          <a:xfrm xmlns:a="http://schemas.openxmlformats.org/drawingml/2006/main">
+            <a:off x="10701338" y="0"/>
+            <a:ext cx="1347192" cy="285750"/>
+          </a:xfrm>
+          <a:prstGeom xmlns:a="http://schemas.openxmlformats.org/drawingml/2006/main" prst="roundRect">
+            <a:avLst>
+              <a:gd name="adj" fmla="val 0"/>
+            </a:avLst>
+          </a:prstGeom>
+          <a:solidFill xmlns:a="http://schemas.openxmlformats.org/drawingml/2006/main">
+            <a:srgbClr val="395570"/>
+          </a:solidFill>
+          <a:ln xmlns:a="http://schemas.openxmlformats.org/drawingml/2006/main" w="0">
+            <a:noFill/>
+            <a:prstDash val="solid"/>
+          </a:ln>
+        </p:spPr>
+      </p:sp>
+      <p:sp>
+        <p:nvSpPr>
+          <p:cNvPr id="11" name="top-cape-gradient-10">
+            <a:extLst xmlns:a="http://schemas.openxmlformats.org/drawingml/2006/main">
+              <a:ext uri="{FF2B5EF4-FFF2-40B4-BE49-F238E27FC236}">
+                <a16:creationId xmlns:a16="http://schemas.microsoft.com/office/drawing/2014/main" id="{D276DF83-43C4-40F3-9108-1A2D8953E484}"/>
+              </a:ext>
+            </a:extLst>
+          </p:cNvPr>
+          <p:cNvSpPr>
+            <a:spLocks xmlns:a="http://schemas.openxmlformats.org/drawingml/2006/main" noGrp="1"/>
+          </p:cNvSpPr>
+          <p:nvPr/>
+        </p:nvSpPr>
+        <p:spPr>
+          <a:xfrm xmlns:a="http://schemas.openxmlformats.org/drawingml/2006/main">
+            <a:off x="12039005" y="0"/>
+            <a:ext cx="1347192" cy="285750"/>
+          </a:xfrm>
+          <a:prstGeom xmlns:a="http://schemas.openxmlformats.org/drawingml/2006/main" prst="roundRect">
+            <a:avLst>
+              <a:gd name="adj" fmla="val 0"/>
+            </a:avLst>
+          </a:prstGeom>
+          <a:solidFill xmlns:a="http://schemas.openxmlformats.org/drawingml/2006/main">
+            <a:srgbClr val="3B5873"/>
+          </a:solidFill>
+          <a:ln xmlns:a="http://schemas.openxmlformats.org/drawingml/2006/main" w="0">
+            <a:noFill/>
+            <a:prstDash val="solid"/>
+          </a:ln>
+        </p:spPr>
+      </p:sp>
+      <p:sp>
+        <p:nvSpPr>
+          <p:cNvPr id="12" name="top-cape-gradient-11">
+            <a:extLst xmlns:a="http://schemas.openxmlformats.org/drawingml/2006/main">
+              <a:ext uri="{FF2B5EF4-FFF2-40B4-BE49-F238E27FC236}">
+                <a16:creationId xmlns:a16="http://schemas.microsoft.com/office/drawing/2014/main" id="{4C759216-C5A8-4594-AA6C-57D70F0FD4FF}"/>
+              </a:ext>
+            </a:extLst>
+          </p:cNvPr>
+          <p:cNvSpPr>
+            <a:spLocks xmlns:a="http://schemas.openxmlformats.org/drawingml/2006/main" noGrp="1"/>
+          </p:cNvSpPr>
+          <p:nvPr/>
+        </p:nvSpPr>
+        <p:spPr>
+          <a:xfrm xmlns:a="http://schemas.openxmlformats.org/drawingml/2006/main">
+            <a:off x="13376672" y="0"/>
+            <a:ext cx="1347192" cy="285750"/>
+          </a:xfrm>
+          <a:prstGeom xmlns:a="http://schemas.openxmlformats.org/drawingml/2006/main" prst="roundRect">
+            <a:avLst>
+              <a:gd name="adj" fmla="val 0"/>
+            </a:avLst>
+          </a:prstGeom>
+          <a:solidFill xmlns:a="http://schemas.openxmlformats.org/drawingml/2006/main">
+            <a:srgbClr val="3D5B77"/>
+          </a:solidFill>
+          <a:ln xmlns:a="http://schemas.openxmlformats.org/drawingml/2006/main" w="0">
+            <a:noFill/>
+            <a:prstDash val="solid"/>
+          </a:ln>
+        </p:spPr>
+      </p:sp>
+      <p:sp>
+        <p:nvSpPr>
+          <p:cNvPr id="13" name="top-cape-gradient-12">
+            <a:extLst xmlns:a="http://schemas.openxmlformats.org/drawingml/2006/main">
+              <a:ext uri="{FF2B5EF4-FFF2-40B4-BE49-F238E27FC236}">
+                <a16:creationId xmlns:a16="http://schemas.microsoft.com/office/drawing/2014/main" id="{324AC622-B690-4596-B8A5-F91C4E5DB4D7}"/>
+              </a:ext>
+            </a:extLst>
+          </p:cNvPr>
+          <p:cNvSpPr>
+            <a:spLocks xmlns:a="http://schemas.openxmlformats.org/drawingml/2006/main" noGrp="1"/>
+          </p:cNvSpPr>
+          <p:nvPr/>
+        </p:nvSpPr>
+        <p:spPr>
+          <a:xfrm xmlns:a="http://schemas.openxmlformats.org/drawingml/2006/main">
+            <a:off x="14714339" y="0"/>
+            <a:ext cx="1347192" cy="285750"/>
+          </a:xfrm>
+          <a:prstGeom xmlns:a="http://schemas.openxmlformats.org/drawingml/2006/main" prst="roundRect">
+            <a:avLst>
+              <a:gd name="adj" fmla="val 0"/>
+            </a:avLst>
+          </a:prstGeom>
+          <a:solidFill xmlns:a="http://schemas.openxmlformats.org/drawingml/2006/main">
+            <a:srgbClr val="3F5E7B"/>
+          </a:solidFill>
+          <a:ln xmlns:a="http://schemas.openxmlformats.org/drawingml/2006/main" w="0">
+            <a:noFill/>
+            <a:prstDash val="solid"/>
+          </a:ln>
+        </p:spPr>
+      </p:sp>
+      <p:sp>
+        <p:nvSpPr>
+          <p:cNvPr id="14" name="top-cape-gradient-13">
+            <a:extLst xmlns:a="http://schemas.openxmlformats.org/drawingml/2006/main">
+              <a:ext uri="{FF2B5EF4-FFF2-40B4-BE49-F238E27FC236}">
+                <a16:creationId xmlns:a16="http://schemas.microsoft.com/office/drawing/2014/main" id="{BC729C1F-9501-4C17-8520-9B1BE3EFEE67}"/>
+              </a:ext>
+            </a:extLst>
+          </p:cNvPr>
+          <p:cNvSpPr>
+            <a:spLocks xmlns:a="http://schemas.openxmlformats.org/drawingml/2006/main" noGrp="1"/>
+          </p:cNvSpPr>
+          <p:nvPr/>
+        </p:nvSpPr>
+        <p:spPr>
+          <a:xfrm xmlns:a="http://schemas.openxmlformats.org/drawingml/2006/main">
+            <a:off x="16052006" y="0"/>
+            <a:ext cx="1347192" cy="285750"/>
+          </a:xfrm>
+          <a:prstGeom xmlns:a="http://schemas.openxmlformats.org/drawingml/2006/main" prst="roundRect">
+            <a:avLst>
+              <a:gd name="adj" fmla="val 0"/>
+            </a:avLst>
+          </a:prstGeom>
+          <a:solidFill xmlns:a="http://schemas.openxmlformats.org/drawingml/2006/main">
+            <a:srgbClr val="40617F"/>
+          </a:solidFill>
+          <a:ln xmlns:a="http://schemas.openxmlformats.org/drawingml/2006/main" w="0">
+            <a:noFill/>
+            <a:prstDash val="solid"/>
+          </a:ln>
+        </p:spPr>
+      </p:sp>
+      <p:sp>
+        <p:nvSpPr>
+          <p:cNvPr id="15" name="top-cape-gradient-14">
+            <a:extLst xmlns:a="http://schemas.openxmlformats.org/drawingml/2006/main">
+              <a:ext uri="{FF2B5EF4-FFF2-40B4-BE49-F238E27FC236}">
+                <a16:creationId xmlns:a16="http://schemas.microsoft.com/office/drawing/2014/main" id="{6147E16F-8FD3-4F47-B980-2D33A37A2918}"/>
+              </a:ext>
+            </a:extLst>
+          </p:cNvPr>
+          <p:cNvSpPr>
+            <a:spLocks xmlns:a="http://schemas.openxmlformats.org/drawingml/2006/main" noGrp="1"/>
+          </p:cNvSpPr>
+          <p:nvPr/>
+        </p:nvSpPr>
+        <p:spPr>
+          <a:xfrm xmlns:a="http://schemas.openxmlformats.org/drawingml/2006/main">
+            <a:off x="17389673" y="0"/>
+            <a:ext cx="1347192" cy="285750"/>
+          </a:xfrm>
+          <a:prstGeom xmlns:a="http://schemas.openxmlformats.org/drawingml/2006/main" prst="roundRect">
+            <a:avLst>
+              <a:gd name="adj" fmla="val 0"/>
+            </a:avLst>
+          </a:prstGeom>
+          <a:solidFill xmlns:a="http://schemas.openxmlformats.org/drawingml/2006/main">
+            <a:srgbClr val="416483"/>
+          </a:solidFill>
+          <a:ln xmlns:a="http://schemas.openxmlformats.org/drawingml/2006/main" w="0">
+            <a:noFill/>
+            <a:prstDash val="solid"/>
+          </a:ln>
+        </p:spPr>
+      </p:sp>
+      <p:sp>
+        <p:nvSpPr>
+          <p:cNvPr id="16" name="top-cape-gradient-15">
+            <a:extLst xmlns:a="http://schemas.openxmlformats.org/drawingml/2006/main">
+              <a:ext uri="{FF2B5EF4-FFF2-40B4-BE49-F238E27FC236}">
+                <a16:creationId xmlns:a16="http://schemas.microsoft.com/office/drawing/2014/main" id="{E2360766-9D83-4848-830D-A3D736CD11CA}"/>
+              </a:ext>
+            </a:extLst>
+          </p:cNvPr>
+          <p:cNvSpPr>
+            <a:spLocks xmlns:a="http://schemas.openxmlformats.org/drawingml/2006/main" noGrp="1"/>
+          </p:cNvSpPr>
+          <p:nvPr/>
+        </p:nvSpPr>
+        <p:spPr>
+          <a:xfrm xmlns:a="http://schemas.openxmlformats.org/drawingml/2006/main">
+            <a:off x="18727341" y="0"/>
+            <a:ext cx="1347192" cy="285750"/>
+          </a:xfrm>
+          <a:prstGeom xmlns:a="http://schemas.openxmlformats.org/drawingml/2006/main" prst="roundRect">
+            <a:avLst>
+              <a:gd name="adj" fmla="val 0"/>
+            </a:avLst>
+          </a:prstGeom>
+          <a:solidFill xmlns:a="http://schemas.openxmlformats.org/drawingml/2006/main">
+            <a:srgbClr val="426787"/>
+          </a:solidFill>
+          <a:ln xmlns:a="http://schemas.openxmlformats.org/drawingml/2006/main" w="0">
+            <a:noFill/>
+            <a:prstDash val="solid"/>
+          </a:ln>
+        </p:spPr>
+      </p:sp>
+      <p:sp>
+        <p:nvSpPr>
+          <p:cNvPr id="17" name="top-cape-gradient-16">
+            <a:extLst xmlns:a="http://schemas.openxmlformats.org/drawingml/2006/main">
+              <a:ext uri="{FF2B5EF4-FFF2-40B4-BE49-F238E27FC236}">
+                <a16:creationId xmlns:a16="http://schemas.microsoft.com/office/drawing/2014/main" id="{5AC3E7E2-87ED-4004-A094-0D696E9C1D51}"/>
+              </a:ext>
+            </a:extLst>
+          </p:cNvPr>
+          <p:cNvSpPr>
+            <a:spLocks xmlns:a="http://schemas.openxmlformats.org/drawingml/2006/main" noGrp="1"/>
+          </p:cNvSpPr>
+          <p:nvPr/>
+        </p:nvSpPr>
+        <p:spPr>
+          <a:xfrm xmlns:a="http://schemas.openxmlformats.org/drawingml/2006/main">
+            <a:off x="20065008" y="0"/>
+            <a:ext cx="1347192" cy="285750"/>
+          </a:xfrm>
+          <a:prstGeom xmlns:a="http://schemas.openxmlformats.org/drawingml/2006/main" prst="roundRect">
+            <a:avLst>
+              <a:gd name="adj" fmla="val 0"/>
+            </a:avLst>
+          </a:prstGeom>
+          <a:solidFill xmlns:a="http://schemas.openxmlformats.org/drawingml/2006/main">
+            <a:srgbClr val="436A8B"/>
+          </a:solidFill>
+          <a:ln xmlns:a="http://schemas.openxmlformats.org/drawingml/2006/main" w="0">
+            <a:noFill/>
+            <a:prstDash val="solid"/>
+          </a:ln>
+        </p:spPr>
+      </p:sp>
+      <p:sp>
+        <p:nvSpPr>
+          <p:cNvPr id="18" name="top-cape-gradient-17">
+            <a:extLst xmlns:a="http://schemas.openxmlformats.org/drawingml/2006/main">
+              <a:ext uri="{FF2B5EF4-FFF2-40B4-BE49-F238E27FC236}">
+                <a16:creationId xmlns:a16="http://schemas.microsoft.com/office/drawing/2014/main" id="{85FF1A15-1DB8-45EF-88F5-68DF6B0827F6}"/>
+              </a:ext>
+            </a:extLst>
+          </p:cNvPr>
+          <p:cNvSpPr>
+            <a:spLocks xmlns:a="http://schemas.openxmlformats.org/drawingml/2006/main" noGrp="1"/>
+          </p:cNvSpPr>
+          <p:nvPr/>
+        </p:nvSpPr>
+        <p:spPr>
+          <a:xfrm xmlns:a="http://schemas.openxmlformats.org/drawingml/2006/main">
+            <a:off x="21402675" y="0"/>
+            <a:ext cx="1347192" cy="285750"/>
+          </a:xfrm>
+          <a:prstGeom xmlns:a="http://schemas.openxmlformats.org/drawingml/2006/main" prst="roundRect">
+            <a:avLst>
+              <a:gd name="adj" fmla="val 0"/>
+            </a:avLst>
+          </a:prstGeom>
+          <a:solidFill xmlns:a="http://schemas.openxmlformats.org/drawingml/2006/main">
+            <a:srgbClr val="436C8E"/>
+          </a:solidFill>
+          <a:ln xmlns:a="http://schemas.openxmlformats.org/drawingml/2006/main" w="0">
+            <a:noFill/>
+            <a:prstDash val="solid"/>
+          </a:ln>
+        </p:spPr>
+      </p:sp>
+      <p:sp>
+        <p:nvSpPr>
+          <p:cNvPr id="19" name="top-cape-gradient-18">
+            <a:extLst xmlns:a="http://schemas.openxmlformats.org/drawingml/2006/main">
+              <a:ext uri="{FF2B5EF4-FFF2-40B4-BE49-F238E27FC236}">
+                <a16:creationId xmlns:a16="http://schemas.microsoft.com/office/drawing/2014/main" id="{119548F2-DC8D-4FDA-B728-7638F3F3FB3F}"/>
+              </a:ext>
+            </a:extLst>
+          </p:cNvPr>
+          <p:cNvSpPr>
+            <a:spLocks xmlns:a="http://schemas.openxmlformats.org/drawingml/2006/main" noGrp="1"/>
+          </p:cNvSpPr>
+          <p:nvPr/>
+        </p:nvSpPr>
+        <p:spPr>
+          <a:xfrm xmlns:a="http://schemas.openxmlformats.org/drawingml/2006/main">
+            <a:off x="22740342" y="0"/>
+            <a:ext cx="1347192" cy="285750"/>
+          </a:xfrm>
+          <a:prstGeom xmlns:a="http://schemas.openxmlformats.org/drawingml/2006/main" prst="roundRect">
+            <a:avLst>
+              <a:gd name="adj" fmla="val 0"/>
+            </a:avLst>
+          </a:prstGeom>
+          <a:solidFill xmlns:a="http://schemas.openxmlformats.org/drawingml/2006/main">
+            <a:srgbClr val="446F92"/>
+          </a:solidFill>
+          <a:ln xmlns:a="http://schemas.openxmlformats.org/drawingml/2006/main" w="0">
+            <a:noFill/>
+            <a:prstDash val="solid"/>
+          </a:ln>
+        </p:spPr>
+      </p:sp>
+      <p:sp>
+        <p:nvSpPr>
+          <p:cNvPr id="20" name="top-cape-gradient-19">
+            <a:extLst xmlns:a="http://schemas.openxmlformats.org/drawingml/2006/main">
+              <a:ext uri="{FF2B5EF4-FFF2-40B4-BE49-F238E27FC236}">
+                <a16:creationId xmlns:a16="http://schemas.microsoft.com/office/drawing/2014/main" id="{1E2910AA-C236-48BB-B6EB-9264FBC1C81F}"/>
+              </a:ext>
+            </a:extLst>
+          </p:cNvPr>
+          <p:cNvSpPr>
+            <a:spLocks xmlns:a="http://schemas.openxmlformats.org/drawingml/2006/main" noGrp="1"/>
+          </p:cNvSpPr>
+          <p:nvPr/>
+        </p:nvSpPr>
+        <p:spPr>
+          <a:xfrm xmlns:a="http://schemas.openxmlformats.org/drawingml/2006/main">
+            <a:off x="24078009" y="0"/>
+            <a:ext cx="1347192" cy="285750"/>
+          </a:xfrm>
+          <a:prstGeom xmlns:a="http://schemas.openxmlformats.org/drawingml/2006/main" prst="roundRect">
+            <a:avLst>
+              <a:gd name="adj" fmla="val 0"/>
+            </a:avLst>
+          </a:prstGeom>
+          <a:solidFill xmlns:a="http://schemas.openxmlformats.org/drawingml/2006/main">
+            <a:srgbClr val="457296"/>
+          </a:solidFill>
+          <a:ln xmlns:a="http://schemas.openxmlformats.org/drawingml/2006/main" w="0">
+            <a:noFill/>
+            <a:prstDash val="solid"/>
+          </a:ln>
+        </p:spPr>
+      </p:sp>
+      <p:sp>
+        <p:nvSpPr>
+          <p:cNvPr id="21" name="top-cape-gradient-20">
+            <a:extLst xmlns:a="http://schemas.openxmlformats.org/drawingml/2006/main">
+              <a:ext uri="{FF2B5EF4-FFF2-40B4-BE49-F238E27FC236}">
+                <a16:creationId xmlns:a16="http://schemas.microsoft.com/office/drawing/2014/main" id="{4940D176-A33C-40DA-929D-2DB7A4148B7A}"/>
+              </a:ext>
+            </a:extLst>
+          </p:cNvPr>
+          <p:cNvSpPr>
+            <a:spLocks xmlns:a="http://schemas.openxmlformats.org/drawingml/2006/main" noGrp="1"/>
+          </p:cNvSpPr>
+          <p:nvPr/>
+        </p:nvSpPr>
+        <p:spPr>
+          <a:xfrm xmlns:a="http://schemas.openxmlformats.org/drawingml/2006/main">
+            <a:off x="25415677" y="0"/>
+            <a:ext cx="1347192" cy="285750"/>
+          </a:xfrm>
+          <a:prstGeom xmlns:a="http://schemas.openxmlformats.org/drawingml/2006/main" prst="roundRect">
+            <a:avLst>
+              <a:gd name="adj" fmla="val 0"/>
+            </a:avLst>
+          </a:prstGeom>
+          <a:solidFill xmlns:a="http://schemas.openxmlformats.org/drawingml/2006/main">
+            <a:srgbClr val="46759A"/>
+          </a:solidFill>
+          <a:ln xmlns:a="http://schemas.openxmlformats.org/drawingml/2006/main" w="0">
+            <a:noFill/>
+            <a:prstDash val="solid"/>
+          </a:ln>
+        </p:spPr>
+      </p:sp>
+      <p:sp>
+        <p:nvSpPr>
+          <p:cNvPr id="22" name="top-cape-gradient-21">
+            <a:extLst xmlns:a="http://schemas.openxmlformats.org/drawingml/2006/main">
+              <a:ext uri="{FF2B5EF4-FFF2-40B4-BE49-F238E27FC236}">
+                <a16:creationId xmlns:a16="http://schemas.microsoft.com/office/drawing/2014/main" id="{42C0A5A2-91F4-480F-A296-0625633239A3}"/>
+              </a:ext>
+            </a:extLst>
+          </p:cNvPr>
+          <p:cNvSpPr>
+            <a:spLocks xmlns:a="http://schemas.openxmlformats.org/drawingml/2006/main" noGrp="1"/>
+          </p:cNvSpPr>
+          <p:nvPr/>
+        </p:nvSpPr>
+        <p:spPr>
+          <a:xfrm xmlns:a="http://schemas.openxmlformats.org/drawingml/2006/main">
+            <a:off x="26753344" y="0"/>
+            <a:ext cx="1347192" cy="285750"/>
+          </a:xfrm>
+          <a:prstGeom xmlns:a="http://schemas.openxmlformats.org/drawingml/2006/main" prst="roundRect">
+            <a:avLst>
+              <a:gd name="adj" fmla="val 0"/>
+            </a:avLst>
+          </a:prstGeom>
+          <a:solidFill xmlns:a="http://schemas.openxmlformats.org/drawingml/2006/main">
+            <a:srgbClr val="47789E"/>
+          </a:solidFill>
+          <a:ln xmlns:a="http://schemas.openxmlformats.org/drawingml/2006/main" w="0">
+            <a:noFill/>
+            <a:prstDash val="solid"/>
+          </a:ln>
+        </p:spPr>
+      </p:sp>
+      <p:sp>
+        <p:nvSpPr>
+          <p:cNvPr id="23" name="top-cape-gradient-22">
+            <a:extLst xmlns:a="http://schemas.openxmlformats.org/drawingml/2006/main">
+              <a:ext uri="{FF2B5EF4-FFF2-40B4-BE49-F238E27FC236}">
+                <a16:creationId xmlns:a16="http://schemas.microsoft.com/office/drawing/2014/main" id="{0B9D9614-6B1A-4EED-BF92-75963D180192}"/>
+              </a:ext>
+            </a:extLst>
+          </p:cNvPr>
+          <p:cNvSpPr>
+            <a:spLocks xmlns:a="http://schemas.openxmlformats.org/drawingml/2006/main" noGrp="1"/>
+          </p:cNvSpPr>
+          <p:nvPr/>
+        </p:nvSpPr>
+        <p:spPr>
+          <a:xfrm xmlns:a="http://schemas.openxmlformats.org/drawingml/2006/main">
+            <a:off x="28091011" y="0"/>
+            <a:ext cx="1347192" cy="285750"/>
+          </a:xfrm>
+          <a:prstGeom xmlns:a="http://schemas.openxmlformats.org/drawingml/2006/main" prst="roundRect">
+            <a:avLst>
+              <a:gd name="adj" fmla="val 0"/>
+            </a:avLst>
+          </a:prstGeom>
+          <a:solidFill xmlns:a="http://schemas.openxmlformats.org/drawingml/2006/main">
+            <a:srgbClr val="4A7CA2"/>
+          </a:solidFill>
+          <a:ln xmlns:a="http://schemas.openxmlformats.org/drawingml/2006/main" w="0">
+            <a:noFill/>
+            <a:prstDash val="solid"/>
+          </a:ln>
+        </p:spPr>
+      </p:sp>
+      <p:sp>
+        <p:nvSpPr>
+          <p:cNvPr id="24" name="top-cape-gradient-23">
+            <a:extLst xmlns:a="http://schemas.openxmlformats.org/drawingml/2006/main">
+              <a:ext uri="{FF2B5EF4-FFF2-40B4-BE49-F238E27FC236}">
+                <a16:creationId xmlns:a16="http://schemas.microsoft.com/office/drawing/2014/main" id="{C53F7D9F-89AE-4A4B-96B3-6DBF701A1303}"/>
+              </a:ext>
+            </a:extLst>
+          </p:cNvPr>
+          <p:cNvSpPr>
+            <a:spLocks xmlns:a="http://schemas.openxmlformats.org/drawingml/2006/main" noGrp="1"/>
+          </p:cNvSpPr>
+          <p:nvPr/>
+        </p:nvSpPr>
+        <p:spPr>
+          <a:xfrm xmlns:a="http://schemas.openxmlformats.org/drawingml/2006/main">
+            <a:off x="29428678" y="0"/>
+            <a:ext cx="1347192" cy="285750"/>
+          </a:xfrm>
+          <a:prstGeom xmlns:a="http://schemas.openxmlformats.org/drawingml/2006/main" prst="roundRect">
+            <a:avLst>
+              <a:gd name="adj" fmla="val 0"/>
+            </a:avLst>
+          </a:prstGeom>
+          <a:solidFill xmlns:a="http://schemas.openxmlformats.org/drawingml/2006/main">
+            <a:srgbClr val="5082A6"/>
+          </a:solidFill>
+          <a:ln xmlns:a="http://schemas.openxmlformats.org/drawingml/2006/main" w="0">
+            <a:noFill/>
+            <a:prstDash val="solid"/>
+          </a:ln>
+        </p:spPr>
+      </p:sp>
+      <p:sp>
+        <p:nvSpPr>
+          <p:cNvPr id="25" name="top-cape-gradient-24">
+            <a:extLst xmlns:a="http://schemas.openxmlformats.org/drawingml/2006/main">
+              <a:ext uri="{FF2B5EF4-FFF2-40B4-BE49-F238E27FC236}">
+                <a16:creationId xmlns:a16="http://schemas.microsoft.com/office/drawing/2014/main" id="{6370485A-C6EB-4E0C-A1DE-B889537B8E55}"/>
+              </a:ext>
+            </a:extLst>
+          </p:cNvPr>
+          <p:cNvSpPr>
+            <a:spLocks xmlns:a="http://schemas.openxmlformats.org/drawingml/2006/main" noGrp="1"/>
+          </p:cNvSpPr>
+          <p:nvPr/>
+        </p:nvSpPr>
+        <p:spPr>
+          <a:xfrm xmlns:a="http://schemas.openxmlformats.org/drawingml/2006/main">
+            <a:off x="30766345" y="0"/>
+            <a:ext cx="1347192" cy="285750"/>
+          </a:xfrm>
+          <a:prstGeom xmlns:a="http://schemas.openxmlformats.org/drawingml/2006/main" prst="roundRect">
+            <a:avLst>
+              <a:gd name="adj" fmla="val 0"/>
+            </a:avLst>
+          </a:prstGeom>
+          <a:solidFill xmlns:a="http://schemas.openxmlformats.org/drawingml/2006/main">
+            <a:srgbClr val="5788AA"/>
+          </a:solidFill>
+          <a:ln xmlns:a="http://schemas.openxmlformats.org/drawingml/2006/main" w="0">
+            <a:noFill/>
+            <a:prstDash val="solid"/>
+          </a:ln>
+        </p:spPr>
+      </p:sp>
+      <p:sp>
+        <p:nvSpPr>
+          <p:cNvPr id="26" name="top-cape-gradient-25">
+            <a:extLst xmlns:a="http://schemas.openxmlformats.org/drawingml/2006/main">
+              <a:ext uri="{FF2B5EF4-FFF2-40B4-BE49-F238E27FC236}">
+                <a16:creationId xmlns:a16="http://schemas.microsoft.com/office/drawing/2014/main" id="{992AC921-A419-4671-A87A-F9A7214CFDAE}"/>
+              </a:ext>
+            </a:extLst>
+          </p:cNvPr>
+          <p:cNvSpPr>
+            <a:spLocks xmlns:a="http://schemas.openxmlformats.org/drawingml/2006/main" noGrp="1"/>
+          </p:cNvSpPr>
+          <p:nvPr/>
+        </p:nvSpPr>
+        <p:spPr>
+          <a:xfrm xmlns:a="http://schemas.openxmlformats.org/drawingml/2006/main">
+            <a:off x="32104013" y="0"/>
+            <a:ext cx="1347192" cy="285750"/>
+          </a:xfrm>
+          <a:prstGeom xmlns:a="http://schemas.openxmlformats.org/drawingml/2006/main" prst="roundRect">
+            <a:avLst>
+              <a:gd name="adj" fmla="val 0"/>
+            </a:avLst>
+          </a:prstGeom>
+          <a:solidFill xmlns:a="http://schemas.openxmlformats.org/drawingml/2006/main">
+            <a:srgbClr val="5D8EAE"/>
+          </a:solidFill>
+          <a:ln xmlns:a="http://schemas.openxmlformats.org/drawingml/2006/main" w="0">
+            <a:noFill/>
+            <a:prstDash val="solid"/>
+          </a:ln>
+        </p:spPr>
+      </p:sp>
+      <p:sp>
+        <p:nvSpPr>
+          <p:cNvPr id="27" name="top-cape-gradient-26">
+            <a:extLst xmlns:a="http://schemas.openxmlformats.org/drawingml/2006/main">
+              <a:ext uri="{FF2B5EF4-FFF2-40B4-BE49-F238E27FC236}">
+                <a16:creationId xmlns:a16="http://schemas.microsoft.com/office/drawing/2014/main" id="{4C362996-F8A9-41C5-9AEE-507263732FDE}"/>
+              </a:ext>
+            </a:extLst>
+          </p:cNvPr>
+          <p:cNvSpPr>
+            <a:spLocks xmlns:a="http://schemas.openxmlformats.org/drawingml/2006/main" noGrp="1"/>
+          </p:cNvSpPr>
+          <p:nvPr/>
+        </p:nvSpPr>
+        <p:spPr>
+          <a:xfrm xmlns:a="http://schemas.openxmlformats.org/drawingml/2006/main">
+            <a:off x="33441680" y="0"/>
+            <a:ext cx="1347192" cy="285750"/>
+          </a:xfrm>
+          <a:prstGeom xmlns:a="http://schemas.openxmlformats.org/drawingml/2006/main" prst="roundRect">
+            <a:avLst>
+              <a:gd name="adj" fmla="val 0"/>
+            </a:avLst>
+          </a:prstGeom>
+          <a:solidFill xmlns:a="http://schemas.openxmlformats.org/drawingml/2006/main">
+            <a:srgbClr val="6394B2"/>
+          </a:solidFill>
+          <a:ln xmlns:a="http://schemas.openxmlformats.org/drawingml/2006/main" w="0">
+            <a:noFill/>
+            <a:prstDash val="solid"/>
+          </a:ln>
+        </p:spPr>
+      </p:sp>
+      <p:sp>
+        <p:nvSpPr>
+          <p:cNvPr id="28" name="top-cape-gradient-27">
+            <a:extLst xmlns:a="http://schemas.openxmlformats.org/drawingml/2006/main">
+              <a:ext uri="{FF2B5EF4-FFF2-40B4-BE49-F238E27FC236}">
+                <a16:creationId xmlns:a16="http://schemas.microsoft.com/office/drawing/2014/main" id="{4F76D274-80AF-4447-87A5-DF2561E4AF31}"/>
+              </a:ext>
+            </a:extLst>
+          </p:cNvPr>
+          <p:cNvSpPr>
+            <a:spLocks xmlns:a="http://schemas.openxmlformats.org/drawingml/2006/main" noGrp="1"/>
+          </p:cNvSpPr>
+          <p:nvPr/>
+        </p:nvSpPr>
+        <p:spPr>
+          <a:xfrm xmlns:a="http://schemas.openxmlformats.org/drawingml/2006/main">
+            <a:off x="34779347" y="0"/>
+            <a:ext cx="1347192" cy="285750"/>
+          </a:xfrm>
+          <a:prstGeom xmlns:a="http://schemas.openxmlformats.org/drawingml/2006/main" prst="roundRect">
+            <a:avLst>
+              <a:gd name="adj" fmla="val 0"/>
+            </a:avLst>
+          </a:prstGeom>
+          <a:solidFill xmlns:a="http://schemas.openxmlformats.org/drawingml/2006/main">
+            <a:srgbClr val="6A9AB6"/>
+          </a:solidFill>
+          <a:ln xmlns:a="http://schemas.openxmlformats.org/drawingml/2006/main" w="0">
+            <a:noFill/>
+            <a:prstDash val="solid"/>
+          </a:ln>
+        </p:spPr>
+      </p:sp>
+      <p:sp>
+        <p:nvSpPr>
+          <p:cNvPr id="29" name="top-cape-gradient-28">
+            <a:extLst xmlns:a="http://schemas.openxmlformats.org/drawingml/2006/main">
+              <a:ext uri="{FF2B5EF4-FFF2-40B4-BE49-F238E27FC236}">
+                <a16:creationId xmlns:a16="http://schemas.microsoft.com/office/drawing/2014/main" id="{B559E937-3CBE-4800-A78E-3EB40DA88C63}"/>
+              </a:ext>
+            </a:extLst>
+          </p:cNvPr>
+          <p:cNvSpPr>
+            <a:spLocks xmlns:a="http://schemas.openxmlformats.org/drawingml/2006/main" noGrp="1"/>
+          </p:cNvSpPr>
+          <p:nvPr/>
+        </p:nvSpPr>
+        <p:spPr>
+          <a:xfrm xmlns:a="http://schemas.openxmlformats.org/drawingml/2006/main">
+            <a:off x="36117014" y="0"/>
+            <a:ext cx="1347192" cy="285750"/>
+          </a:xfrm>
+          <a:prstGeom xmlns:a="http://schemas.openxmlformats.org/drawingml/2006/main" prst="roundRect">
+            <a:avLst>
+              <a:gd name="adj" fmla="val 0"/>
+            </a:avLst>
+          </a:prstGeom>
+          <a:solidFill xmlns:a="http://schemas.openxmlformats.org/drawingml/2006/main">
+            <a:srgbClr val="70A0BA"/>
+          </a:solidFill>
+          <a:ln xmlns:a="http://schemas.openxmlformats.org/drawingml/2006/main" w="0">
+            <a:noFill/>
+            <a:prstDash val="solid"/>
+          </a:ln>
+        </p:spPr>
+      </p:sp>
+      <p:sp>
+        <p:nvSpPr>
+          <p:cNvPr id="30" name="top-cape-gradient-29">
+            <a:extLst xmlns:a="http://schemas.openxmlformats.org/drawingml/2006/main">
+              <a:ext uri="{FF2B5EF4-FFF2-40B4-BE49-F238E27FC236}">
+                <a16:creationId xmlns:a16="http://schemas.microsoft.com/office/drawing/2014/main" id="{AEE4CEAB-EA77-46E8-8EB8-A19C32B0D47E}"/>
+              </a:ext>
+            </a:extLst>
+          </p:cNvPr>
+          <p:cNvSpPr>
+            <a:spLocks xmlns:a="http://schemas.openxmlformats.org/drawingml/2006/main" noGrp="1"/>
+          </p:cNvSpPr>
+          <p:nvPr/>
+        </p:nvSpPr>
+        <p:spPr>
+          <a:xfrm xmlns:a="http://schemas.openxmlformats.org/drawingml/2006/main">
+            <a:off x="37454681" y="0"/>
+            <a:ext cx="1347192" cy="285750"/>
+          </a:xfrm>
+          <a:prstGeom xmlns:a="http://schemas.openxmlformats.org/drawingml/2006/main" prst="roundRect">
+            <a:avLst>
+              <a:gd name="adj" fmla="val 0"/>
+            </a:avLst>
+          </a:prstGeom>
+          <a:solidFill xmlns:a="http://schemas.openxmlformats.org/drawingml/2006/main">
+            <a:srgbClr val="76A6BD"/>
+          </a:solidFill>
+          <a:ln xmlns:a="http://schemas.openxmlformats.org/drawingml/2006/main" w="0">
+            <a:noFill/>
+            <a:prstDash val="solid"/>
+          </a:ln>
+        </p:spPr>
+      </p:sp>
+      <p:sp>
+        <p:nvSpPr>
+          <p:cNvPr id="31" name="top-cape-gradient-30">
+            <a:extLst xmlns:a="http://schemas.openxmlformats.org/drawingml/2006/main">
+              <a:ext uri="{FF2B5EF4-FFF2-40B4-BE49-F238E27FC236}">
+                <a16:creationId xmlns:a16="http://schemas.microsoft.com/office/drawing/2014/main" id="{567F8B42-1541-4702-B15D-E46985C5BC2B}"/>
+              </a:ext>
+            </a:extLst>
+          </p:cNvPr>
+          <p:cNvSpPr>
+            <a:spLocks xmlns:a="http://schemas.openxmlformats.org/drawingml/2006/main" noGrp="1"/>
+          </p:cNvSpPr>
+          <p:nvPr/>
+        </p:nvSpPr>
+        <p:spPr>
+          <a:xfrm xmlns:a="http://schemas.openxmlformats.org/drawingml/2006/main">
+            <a:off x="38792348" y="0"/>
+            <a:ext cx="1347192" cy="285750"/>
+          </a:xfrm>
+          <a:prstGeom xmlns:a="http://schemas.openxmlformats.org/drawingml/2006/main" prst="roundRect">
+            <a:avLst>
+              <a:gd name="adj" fmla="val 0"/>
+            </a:avLst>
+          </a:prstGeom>
+          <a:solidFill xmlns:a="http://schemas.openxmlformats.org/drawingml/2006/main">
+            <a:srgbClr val="7CACC1"/>
+          </a:solidFill>
+          <a:ln xmlns:a="http://schemas.openxmlformats.org/drawingml/2006/main" w="0">
+            <a:noFill/>
+            <a:prstDash val="solid"/>
+          </a:ln>
+        </p:spPr>
+      </p:sp>
+      <p:sp>
+        <p:nvSpPr>
+          <p:cNvPr id="32" name="top-cape-gradient-31">
+            <a:extLst xmlns:a="http://schemas.openxmlformats.org/drawingml/2006/main">
+              <a:ext uri="{FF2B5EF4-FFF2-40B4-BE49-F238E27FC236}">
+                <a16:creationId xmlns:a16="http://schemas.microsoft.com/office/drawing/2014/main" id="{B8325059-EADD-49EF-A8C3-5D2113D9AEED}"/>
+              </a:ext>
+            </a:extLst>
+          </p:cNvPr>
+          <p:cNvSpPr>
+            <a:spLocks xmlns:a="http://schemas.openxmlformats.org/drawingml/2006/main" noGrp="1"/>
+          </p:cNvSpPr>
+          <p:nvPr/>
+        </p:nvSpPr>
+        <p:spPr>
+          <a:xfrm xmlns:a="http://schemas.openxmlformats.org/drawingml/2006/main">
+            <a:off x="40130016" y="0"/>
+            <a:ext cx="1347192" cy="285750"/>
+          </a:xfrm>
+          <a:prstGeom xmlns:a="http://schemas.openxmlformats.org/drawingml/2006/main" prst="roundRect">
+            <a:avLst>
+              <a:gd name="adj" fmla="val 0"/>
+            </a:avLst>
+          </a:prstGeom>
+          <a:solidFill xmlns:a="http://schemas.openxmlformats.org/drawingml/2006/main">
+            <a:srgbClr val="83B2C5"/>
+          </a:solidFill>
+          <a:ln xmlns:a="http://schemas.openxmlformats.org/drawingml/2006/main" w="0">
+            <a:noFill/>
+            <a:prstDash val="solid"/>
+          </a:ln>
+        </p:spPr>
+      </p:sp>
+      <p:sp>
+        <p:nvSpPr>
+          <p:cNvPr id="33" name="top-cape-gradient-32">
+            <a:extLst xmlns:a="http://schemas.openxmlformats.org/drawingml/2006/main">
+              <a:ext uri="{FF2B5EF4-FFF2-40B4-BE49-F238E27FC236}">
+                <a16:creationId xmlns:a16="http://schemas.microsoft.com/office/drawing/2014/main" id="{9DC9DAA1-B38F-49BB-B89B-D6172187DAB8}"/>
+              </a:ext>
+            </a:extLst>
+          </p:cNvPr>
+          <p:cNvSpPr>
+            <a:spLocks xmlns:a="http://schemas.openxmlformats.org/drawingml/2006/main" noGrp="1"/>
+          </p:cNvSpPr>
+          <p:nvPr/>
+        </p:nvSpPr>
+        <p:spPr>
+          <a:xfrm xmlns:a="http://schemas.openxmlformats.org/drawingml/2006/main">
+            <a:off x="41467683" y="0"/>
+            <a:ext cx="1347192" cy="285750"/>
+          </a:xfrm>
+          <a:prstGeom xmlns:a="http://schemas.openxmlformats.org/drawingml/2006/main" prst="roundRect">
+            <a:avLst>
+              <a:gd name="adj" fmla="val 0"/>
+            </a:avLst>
+          </a:prstGeom>
+          <a:solidFill xmlns:a="http://schemas.openxmlformats.org/drawingml/2006/main">
+            <a:srgbClr val="89B8C9"/>
+          </a:solidFill>
+          <a:ln xmlns:a="http://schemas.openxmlformats.org/drawingml/2006/main" w="0">
+            <a:noFill/>
+            <a:prstDash val="solid"/>
+          </a:ln>
+        </p:spPr>
+      </p:sp>
+      <p:sp>
+        <p:nvSpPr>
+          <p:cNvPr id="34" name="header-cape-gradient-1">
+            <a:extLst xmlns:a="http://schemas.openxmlformats.org/drawingml/2006/main">
+              <a:ext uri="{FF2B5EF4-FFF2-40B4-BE49-F238E27FC236}">
+                <a16:creationId xmlns:a16="http://schemas.microsoft.com/office/drawing/2014/main" id="{8DD7A3EC-4489-4C93-8EF9-1EC7A1EAC7D7}"/>
+              </a:ext>
+            </a:extLst>
+          </p:cNvPr>
+          <p:cNvSpPr>
+            <a:spLocks xmlns:a="http://schemas.openxmlformats.org/drawingml/2006/main" noGrp="1"/>
+          </p:cNvSpPr>
+          <p:nvPr/>
+        </p:nvSpPr>
+        <p:spPr>
+          <a:xfrm xmlns:a="http://schemas.openxmlformats.org/drawingml/2006/main">
+            <a:off x="0" y="4667250"/>
+            <a:ext cx="1347192" cy="285750"/>
+          </a:xfrm>
+          <a:prstGeom xmlns:a="http://schemas.openxmlformats.org/drawingml/2006/main" prst="roundRect">
+            <a:avLst>
+              <a:gd name="adj" fmla="val 0"/>
+            </a:avLst>
+          </a:prstGeom>
+          <a:solidFill xmlns:a="http://schemas.openxmlformats.org/drawingml/2006/main">
+            <a:srgbClr val="293F55"/>
+          </a:solidFill>
+          <a:ln xmlns:a="http://schemas.openxmlformats.org/drawingml/2006/main" w="0">
+            <a:noFill/>
+            <a:prstDash val="solid"/>
+          </a:ln>
+        </p:spPr>
+      </p:sp>
+      <p:sp>
+        <p:nvSpPr>
+          <p:cNvPr id="35" name="header-cape-gradient-2">
+            <a:extLst xmlns:a="http://schemas.openxmlformats.org/drawingml/2006/main">
+              <a:ext uri="{FF2B5EF4-FFF2-40B4-BE49-F238E27FC236}">
+                <a16:creationId xmlns:a16="http://schemas.microsoft.com/office/drawing/2014/main" id="{25BDD68B-0A81-4D83-8BD9-D22304A9590E}"/>
+              </a:ext>
+            </a:extLst>
+          </p:cNvPr>
+          <p:cNvSpPr>
+            <a:spLocks xmlns:a="http://schemas.openxmlformats.org/drawingml/2006/main" noGrp="1"/>
+          </p:cNvSpPr>
+          <p:nvPr/>
+        </p:nvSpPr>
+        <p:spPr>
+          <a:xfrm xmlns:a="http://schemas.openxmlformats.org/drawingml/2006/main">
+            <a:off x="1337667" y="4667250"/>
+            <a:ext cx="1347192" cy="285750"/>
+          </a:xfrm>
+          <a:prstGeom xmlns:a="http://schemas.openxmlformats.org/drawingml/2006/main" prst="roundRect">
+            <a:avLst>
+              <a:gd name="adj" fmla="val 0"/>
+            </a:avLst>
+          </a:prstGeom>
+          <a:solidFill xmlns:a="http://schemas.openxmlformats.org/drawingml/2006/main">
+            <a:srgbClr val="2B4258"/>
+          </a:solidFill>
+          <a:ln xmlns:a="http://schemas.openxmlformats.org/drawingml/2006/main" w="0">
+            <a:noFill/>
+            <a:prstDash val="solid"/>
+          </a:ln>
+        </p:spPr>
+      </p:sp>
+      <p:sp>
+        <p:nvSpPr>
+          <p:cNvPr id="36" name="header-cape-gradient-3">
+            <a:extLst xmlns:a="http://schemas.openxmlformats.org/drawingml/2006/main">
+              <a:ext uri="{FF2B5EF4-FFF2-40B4-BE49-F238E27FC236}">
+                <a16:creationId xmlns:a16="http://schemas.microsoft.com/office/drawing/2014/main" id="{65D83542-FD69-4A75-B18A-CFA5C7B1AA07}"/>
+              </a:ext>
+            </a:extLst>
+          </p:cNvPr>
+          <p:cNvSpPr>
+            <a:spLocks xmlns:a="http://schemas.openxmlformats.org/drawingml/2006/main" noGrp="1"/>
+          </p:cNvSpPr>
+          <p:nvPr/>
+        </p:nvSpPr>
+        <p:spPr>
+          <a:xfrm xmlns:a="http://schemas.openxmlformats.org/drawingml/2006/main">
+            <a:off x="2675334" y="4667250"/>
+            <a:ext cx="1347192" cy="285750"/>
+          </a:xfrm>
+          <a:prstGeom xmlns:a="http://schemas.openxmlformats.org/drawingml/2006/main" prst="roundRect">
+            <a:avLst>
+              <a:gd name="adj" fmla="val 0"/>
+            </a:avLst>
+          </a:prstGeom>
+          <a:solidFill xmlns:a="http://schemas.openxmlformats.org/drawingml/2006/main">
+            <a:srgbClr val="2D455C"/>
+          </a:solidFill>
+          <a:ln xmlns:a="http://schemas.openxmlformats.org/drawingml/2006/main" w="0">
+            <a:noFill/>
+            <a:prstDash val="solid"/>
+          </a:ln>
+        </p:spPr>
+      </p:sp>
+      <p:sp>
+        <p:nvSpPr>
+          <p:cNvPr id="37" name="header-cape-gradient-4">
+            <a:extLst xmlns:a="http://schemas.openxmlformats.org/drawingml/2006/main">
+              <a:ext uri="{FF2B5EF4-FFF2-40B4-BE49-F238E27FC236}">
+                <a16:creationId xmlns:a16="http://schemas.microsoft.com/office/drawing/2014/main" id="{05380A7B-955F-4509-A33D-0328AACE08A3}"/>
+              </a:ext>
+            </a:extLst>
+          </p:cNvPr>
+          <p:cNvSpPr>
+            <a:spLocks xmlns:a="http://schemas.openxmlformats.org/drawingml/2006/main" noGrp="1"/>
+          </p:cNvSpPr>
+          <p:nvPr/>
+        </p:nvSpPr>
+        <p:spPr>
+          <a:xfrm xmlns:a="http://schemas.openxmlformats.org/drawingml/2006/main">
+            <a:off x="4013002" y="4667250"/>
+            <a:ext cx="1347192" cy="285750"/>
+          </a:xfrm>
+          <a:prstGeom xmlns:a="http://schemas.openxmlformats.org/drawingml/2006/main" prst="roundRect">
+            <a:avLst>
+              <a:gd name="adj" fmla="val 0"/>
+            </a:avLst>
+          </a:prstGeom>
+          <a:solidFill xmlns:a="http://schemas.openxmlformats.org/drawingml/2006/main">
+            <a:srgbClr val="2F475F"/>
+          </a:solidFill>
+          <a:ln xmlns:a="http://schemas.openxmlformats.org/drawingml/2006/main" w="0">
+            <a:noFill/>
+            <a:prstDash val="solid"/>
+          </a:ln>
+        </p:spPr>
+      </p:sp>
+      <p:sp>
+        <p:nvSpPr>
+          <p:cNvPr id="38" name="header-cape-gradient-5">
+            <a:extLst xmlns:a="http://schemas.openxmlformats.org/drawingml/2006/main">
+              <a:ext uri="{FF2B5EF4-FFF2-40B4-BE49-F238E27FC236}">
+                <a16:creationId xmlns:a16="http://schemas.microsoft.com/office/drawing/2014/main" id="{384FC2A4-029F-4629-9949-CB7411207229}"/>
+              </a:ext>
+            </a:extLst>
+          </p:cNvPr>
+          <p:cNvSpPr>
+            <a:spLocks xmlns:a="http://schemas.openxmlformats.org/drawingml/2006/main" noGrp="1"/>
+          </p:cNvSpPr>
+          <p:nvPr/>
+        </p:nvSpPr>
+        <p:spPr>
+          <a:xfrm xmlns:a="http://schemas.openxmlformats.org/drawingml/2006/main">
+            <a:off x="5350669" y="4667250"/>
+            <a:ext cx="1347192" cy="285750"/>
+          </a:xfrm>
+          <a:prstGeom xmlns:a="http://schemas.openxmlformats.org/drawingml/2006/main" prst="roundRect">
+            <a:avLst>
+              <a:gd name="adj" fmla="val 0"/>
+            </a:avLst>
+          </a:prstGeom>
+          <a:solidFill xmlns:a="http://schemas.openxmlformats.org/drawingml/2006/main">
+            <a:srgbClr val="314A63"/>
+          </a:solidFill>
+          <a:ln xmlns:a="http://schemas.openxmlformats.org/drawingml/2006/main" w="0">
+            <a:noFill/>
+            <a:prstDash val="solid"/>
+          </a:ln>
+        </p:spPr>
+      </p:sp>
+      <p:sp>
+        <p:nvSpPr>
+          <p:cNvPr id="39" name="header-cape-gradient-6">
+            <a:extLst xmlns:a="http://schemas.openxmlformats.org/drawingml/2006/main">
+              <a:ext uri="{FF2B5EF4-FFF2-40B4-BE49-F238E27FC236}">
+                <a16:creationId xmlns:a16="http://schemas.microsoft.com/office/drawing/2014/main" id="{B183A6C7-2F6C-4119-80AA-E41847AE0C35}"/>
+              </a:ext>
+            </a:extLst>
+          </p:cNvPr>
+          <p:cNvSpPr>
+            <a:spLocks xmlns:a="http://schemas.openxmlformats.org/drawingml/2006/main" noGrp="1"/>
+          </p:cNvSpPr>
+          <p:nvPr/>
+        </p:nvSpPr>
+        <p:spPr>
+          <a:xfrm xmlns:a="http://schemas.openxmlformats.org/drawingml/2006/main">
+            <a:off x="6688336" y="4667250"/>
+            <a:ext cx="1347192" cy="285750"/>
+          </a:xfrm>
+          <a:prstGeom xmlns:a="http://schemas.openxmlformats.org/drawingml/2006/main" prst="roundRect">
+            <a:avLst>
+              <a:gd name="adj" fmla="val 0"/>
+            </a:avLst>
+          </a:prstGeom>
+          <a:solidFill xmlns:a="http://schemas.openxmlformats.org/drawingml/2006/main">
+            <a:srgbClr val="334D66"/>
+          </a:solidFill>
+          <a:ln xmlns:a="http://schemas.openxmlformats.org/drawingml/2006/main" w="0">
+            <a:noFill/>
+            <a:prstDash val="solid"/>
+          </a:ln>
+        </p:spPr>
+      </p:sp>
+      <p:sp>
+        <p:nvSpPr>
+          <p:cNvPr id="40" name="header-cape-gradient-7">
+            <a:extLst xmlns:a="http://schemas.openxmlformats.org/drawingml/2006/main">
+              <a:ext uri="{FF2B5EF4-FFF2-40B4-BE49-F238E27FC236}">
+                <a16:creationId xmlns:a16="http://schemas.microsoft.com/office/drawing/2014/main" id="{B7E8E7C8-DD33-4C7A-8052-F3F3EFE126E9}"/>
+              </a:ext>
+            </a:extLst>
+          </p:cNvPr>
+          <p:cNvSpPr>
+            <a:spLocks xmlns:a="http://schemas.openxmlformats.org/drawingml/2006/main" noGrp="1"/>
+          </p:cNvSpPr>
+          <p:nvPr/>
+        </p:nvSpPr>
+        <p:spPr>
+          <a:xfrm xmlns:a="http://schemas.openxmlformats.org/drawingml/2006/main">
+            <a:off x="8026003" y="4667250"/>
+            <a:ext cx="1347192" cy="285750"/>
+          </a:xfrm>
+          <a:prstGeom xmlns:a="http://schemas.openxmlformats.org/drawingml/2006/main" prst="roundRect">
+            <a:avLst>
+              <a:gd name="adj" fmla="val 0"/>
+            </a:avLst>
+          </a:prstGeom>
+          <a:solidFill xmlns:a="http://schemas.openxmlformats.org/drawingml/2006/main">
+            <a:srgbClr val="355069"/>
+          </a:solidFill>
+          <a:ln xmlns:a="http://schemas.openxmlformats.org/drawingml/2006/main" w="0">
+            <a:noFill/>
+            <a:prstDash val="solid"/>
+          </a:ln>
+        </p:spPr>
+      </p:sp>
+      <p:sp>
+        <p:nvSpPr>
+          <p:cNvPr id="41" name="header-cape-gradient-8">
+            <a:extLst xmlns:a="http://schemas.openxmlformats.org/drawingml/2006/main">
+              <a:ext uri="{FF2B5EF4-FFF2-40B4-BE49-F238E27FC236}">
+                <a16:creationId xmlns:a16="http://schemas.microsoft.com/office/drawing/2014/main" id="{F7696F3A-ECBE-4C9A-93A1-B1F0BE9F951D}"/>
+              </a:ext>
+            </a:extLst>
+          </p:cNvPr>
+          <p:cNvSpPr>
+            <a:spLocks xmlns:a="http://schemas.openxmlformats.org/drawingml/2006/main" noGrp="1"/>
+          </p:cNvSpPr>
+          <p:nvPr/>
+        </p:nvSpPr>
+        <p:spPr>
+          <a:xfrm xmlns:a="http://schemas.openxmlformats.org/drawingml/2006/main">
+            <a:off x="9363670" y="4667250"/>
+            <a:ext cx="1347192" cy="285750"/>
+          </a:xfrm>
+          <a:prstGeom xmlns:a="http://schemas.openxmlformats.org/drawingml/2006/main" prst="roundRect">
+            <a:avLst>
+              <a:gd name="adj" fmla="val 0"/>
+            </a:avLst>
+          </a:prstGeom>
+          <a:solidFill xmlns:a="http://schemas.openxmlformats.org/drawingml/2006/main">
+            <a:srgbClr val="37536D"/>
+          </a:solidFill>
+          <a:ln xmlns:a="http://schemas.openxmlformats.org/drawingml/2006/main" w="0">
+            <a:noFill/>
+            <a:prstDash val="solid"/>
+          </a:ln>
+        </p:spPr>
+      </p:sp>
+      <p:sp>
+        <p:nvSpPr>
+          <p:cNvPr id="42" name="header-cape-gradient-9">
+            <a:extLst xmlns:a="http://schemas.openxmlformats.org/drawingml/2006/main">
+              <a:ext uri="{FF2B5EF4-FFF2-40B4-BE49-F238E27FC236}">
+                <a16:creationId xmlns:a16="http://schemas.microsoft.com/office/drawing/2014/main" id="{1AF8CFFE-4C6F-40DB-9140-7CCAFA8A6C1B}"/>
+              </a:ext>
+            </a:extLst>
+          </p:cNvPr>
+          <p:cNvSpPr>
+            <a:spLocks xmlns:a="http://schemas.openxmlformats.org/drawingml/2006/main" noGrp="1"/>
+          </p:cNvSpPr>
+          <p:nvPr/>
+        </p:nvSpPr>
+        <p:spPr>
+          <a:xfrm xmlns:a="http://schemas.openxmlformats.org/drawingml/2006/main">
+            <a:off x="10701338" y="4667250"/>
+            <a:ext cx="1347192" cy="285750"/>
+          </a:xfrm>
+          <a:prstGeom xmlns:a="http://schemas.openxmlformats.org/drawingml/2006/main" prst="roundRect">
+            <a:avLst>
+              <a:gd name="adj" fmla="val 0"/>
+            </a:avLst>
+          </a:prstGeom>
+          <a:solidFill xmlns:a="http://schemas.openxmlformats.org/drawingml/2006/main">
+            <a:srgbClr val="395570"/>
+          </a:solidFill>
+          <a:ln xmlns:a="http://schemas.openxmlformats.org/drawingml/2006/main" w="0">
+            <a:noFill/>
+            <a:prstDash val="solid"/>
+          </a:ln>
+        </p:spPr>
+      </p:sp>
+      <p:sp>
+        <p:nvSpPr>
+          <p:cNvPr id="43" name="header-cape-gradient-10">
+            <a:extLst xmlns:a="http://schemas.openxmlformats.org/drawingml/2006/main">
+              <a:ext uri="{FF2B5EF4-FFF2-40B4-BE49-F238E27FC236}">
+                <a16:creationId xmlns:a16="http://schemas.microsoft.com/office/drawing/2014/main" id="{74B0026D-1E97-4E54-9D7C-36E5B8B486F6}"/>
+              </a:ext>
+            </a:extLst>
+          </p:cNvPr>
+          <p:cNvSpPr>
+            <a:spLocks xmlns:a="http://schemas.openxmlformats.org/drawingml/2006/main" noGrp="1"/>
+          </p:cNvSpPr>
+          <p:nvPr/>
+        </p:nvSpPr>
+        <p:spPr>
+          <a:xfrm xmlns:a="http://schemas.openxmlformats.org/drawingml/2006/main">
+            <a:off x="12039005" y="4667250"/>
+            <a:ext cx="1347192" cy="285750"/>
+          </a:xfrm>
+          <a:prstGeom xmlns:a="http://schemas.openxmlformats.org/drawingml/2006/main" prst="roundRect">
+            <a:avLst>
+              <a:gd name="adj" fmla="val 0"/>
+            </a:avLst>
+          </a:prstGeom>
+          <a:solidFill xmlns:a="http://schemas.openxmlformats.org/drawingml/2006/main">
+            <a:srgbClr val="3B5873"/>
+          </a:solidFill>
+          <a:ln xmlns:a="http://schemas.openxmlformats.org/drawingml/2006/main" w="0">
+            <a:noFill/>
+            <a:prstDash val="solid"/>
+          </a:ln>
+        </p:spPr>
+      </p:sp>
+      <p:sp>
+        <p:nvSpPr>
+          <p:cNvPr id="44" name="header-cape-gradient-11">
+            <a:extLst xmlns:a="http://schemas.openxmlformats.org/drawingml/2006/main">
+              <a:ext uri="{FF2B5EF4-FFF2-40B4-BE49-F238E27FC236}">
+                <a16:creationId xmlns:a16="http://schemas.microsoft.com/office/drawing/2014/main" id="{1A39FCB4-8AD6-44AC-A673-1C50D2B3968D}"/>
+              </a:ext>
+            </a:extLst>
+          </p:cNvPr>
+          <p:cNvSpPr>
+            <a:spLocks xmlns:a="http://schemas.openxmlformats.org/drawingml/2006/main" noGrp="1"/>
+          </p:cNvSpPr>
+          <p:nvPr/>
+        </p:nvSpPr>
+        <p:spPr>
+          <a:xfrm xmlns:a="http://schemas.openxmlformats.org/drawingml/2006/main">
+            <a:off x="13376672" y="4667250"/>
+            <a:ext cx="1347192" cy="285750"/>
+          </a:xfrm>
+          <a:prstGeom xmlns:a="http://schemas.openxmlformats.org/drawingml/2006/main" prst="roundRect">
+            <a:avLst>
+              <a:gd name="adj" fmla="val 0"/>
+            </a:avLst>
+          </a:prstGeom>
+          <a:solidFill xmlns:a="http://schemas.openxmlformats.org/drawingml/2006/main">
+            <a:srgbClr val="3D5B77"/>
+          </a:solidFill>
+          <a:ln xmlns:a="http://schemas.openxmlformats.org/drawingml/2006/main" w="0">
+            <a:noFill/>
+            <a:prstDash val="solid"/>
+          </a:ln>
+        </p:spPr>
+      </p:sp>
+      <p:sp>
+        <p:nvSpPr>
+          <p:cNvPr id="45" name="header-cape-gradient-12">
+            <a:extLst xmlns:a="http://schemas.openxmlformats.org/drawingml/2006/main">
+              <a:ext uri="{FF2B5EF4-FFF2-40B4-BE49-F238E27FC236}">
+                <a16:creationId xmlns:a16="http://schemas.microsoft.com/office/drawing/2014/main" id="{EEE4087F-29D5-4887-97C2-5E9EAA66C001}"/>
+              </a:ext>
+            </a:extLst>
+          </p:cNvPr>
+          <p:cNvSpPr>
+            <a:spLocks xmlns:a="http://schemas.openxmlformats.org/drawingml/2006/main" noGrp="1"/>
+          </p:cNvSpPr>
+          <p:nvPr/>
+        </p:nvSpPr>
+        <p:spPr>
+          <a:xfrm xmlns:a="http://schemas.openxmlformats.org/drawingml/2006/main">
+            <a:off x="14714339" y="4667250"/>
+            <a:ext cx="1347192" cy="285750"/>
+          </a:xfrm>
+          <a:prstGeom xmlns:a="http://schemas.openxmlformats.org/drawingml/2006/main" prst="roundRect">
+            <a:avLst>
+              <a:gd name="adj" fmla="val 0"/>
+            </a:avLst>
+          </a:prstGeom>
+          <a:solidFill xmlns:a="http://schemas.openxmlformats.org/drawingml/2006/main">
+            <a:srgbClr val="3F5E7B"/>
+          </a:solidFill>
+          <a:ln xmlns:a="http://schemas.openxmlformats.org/drawingml/2006/main" w="0">
+            <a:noFill/>
+            <a:prstDash val="solid"/>
+          </a:ln>
+        </p:spPr>
+      </p:sp>
+      <p:sp>
+        <p:nvSpPr>
+          <p:cNvPr id="46" name="header-cape-gradient-13">
+            <a:extLst xmlns:a="http://schemas.openxmlformats.org/drawingml/2006/main">
+              <a:ext uri="{FF2B5EF4-FFF2-40B4-BE49-F238E27FC236}">
+                <a16:creationId xmlns:a16="http://schemas.microsoft.com/office/drawing/2014/main" id="{86298CE3-29DC-4166-B132-5E81688E7C36}"/>
+              </a:ext>
+            </a:extLst>
+          </p:cNvPr>
+          <p:cNvSpPr>
+            <a:spLocks xmlns:a="http://schemas.openxmlformats.org/drawingml/2006/main" noGrp="1"/>
+          </p:cNvSpPr>
+          <p:nvPr/>
+        </p:nvSpPr>
+        <p:spPr>
+          <a:xfrm xmlns:a="http://schemas.openxmlformats.org/drawingml/2006/main">
+            <a:off x="16052006" y="4667250"/>
+            <a:ext cx="1347192" cy="285750"/>
+          </a:xfrm>
+          <a:prstGeom xmlns:a="http://schemas.openxmlformats.org/drawingml/2006/main" prst="roundRect">
+            <a:avLst>
+              <a:gd name="adj" fmla="val 0"/>
+            </a:avLst>
+          </a:prstGeom>
+          <a:solidFill xmlns:a="http://schemas.openxmlformats.org/drawingml/2006/main">
+            <a:srgbClr val="40617F"/>
+          </a:solidFill>
+          <a:ln xmlns:a="http://schemas.openxmlformats.org/drawingml/2006/main" w="0">
+            <a:noFill/>
+            <a:prstDash val="solid"/>
+          </a:ln>
+        </p:spPr>
+      </p:sp>
+      <p:sp>
+        <p:nvSpPr>
+          <p:cNvPr id="47" name="header-cape-gradient-14">
+            <a:extLst xmlns:a="http://schemas.openxmlformats.org/drawingml/2006/main">
+              <a:ext uri="{FF2B5EF4-FFF2-40B4-BE49-F238E27FC236}">
+                <a16:creationId xmlns:a16="http://schemas.microsoft.com/office/drawing/2014/main" id="{0708E3C8-FB46-4587-B592-0E666D761E83}"/>
+              </a:ext>
+            </a:extLst>
+          </p:cNvPr>
+          <p:cNvSpPr>
+            <a:spLocks xmlns:a="http://schemas.openxmlformats.org/drawingml/2006/main" noGrp="1"/>
+          </p:cNvSpPr>
+          <p:nvPr/>
+        </p:nvSpPr>
+        <p:spPr>
+          <a:xfrm xmlns:a="http://schemas.openxmlformats.org/drawingml/2006/main">
+            <a:off x="17389673" y="4667250"/>
+            <a:ext cx="1347192" cy="285750"/>
+          </a:xfrm>
+          <a:prstGeom xmlns:a="http://schemas.openxmlformats.org/drawingml/2006/main" prst="roundRect">
+            <a:avLst>
+              <a:gd name="adj" fmla="val 0"/>
+            </a:avLst>
+          </a:prstGeom>
+          <a:solidFill xmlns:a="http://schemas.openxmlformats.org/drawingml/2006/main">
+            <a:srgbClr val="416483"/>
+          </a:solidFill>
+          <a:ln xmlns:a="http://schemas.openxmlformats.org/drawingml/2006/main" w="0">
+            <a:noFill/>
+            <a:prstDash val="solid"/>
+          </a:ln>
+        </p:spPr>
+      </p:sp>
+      <p:sp>
+        <p:nvSpPr>
+          <p:cNvPr id="48" name="header-cape-gradient-15">
+            <a:extLst xmlns:a="http://schemas.openxmlformats.org/drawingml/2006/main">
+              <a:ext uri="{FF2B5EF4-FFF2-40B4-BE49-F238E27FC236}">
+                <a16:creationId xmlns:a16="http://schemas.microsoft.com/office/drawing/2014/main" id="{036BFF58-9F92-4492-9DF4-E35DF2652EDB}"/>
+              </a:ext>
+            </a:extLst>
+          </p:cNvPr>
+          <p:cNvSpPr>
+            <a:spLocks xmlns:a="http://schemas.openxmlformats.org/drawingml/2006/main" noGrp="1"/>
+          </p:cNvSpPr>
+          <p:nvPr/>
+        </p:nvSpPr>
+        <p:spPr>
+          <a:xfrm xmlns:a="http://schemas.openxmlformats.org/drawingml/2006/main">
+            <a:off x="18727341" y="4667250"/>
+            <a:ext cx="1347192" cy="285750"/>
+          </a:xfrm>
+          <a:prstGeom xmlns:a="http://schemas.openxmlformats.org/drawingml/2006/main" prst="roundRect">
+            <a:avLst>
+              <a:gd name="adj" fmla="val 0"/>
+            </a:avLst>
+          </a:prstGeom>
+          <a:solidFill xmlns:a="http://schemas.openxmlformats.org/drawingml/2006/main">
+            <a:srgbClr val="426787"/>
+          </a:solidFill>
+          <a:ln xmlns:a="http://schemas.openxmlformats.org/drawingml/2006/main" w="0">
+            <a:noFill/>
+            <a:prstDash val="solid"/>
+          </a:ln>
+        </p:spPr>
+      </p:sp>
+      <p:sp>
+        <p:nvSpPr>
+          <p:cNvPr id="49" name="header-cape-gradient-16">
+            <a:extLst xmlns:a="http://schemas.openxmlformats.org/drawingml/2006/main">
+              <a:ext uri="{FF2B5EF4-FFF2-40B4-BE49-F238E27FC236}">
+                <a16:creationId xmlns:a16="http://schemas.microsoft.com/office/drawing/2014/main" id="{23B6BE10-EE57-4C00-BFAF-B780BF88CEA1}"/>
+              </a:ext>
+            </a:extLst>
+          </p:cNvPr>
+          <p:cNvSpPr>
+            <a:spLocks xmlns:a="http://schemas.openxmlformats.org/drawingml/2006/main" noGrp="1"/>
+          </p:cNvSpPr>
+          <p:nvPr/>
+        </p:nvSpPr>
+        <p:spPr>
+          <a:xfrm xmlns:a="http://schemas.openxmlformats.org/drawingml/2006/main">
+            <a:off x="20065008" y="4667250"/>
+            <a:ext cx="1347192" cy="285750"/>
+          </a:xfrm>
+          <a:prstGeom xmlns:a="http://schemas.openxmlformats.org/drawingml/2006/main" prst="roundRect">
+            <a:avLst>
+              <a:gd name="adj" fmla="val 0"/>
+            </a:avLst>
+          </a:prstGeom>
+          <a:solidFill xmlns:a="http://schemas.openxmlformats.org/drawingml/2006/main">
+            <a:srgbClr val="436A8B"/>
+          </a:solidFill>
+          <a:ln xmlns:a="http://schemas.openxmlformats.org/drawingml/2006/main" w="0">
+            <a:noFill/>
+            <a:prstDash val="solid"/>
+          </a:ln>
+        </p:spPr>
+      </p:sp>
+      <p:sp>
+        <p:nvSpPr>
+          <p:cNvPr id="50" name="header-cape-gradient-17">
+            <a:extLst xmlns:a="http://schemas.openxmlformats.org/drawingml/2006/main">
+              <a:ext uri="{FF2B5EF4-FFF2-40B4-BE49-F238E27FC236}">
+                <a16:creationId xmlns:a16="http://schemas.microsoft.com/office/drawing/2014/main" id="{23E769A5-8897-46FA-B28E-59377D4B864C}"/>
+              </a:ext>
+            </a:extLst>
+          </p:cNvPr>
+          <p:cNvSpPr>
+            <a:spLocks xmlns:a="http://schemas.openxmlformats.org/drawingml/2006/main" noGrp="1"/>
+          </p:cNvSpPr>
+          <p:nvPr/>
+        </p:nvSpPr>
+        <p:spPr>
+          <a:xfrm xmlns:a="http://schemas.openxmlformats.org/drawingml/2006/main">
+            <a:off x="21402675" y="4667250"/>
+            <a:ext cx="1347192" cy="285750"/>
+          </a:xfrm>
+          <a:prstGeom xmlns:a="http://schemas.openxmlformats.org/drawingml/2006/main" prst="roundRect">
+            <a:avLst>
+              <a:gd name="adj" fmla="val 0"/>
+            </a:avLst>
+          </a:prstGeom>
+          <a:solidFill xmlns:a="http://schemas.openxmlformats.org/drawingml/2006/main">
+            <a:srgbClr val="436C8E"/>
+          </a:solidFill>
+          <a:ln xmlns:a="http://schemas.openxmlformats.org/drawingml/2006/main" w="0">
+            <a:noFill/>
+            <a:prstDash val="solid"/>
+          </a:ln>
+        </p:spPr>
+      </p:sp>
+      <p:sp>
+        <p:nvSpPr>
+          <p:cNvPr id="51" name="header-cape-gradient-18">
+            <a:extLst xmlns:a="http://schemas.openxmlformats.org/drawingml/2006/main">
+              <a:ext uri="{FF2B5EF4-FFF2-40B4-BE49-F238E27FC236}">
+                <a16:creationId xmlns:a16="http://schemas.microsoft.com/office/drawing/2014/main" id="{0B2D608F-07F1-41FA-A045-800FA4E864D1}"/>
+              </a:ext>
+            </a:extLst>
+          </p:cNvPr>
+          <p:cNvSpPr>
+            <a:spLocks xmlns:a="http://schemas.openxmlformats.org/drawingml/2006/main" noGrp="1"/>
+          </p:cNvSpPr>
+          <p:nvPr/>
+        </p:nvSpPr>
+        <p:spPr>
+          <a:xfrm xmlns:a="http://schemas.openxmlformats.org/drawingml/2006/main">
+            <a:off x="22740342" y="4667250"/>
+            <a:ext cx="1347192" cy="285750"/>
+          </a:xfrm>
+          <a:prstGeom xmlns:a="http://schemas.openxmlformats.org/drawingml/2006/main" prst="roundRect">
+            <a:avLst>
+              <a:gd name="adj" fmla="val 0"/>
+            </a:avLst>
+          </a:prstGeom>
+          <a:solidFill xmlns:a="http://schemas.openxmlformats.org/drawingml/2006/main">
+            <a:srgbClr val="446F92"/>
+          </a:solidFill>
+          <a:ln xmlns:a="http://schemas.openxmlformats.org/drawingml/2006/main" w="0">
+            <a:noFill/>
+            <a:prstDash val="solid"/>
+          </a:ln>
+        </p:spPr>
+      </p:sp>
+      <p:sp>
+        <p:nvSpPr>
+          <p:cNvPr id="52" name="header-cape-gradient-19">
+            <a:extLst xmlns:a="http://schemas.openxmlformats.org/drawingml/2006/main">
+              <a:ext uri="{FF2B5EF4-FFF2-40B4-BE49-F238E27FC236}">
+                <a16:creationId xmlns:a16="http://schemas.microsoft.com/office/drawing/2014/main" id="{2C89686C-4ED9-4ECE-B2F3-F23CF8408B18}"/>
+              </a:ext>
+            </a:extLst>
+          </p:cNvPr>
+          <p:cNvSpPr>
+            <a:spLocks xmlns:a="http://schemas.openxmlformats.org/drawingml/2006/main" noGrp="1"/>
+          </p:cNvSpPr>
+          <p:nvPr/>
+        </p:nvSpPr>
+        <p:spPr>
+          <a:xfrm xmlns:a="http://schemas.openxmlformats.org/drawingml/2006/main">
+            <a:off x="24078009" y="4667250"/>
+            <a:ext cx="1347192" cy="285750"/>
+          </a:xfrm>
+          <a:prstGeom xmlns:a="http://schemas.openxmlformats.org/drawingml/2006/main" prst="roundRect">
+            <a:avLst>
+              <a:gd name="adj" fmla="val 0"/>
+            </a:avLst>
+          </a:prstGeom>
+          <a:solidFill xmlns:a="http://schemas.openxmlformats.org/drawingml/2006/main">
+            <a:srgbClr val="457296"/>
+          </a:solidFill>
+          <a:ln xmlns:a="http://schemas.openxmlformats.org/drawingml/2006/main" w="0">
+            <a:noFill/>
+            <a:prstDash val="solid"/>
+          </a:ln>
+        </p:spPr>
+      </p:sp>
+      <p:sp>
+        <p:nvSpPr>
+          <p:cNvPr id="53" name="header-cape-gradient-20">
+            <a:extLst xmlns:a="http://schemas.openxmlformats.org/drawingml/2006/main">
+              <a:ext uri="{FF2B5EF4-FFF2-40B4-BE49-F238E27FC236}">
+                <a16:creationId xmlns:a16="http://schemas.microsoft.com/office/drawing/2014/main" id="{837DD6CB-A7B8-4540-A6F9-11FF40ABD0F7}"/>
+              </a:ext>
+            </a:extLst>
+          </p:cNvPr>
+          <p:cNvSpPr>
+            <a:spLocks xmlns:a="http://schemas.openxmlformats.org/drawingml/2006/main" noGrp="1"/>
+          </p:cNvSpPr>
+          <p:nvPr/>
+        </p:nvSpPr>
+        <p:spPr>
+          <a:xfrm xmlns:a="http://schemas.openxmlformats.org/drawingml/2006/main">
+            <a:off x="25415677" y="4667250"/>
+            <a:ext cx="1347192" cy="285750"/>
+          </a:xfrm>
+          <a:prstGeom xmlns:a="http://schemas.openxmlformats.org/drawingml/2006/main" prst="roundRect">
+            <a:avLst>
+              <a:gd name="adj" fmla="val 0"/>
+            </a:avLst>
+          </a:prstGeom>
+          <a:solidFill xmlns:a="http://schemas.openxmlformats.org/drawingml/2006/main">
+            <a:srgbClr val="46759A"/>
+          </a:solidFill>
+          <a:ln xmlns:a="http://schemas.openxmlformats.org/drawingml/2006/main" w="0">
+            <a:noFill/>
+            <a:prstDash val="solid"/>
+          </a:ln>
+        </p:spPr>
+      </p:sp>
+      <p:sp>
+        <p:nvSpPr>
+          <p:cNvPr id="54" name="header-cape-gradient-21">
+            <a:extLst xmlns:a="http://schemas.openxmlformats.org/drawingml/2006/main">
+              <a:ext uri="{FF2B5EF4-FFF2-40B4-BE49-F238E27FC236}">
+                <a16:creationId xmlns:a16="http://schemas.microsoft.com/office/drawing/2014/main" id="{7B09DF9F-419E-46EB-BAA2-0A7E742322EC}"/>
+              </a:ext>
+            </a:extLst>
+          </p:cNvPr>
+          <p:cNvSpPr>
+            <a:spLocks xmlns:a="http://schemas.openxmlformats.org/drawingml/2006/main" noGrp="1"/>
+          </p:cNvSpPr>
+          <p:nvPr/>
+        </p:nvSpPr>
+        <p:spPr>
+          <a:xfrm xmlns:a="http://schemas.openxmlformats.org/drawingml/2006/main">
+            <a:off x="26753344" y="4667250"/>
+            <a:ext cx="1347192" cy="285750"/>
+          </a:xfrm>
+          <a:prstGeom xmlns:a="http://schemas.openxmlformats.org/drawingml/2006/main" prst="roundRect">
+            <a:avLst>
+              <a:gd name="adj" fmla="val 0"/>
+            </a:avLst>
+          </a:prstGeom>
+          <a:solidFill xmlns:a="http://schemas.openxmlformats.org/drawingml/2006/main">
+            <a:srgbClr val="47789E"/>
+          </a:solidFill>
+          <a:ln xmlns:a="http://schemas.openxmlformats.org/drawingml/2006/main" w="0">
+            <a:noFill/>
+            <a:prstDash val="solid"/>
+          </a:ln>
+        </p:spPr>
+      </p:sp>
+      <p:sp>
+        <p:nvSpPr>
+          <p:cNvPr id="55" name="header-cape-gradient-22">
+            <a:extLst xmlns:a="http://schemas.openxmlformats.org/drawingml/2006/main">
+              <a:ext uri="{FF2B5EF4-FFF2-40B4-BE49-F238E27FC236}">
+                <a16:creationId xmlns:a16="http://schemas.microsoft.com/office/drawing/2014/main" id="{36A9C1F7-DFEC-4C4E-A606-C0A4D5E636C9}"/>
+              </a:ext>
+            </a:extLst>
+          </p:cNvPr>
+          <p:cNvSpPr>
+            <a:spLocks xmlns:a="http://schemas.openxmlformats.org/drawingml/2006/main" noGrp="1"/>
+          </p:cNvSpPr>
+          <p:nvPr/>
+        </p:nvSpPr>
+        <p:spPr>
+          <a:xfrm xmlns:a="http://schemas.openxmlformats.org/drawingml/2006/main">
+            <a:off x="28091011" y="4667250"/>
+            <a:ext cx="1347192" cy="285750"/>
+          </a:xfrm>
+          <a:prstGeom xmlns:a="http://schemas.openxmlformats.org/drawingml/2006/main" prst="roundRect">
+            <a:avLst>
+              <a:gd name="adj" fmla="val 0"/>
+            </a:avLst>
+          </a:prstGeom>
+          <a:solidFill xmlns:a="http://schemas.openxmlformats.org/drawingml/2006/main">
+            <a:srgbClr val="4A7CA2"/>
+          </a:solidFill>
+          <a:ln xmlns:a="http://schemas.openxmlformats.org/drawingml/2006/main" w="0">
+            <a:noFill/>
+            <a:prstDash val="solid"/>
+          </a:ln>
+        </p:spPr>
+      </p:sp>
+      <p:sp>
+        <p:nvSpPr>
+          <p:cNvPr id="56" name="header-cape-gradient-23">
+            <a:extLst xmlns:a="http://schemas.openxmlformats.org/drawingml/2006/main">
+              <a:ext uri="{FF2B5EF4-FFF2-40B4-BE49-F238E27FC236}">
+                <a16:creationId xmlns:a16="http://schemas.microsoft.com/office/drawing/2014/main" id="{14F0A344-CBEC-4A14-B1C0-AA68334B46B3}"/>
+              </a:ext>
+            </a:extLst>
+          </p:cNvPr>
+          <p:cNvSpPr>
+            <a:spLocks xmlns:a="http://schemas.openxmlformats.org/drawingml/2006/main" noGrp="1"/>
+          </p:cNvSpPr>
+          <p:nvPr/>
+        </p:nvSpPr>
+        <p:spPr>
+          <a:xfrm xmlns:a="http://schemas.openxmlformats.org/drawingml/2006/main">
+            <a:off x="29428678" y="4667250"/>
+            <a:ext cx="1347192" cy="285750"/>
+          </a:xfrm>
+          <a:prstGeom xmlns:a="http://schemas.openxmlformats.org/drawingml/2006/main" prst="roundRect">
+            <a:avLst>
+              <a:gd name="adj" fmla="val 0"/>
+            </a:avLst>
+          </a:prstGeom>
+          <a:solidFill xmlns:a="http://schemas.openxmlformats.org/drawingml/2006/main">
+            <a:srgbClr val="5082A6"/>
+          </a:solidFill>
+          <a:ln xmlns:a="http://schemas.openxmlformats.org/drawingml/2006/main" w="0">
+            <a:noFill/>
+            <a:prstDash val="solid"/>
+          </a:ln>
+        </p:spPr>
+      </p:sp>
+      <p:sp>
+        <p:nvSpPr>
+          <p:cNvPr id="57" name="header-cape-gradient-24">
+            <a:extLst xmlns:a="http://schemas.openxmlformats.org/drawingml/2006/main">
+              <a:ext uri="{FF2B5EF4-FFF2-40B4-BE49-F238E27FC236}">
+                <a16:creationId xmlns:a16="http://schemas.microsoft.com/office/drawing/2014/main" id="{840D9315-3C2B-4170-BDE9-9438E647B289}"/>
+              </a:ext>
+            </a:extLst>
+          </p:cNvPr>
+          <p:cNvSpPr>
+            <a:spLocks xmlns:a="http://schemas.openxmlformats.org/drawingml/2006/main" noGrp="1"/>
+          </p:cNvSpPr>
+          <p:nvPr/>
+        </p:nvSpPr>
+        <p:spPr>
+          <a:xfrm xmlns:a="http://schemas.openxmlformats.org/drawingml/2006/main">
+            <a:off x="30766345" y="4667250"/>
+            <a:ext cx="1347192" cy="285750"/>
+          </a:xfrm>
+          <a:prstGeom xmlns:a="http://schemas.openxmlformats.org/drawingml/2006/main" prst="roundRect">
+            <a:avLst>
+              <a:gd name="adj" fmla="val 0"/>
+            </a:avLst>
+          </a:prstGeom>
+          <a:solidFill xmlns:a="http://schemas.openxmlformats.org/drawingml/2006/main">
+            <a:srgbClr val="5788AA"/>
+          </a:solidFill>
+          <a:ln xmlns:a="http://schemas.openxmlformats.org/drawingml/2006/main" w="0">
+            <a:noFill/>
+            <a:prstDash val="solid"/>
+          </a:ln>
+        </p:spPr>
+      </p:sp>
+      <p:sp>
+        <p:nvSpPr>
+          <p:cNvPr id="58" name="header-cape-gradient-25">
+            <a:extLst xmlns:a="http://schemas.openxmlformats.org/drawingml/2006/main">
+              <a:ext uri="{FF2B5EF4-FFF2-40B4-BE49-F238E27FC236}">
+                <a16:creationId xmlns:a16="http://schemas.microsoft.com/office/drawing/2014/main" id="{3D8237B9-1E1E-4557-AA49-4DD2BF49DC86}"/>
+              </a:ext>
+            </a:extLst>
+          </p:cNvPr>
+          <p:cNvSpPr>
+            <a:spLocks xmlns:a="http://schemas.openxmlformats.org/drawingml/2006/main" noGrp="1"/>
+          </p:cNvSpPr>
+          <p:nvPr/>
+        </p:nvSpPr>
+        <p:spPr>
+          <a:xfrm xmlns:a="http://schemas.openxmlformats.org/drawingml/2006/main">
+            <a:off x="32104013" y="4667250"/>
+            <a:ext cx="1347192" cy="285750"/>
+          </a:xfrm>
+          <a:prstGeom xmlns:a="http://schemas.openxmlformats.org/drawingml/2006/main" prst="roundRect">
+            <a:avLst>
+              <a:gd name="adj" fmla="val 0"/>
+            </a:avLst>
+          </a:prstGeom>
+          <a:solidFill xmlns:a="http://schemas.openxmlformats.org/drawingml/2006/main">
+            <a:srgbClr val="5D8EAE"/>
+          </a:solidFill>
+          <a:ln xmlns:a="http://schemas.openxmlformats.org/drawingml/2006/main" w="0">
+            <a:noFill/>
+            <a:prstDash val="solid"/>
+          </a:ln>
+        </p:spPr>
+      </p:sp>
+      <p:sp>
+        <p:nvSpPr>
+          <p:cNvPr id="59" name="header-cape-gradient-26">
+            <a:extLst xmlns:a="http://schemas.openxmlformats.org/drawingml/2006/main">
+              <a:ext uri="{FF2B5EF4-FFF2-40B4-BE49-F238E27FC236}">
+                <a16:creationId xmlns:a16="http://schemas.microsoft.com/office/drawing/2014/main" id="{F38A5D78-6592-4F53-B17A-EAF01A5C833B}"/>
+              </a:ext>
+            </a:extLst>
+          </p:cNvPr>
+          <p:cNvSpPr>
+            <a:spLocks xmlns:a="http://schemas.openxmlformats.org/drawingml/2006/main" noGrp="1"/>
+          </p:cNvSpPr>
+          <p:nvPr/>
+        </p:nvSpPr>
+        <p:spPr>
+          <a:xfrm xmlns:a="http://schemas.openxmlformats.org/drawingml/2006/main">
+            <a:off x="33441680" y="4667250"/>
+            <a:ext cx="1347192" cy="285750"/>
+          </a:xfrm>
+          <a:prstGeom xmlns:a="http://schemas.openxmlformats.org/drawingml/2006/main" prst="roundRect">
+            <a:avLst>
+              <a:gd name="adj" fmla="val 0"/>
+            </a:avLst>
+          </a:prstGeom>
+          <a:solidFill xmlns:a="http://schemas.openxmlformats.org/drawingml/2006/main">
+            <a:srgbClr val="6394B2"/>
+          </a:solidFill>
+          <a:ln xmlns:a="http://schemas.openxmlformats.org/drawingml/2006/main" w="0">
+            <a:noFill/>
+            <a:prstDash val="solid"/>
+          </a:ln>
+        </p:spPr>
+      </p:sp>
+      <p:sp>
+        <p:nvSpPr>
+          <p:cNvPr id="60" name="header-cape-gradient-27">
+            <a:extLst xmlns:a="http://schemas.openxmlformats.org/drawingml/2006/main">
+              <a:ext uri="{FF2B5EF4-FFF2-40B4-BE49-F238E27FC236}">
+                <a16:creationId xmlns:a16="http://schemas.microsoft.com/office/drawing/2014/main" id="{C475B277-3123-4958-8C84-68DDE2550302}"/>
+              </a:ext>
+            </a:extLst>
+          </p:cNvPr>
+          <p:cNvSpPr>
+            <a:spLocks xmlns:a="http://schemas.openxmlformats.org/drawingml/2006/main" noGrp="1"/>
+          </p:cNvSpPr>
+          <p:nvPr/>
+        </p:nvSpPr>
+        <p:spPr>
+          <a:xfrm xmlns:a="http://schemas.openxmlformats.org/drawingml/2006/main">
+            <a:off x="34779347" y="4667250"/>
+            <a:ext cx="1347192" cy="285750"/>
+          </a:xfrm>
+          <a:prstGeom xmlns:a="http://schemas.openxmlformats.org/drawingml/2006/main" prst="roundRect">
+            <a:avLst>
+              <a:gd name="adj" fmla="val 0"/>
+            </a:avLst>
+          </a:prstGeom>
+          <a:solidFill xmlns:a="http://schemas.openxmlformats.org/drawingml/2006/main">
+            <a:srgbClr val="6A9AB6"/>
+          </a:solidFill>
+          <a:ln xmlns:a="http://schemas.openxmlformats.org/drawingml/2006/main" w="0">
+            <a:noFill/>
+            <a:prstDash val="solid"/>
+          </a:ln>
+        </p:spPr>
+      </p:sp>
+      <p:sp>
+        <p:nvSpPr>
+          <p:cNvPr id="61" name="header-cape-gradient-28">
+            <a:extLst xmlns:a="http://schemas.openxmlformats.org/drawingml/2006/main">
+              <a:ext uri="{FF2B5EF4-FFF2-40B4-BE49-F238E27FC236}">
+                <a16:creationId xmlns:a16="http://schemas.microsoft.com/office/drawing/2014/main" id="{999A6D95-6007-4873-8268-A59B3CC0AC3C}"/>
+              </a:ext>
+            </a:extLst>
+          </p:cNvPr>
+          <p:cNvSpPr>
+            <a:spLocks xmlns:a="http://schemas.openxmlformats.org/drawingml/2006/main" noGrp="1"/>
+          </p:cNvSpPr>
+          <p:nvPr/>
+        </p:nvSpPr>
+        <p:spPr>
+          <a:xfrm xmlns:a="http://schemas.openxmlformats.org/drawingml/2006/main">
+            <a:off x="36117014" y="4667250"/>
+            <a:ext cx="1347192" cy="285750"/>
+          </a:xfrm>
+          <a:prstGeom xmlns:a="http://schemas.openxmlformats.org/drawingml/2006/main" prst="roundRect">
+            <a:avLst>
+              <a:gd name="adj" fmla="val 0"/>
+            </a:avLst>
+          </a:prstGeom>
+          <a:solidFill xmlns:a="http://schemas.openxmlformats.org/drawingml/2006/main">
+            <a:srgbClr val="70A0BA"/>
+          </a:solidFill>
+          <a:ln xmlns:a="http://schemas.openxmlformats.org/drawingml/2006/main" w="0">
+            <a:noFill/>
+            <a:prstDash val="solid"/>
+          </a:ln>
+        </p:spPr>
+      </p:sp>
+      <p:sp>
+        <p:nvSpPr>
+          <p:cNvPr id="62" name="header-cape-gradient-29">
+            <a:extLst xmlns:a="http://schemas.openxmlformats.org/drawingml/2006/main">
+              <a:ext uri="{FF2B5EF4-FFF2-40B4-BE49-F238E27FC236}">
+                <a16:creationId xmlns:a16="http://schemas.microsoft.com/office/drawing/2014/main" id="{DCC9204B-6BED-4B31-B2D5-734BEE8AD4C9}"/>
+              </a:ext>
+            </a:extLst>
+          </p:cNvPr>
+          <p:cNvSpPr>
+            <a:spLocks xmlns:a="http://schemas.openxmlformats.org/drawingml/2006/main" noGrp="1"/>
+          </p:cNvSpPr>
+          <p:nvPr/>
+        </p:nvSpPr>
+        <p:spPr>
+          <a:xfrm xmlns:a="http://schemas.openxmlformats.org/drawingml/2006/main">
+            <a:off x="37454681" y="4667250"/>
+            <a:ext cx="1347192" cy="285750"/>
+          </a:xfrm>
+          <a:prstGeom xmlns:a="http://schemas.openxmlformats.org/drawingml/2006/main" prst="roundRect">
+            <a:avLst>
+              <a:gd name="adj" fmla="val 0"/>
+            </a:avLst>
+          </a:prstGeom>
+          <a:solidFill xmlns:a="http://schemas.openxmlformats.org/drawingml/2006/main">
+            <a:srgbClr val="76A6BD"/>
+          </a:solidFill>
+          <a:ln xmlns:a="http://schemas.openxmlformats.org/drawingml/2006/main" w="0">
+            <a:noFill/>
+            <a:prstDash val="solid"/>
+          </a:ln>
+        </p:spPr>
+      </p:sp>
+      <p:sp>
+        <p:nvSpPr>
+          <p:cNvPr id="63" name="header-cape-gradient-30">
+            <a:extLst xmlns:a="http://schemas.openxmlformats.org/drawingml/2006/main">
+              <a:ext uri="{FF2B5EF4-FFF2-40B4-BE49-F238E27FC236}">
+                <a16:creationId xmlns:a16="http://schemas.microsoft.com/office/drawing/2014/main" id="{397B776E-6E6C-4CA8-A9DE-2191AFFD09EE}"/>
+              </a:ext>
+            </a:extLst>
+          </p:cNvPr>
+          <p:cNvSpPr>
+            <a:spLocks xmlns:a="http://schemas.openxmlformats.org/drawingml/2006/main" noGrp="1"/>
+          </p:cNvSpPr>
+          <p:nvPr/>
+        </p:nvSpPr>
+        <p:spPr>
+          <a:xfrm xmlns:a="http://schemas.openxmlformats.org/drawingml/2006/main">
+            <a:off x="38792348" y="4667250"/>
+            <a:ext cx="1347192" cy="285750"/>
+          </a:xfrm>
+          <a:prstGeom xmlns:a="http://schemas.openxmlformats.org/drawingml/2006/main" prst="roundRect">
+            <a:avLst>
+              <a:gd name="adj" fmla="val 0"/>
+            </a:avLst>
+          </a:prstGeom>
+          <a:solidFill xmlns:a="http://schemas.openxmlformats.org/drawingml/2006/main">
+            <a:srgbClr val="7CACC1"/>
+          </a:solidFill>
+          <a:ln xmlns:a="http://schemas.openxmlformats.org/drawingml/2006/main" w="0">
+            <a:noFill/>
+            <a:prstDash val="solid"/>
+          </a:ln>
+        </p:spPr>
+      </p:sp>
+      <p:sp>
+        <p:nvSpPr>
+          <p:cNvPr id="64" name="header-cape-gradient-31">
+            <a:extLst xmlns:a="http://schemas.openxmlformats.org/drawingml/2006/main">
+              <a:ext uri="{FF2B5EF4-FFF2-40B4-BE49-F238E27FC236}">
+                <a16:creationId xmlns:a16="http://schemas.microsoft.com/office/drawing/2014/main" id="{78395B9B-1E76-4F2E-8FAA-EE1CF12F300B}"/>
+              </a:ext>
+            </a:extLst>
+          </p:cNvPr>
+          <p:cNvSpPr>
+            <a:spLocks xmlns:a="http://schemas.openxmlformats.org/drawingml/2006/main" noGrp="1"/>
+          </p:cNvSpPr>
+          <p:nvPr/>
+        </p:nvSpPr>
+        <p:spPr>
+          <a:xfrm xmlns:a="http://schemas.openxmlformats.org/drawingml/2006/main">
+            <a:off x="40130016" y="4667250"/>
+            <a:ext cx="1347192" cy="285750"/>
+          </a:xfrm>
+          <a:prstGeom xmlns:a="http://schemas.openxmlformats.org/drawingml/2006/main" prst="roundRect">
+            <a:avLst>
+              <a:gd name="adj" fmla="val 0"/>
+            </a:avLst>
+          </a:prstGeom>
+          <a:solidFill xmlns:a="http://schemas.openxmlformats.org/drawingml/2006/main">
+            <a:srgbClr val="83B2C5"/>
+          </a:solidFill>
+          <a:ln xmlns:a="http://schemas.openxmlformats.org/drawingml/2006/main" w="0">
+            <a:noFill/>
+            <a:prstDash val="solid"/>
+          </a:ln>
+        </p:spPr>
+      </p:sp>
+      <p:sp>
+        <p:nvSpPr>
+          <p:cNvPr id="65" name="header-cape-gradient-32">
+            <a:extLst xmlns:a="http://schemas.openxmlformats.org/drawingml/2006/main">
+              <a:ext uri="{FF2B5EF4-FFF2-40B4-BE49-F238E27FC236}">
+                <a16:creationId xmlns:a16="http://schemas.microsoft.com/office/drawing/2014/main" id="{302BAB73-00DC-43D6-A7C9-7DF6DF5A6DF6}"/>
+              </a:ext>
+            </a:extLst>
+          </p:cNvPr>
+          <p:cNvSpPr>
+            <a:spLocks xmlns:a="http://schemas.openxmlformats.org/drawingml/2006/main" noGrp="1"/>
+          </p:cNvSpPr>
+          <p:nvPr/>
+        </p:nvSpPr>
+        <p:spPr>
+          <a:xfrm xmlns:a="http://schemas.openxmlformats.org/drawingml/2006/main">
+            <a:off x="41467683" y="4667250"/>
+            <a:ext cx="1347192" cy="285750"/>
+          </a:xfrm>
+          <a:prstGeom xmlns:a="http://schemas.openxmlformats.org/drawingml/2006/main" prst="roundRect">
+            <a:avLst>
+              <a:gd name="adj" fmla="val 0"/>
+            </a:avLst>
+          </a:prstGeom>
+          <a:solidFill xmlns:a="http://schemas.openxmlformats.org/drawingml/2006/main">
+            <a:srgbClr val="89B8C9"/>
+          </a:solidFill>
+          <a:ln xmlns:a="http://schemas.openxmlformats.org/drawingml/2006/main" w="0">
+            <a:noFill/>
+            <a:prstDash val="solid"/>
+          </a:ln>
+        </p:spPr>
+      </p:sp>
+      <p:sp>
+        <p:nvSpPr>
+          <p:cNvPr id="66" name="poster-title">
+            <a:extLst xmlns:a="http://schemas.openxmlformats.org/drawingml/2006/main">
+              <a:ext uri="{FF2B5EF4-FFF2-40B4-BE49-F238E27FC236}">
+                <a16:creationId xmlns:a16="http://schemas.microsoft.com/office/drawing/2014/main" id="{59A4D3EE-2359-44AB-BB3D-AA826194116A}"/>
               </a:ext>
             </a:extLst>
           </p:cNvPr>
@@ -1189,10 +3268,10 @@
       </p:sp>
       <p:sp>
         <p:nvSpPr>
-          <p:cNvPr id="4" name="authors">
-            <a:extLst xmlns:a="http://schemas.openxmlformats.org/drawingml/2006/main">
-              <a:ext uri="{FF2B5EF4-FFF2-40B4-BE49-F238E27FC236}">
-                <a16:creationId xmlns:a16="http://schemas.microsoft.com/office/drawing/2014/main" id="{CA3C78B6-F320-433B-97DA-C15208408C1A}"/>
+          <p:cNvPr id="67" name="authors">
+            <a:extLst xmlns:a="http://schemas.openxmlformats.org/drawingml/2006/main">
+              <a:ext uri="{FF2B5EF4-FFF2-40B4-BE49-F238E27FC236}">
+                <a16:creationId xmlns:a16="http://schemas.microsoft.com/office/drawing/2014/main" id="{12A33C00-07C6-4655-ABC7-9B9D20EC6021}"/>
               </a:ext>
             </a:extLst>
           </p:cNvPr>
@@ -1239,10 +3318,10 @@
       </p:sp>
       <p:sp>
         <p:nvSpPr>
-          <p:cNvPr id="5" name="affiliations">
-            <a:extLst xmlns:a="http://schemas.openxmlformats.org/drawingml/2006/main">
-              <a:ext uri="{FF2B5EF4-FFF2-40B4-BE49-F238E27FC236}">
-                <a16:creationId xmlns:a16="http://schemas.microsoft.com/office/drawing/2014/main" id="{58A9EF36-FD36-4ACF-ABD7-4AC1C7171307}"/>
+          <p:cNvPr id="68" name="affiliations">
+            <a:extLst xmlns:a="http://schemas.openxmlformats.org/drawingml/2006/main">
+              <a:ext uri="{FF2B5EF4-FFF2-40B4-BE49-F238E27FC236}">
+                <a16:creationId xmlns:a16="http://schemas.microsoft.com/office/drawing/2014/main" id="{4CBCEEC8-C723-411B-8EC9-8DEE5CFCA9C5}"/>
               </a:ext>
             </a:extLst>
           </p:cNvPr>
@@ -1272,14 +3351,14 @@
             <a:pPr>
               <a:defRPr sz="2175">
                 <a:solidFill>
-                  <a:srgbClr val="F6F8FA"/>
+                  <a:srgbClr val="F6F2EE"/>
                 </a:solidFill>
               </a:defRPr>
             </a:pPr>
             <a:r>
               <a:rPr sz="2175">
                 <a:solidFill>
-                  <a:srgbClr val="F6F8FA"/>
+                  <a:srgbClr val="F6F2EE"/>
                 </a:solidFill>
               </a:rPr>
               <a:t>Bioinformatics profile · CC0-1.0</a:t>
@@ -1289,10 +3368,10 @@
       </p:sp>
       <p:sp>
         <p:nvSpPr>
-          <p:cNvPr id="6" name="citation">
-            <a:extLst xmlns:a="http://schemas.openxmlformats.org/drawingml/2006/main">
-              <a:ext uri="{FF2B5EF4-FFF2-40B4-BE49-F238E27FC236}">
-                <a16:creationId xmlns:a16="http://schemas.microsoft.com/office/drawing/2014/main" id="{8DB50AB8-5716-4476-82B8-4DF549C4B44F}"/>
+          <p:cNvPr id="69" name="citation">
+            <a:extLst xmlns:a="http://schemas.openxmlformats.org/drawingml/2006/main">
+              <a:ext uri="{FF2B5EF4-FFF2-40B4-BE49-F238E27FC236}">
+                <a16:creationId xmlns:a16="http://schemas.microsoft.com/office/drawing/2014/main" id="{18DA8CCE-9046-4B37-A1F7-B9E86F4C3D3A}"/>
               </a:ext>
             </a:extLst>
           </p:cNvPr>
@@ -1322,27 +3401,27 @@
             <a:pPr>
               <a:defRPr sz="1950" b="1">
                 <a:solidFill>
-                  <a:srgbClr val="E8B44C"/>
+                  <a:srgbClr val="E5BC6C"/>
                 </a:solidFill>
               </a:defRPr>
             </a:pPr>
             <a:r>
               <a:rPr sz="1950" b="1">
                 <a:solidFill>
-                  <a:srgbClr val="E8B44C"/>
+                  <a:srgbClr val="E5BC6C"/>
                 </a:solidFill>
               </a:rPr>
-              <a:t>DOI POSTEX-SYNTH-2026-001</a:t>
+              <a:t>Synthetic ID POSTEX-SYNTH-2026-001</a:t>
             </a:r>
           </a:p>
         </p:txBody>
       </p:sp>
       <p:sp>
         <p:nvSpPr>
-          <p:cNvPr id="7" name="logo-slot-institution-logo">
-            <a:extLst xmlns:a="http://schemas.openxmlformats.org/drawingml/2006/main">
-              <a:ext uri="{FF2B5EF4-FFF2-40B4-BE49-F238E27FC236}">
-                <a16:creationId xmlns:a16="http://schemas.microsoft.com/office/drawing/2014/main" id="{2D965C94-6D88-477E-8EF5-2BF9462E36E7}"/>
+          <p:cNvPr id="70" name="logo-slot-institution-logo">
+            <a:extLst xmlns:a="http://schemas.openxmlformats.org/drawingml/2006/main">
+              <a:ext uri="{FF2B5EF4-FFF2-40B4-BE49-F238E27FC236}">
+                <a16:creationId xmlns:a16="http://schemas.microsoft.com/office/drawing/2014/main" id="{2F5E89F8-1B10-48BD-AE7B-E49DE03CF5AB}"/>
               </a:ext>
             </a:extLst>
           </p:cNvPr>
@@ -1366,7 +3445,7 @@
           </a:solidFill>
           <a:ln xmlns:a="http://schemas.openxmlformats.org/drawingml/2006/main" w="19050">
             <a:solidFill>
-              <a:srgbClr val="D9E2EC"/>
+              <a:srgbClr val="DDE5E7"/>
             </a:solidFill>
             <a:prstDash val="solid"/>
           </a:ln>
@@ -1374,10 +3453,10 @@
       </p:sp>
       <p:sp>
         <p:nvSpPr>
-          <p:cNvPr id="8" name="logo-placeholder-institution-logo">
-            <a:extLst xmlns:a="http://schemas.openxmlformats.org/drawingml/2006/main">
-              <a:ext uri="{FF2B5EF4-FFF2-40B4-BE49-F238E27FC236}">
-                <a16:creationId xmlns:a16="http://schemas.microsoft.com/office/drawing/2014/main" id="{206ADB59-5EAD-4331-A0F8-65CAF481505D}"/>
+          <p:cNvPr id="71" name="logo-placeholder-institution-logo">
+            <a:extLst xmlns:a="http://schemas.openxmlformats.org/drawingml/2006/main">
+              <a:ext uri="{FF2B5EF4-FFF2-40B4-BE49-F238E27FC236}">
+                <a16:creationId xmlns:a16="http://schemas.microsoft.com/office/drawing/2014/main" id="{ECB3B5B8-5699-42F3-B422-F8FFFCA40D8D}"/>
               </a:ext>
             </a:extLst>
           </p:cNvPr>
@@ -1407,14 +3486,14 @@
             <a:pPr algn="ctr">
               <a:defRPr sz="2025" b="1">
                 <a:solidFill>
-                  <a:srgbClr val="0F5F73"/>
+                  <a:srgbClr val="3E5C78"/>
                 </a:solidFill>
               </a:defRPr>
             </a:pPr>
             <a:r>
               <a:rPr sz="2025" b="1">
                 <a:solidFill>
-                  <a:srgbClr val="0F5F73"/>
+                  <a:srgbClr val="3E5C78"/>
                 </a:solidFill>
               </a:rPr>
               <a:t>Institution logo</a:t>
@@ -1424,10 +3503,10 @@
       </p:sp>
       <p:sp>
         <p:nvSpPr>
-          <p:cNvPr id="9" name="header-summary">
-            <a:extLst xmlns:a="http://schemas.openxmlformats.org/drawingml/2006/main">
-              <a:ext uri="{FF2B5EF4-FFF2-40B4-BE49-F238E27FC236}">
-                <a16:creationId xmlns:a16="http://schemas.microsoft.com/office/drawing/2014/main" id="{72F85B8F-A0D6-40BC-A346-30ECCB86709C}"/>
+          <p:cNvPr id="72" name="header-summary">
+            <a:extLst xmlns:a="http://schemas.openxmlformats.org/drawingml/2006/main">
+              <a:ext uri="{FF2B5EF4-FFF2-40B4-BE49-F238E27FC236}">
+                <a16:creationId xmlns:a16="http://schemas.microsoft.com/office/drawing/2014/main" id="{03300875-4BF6-4A0E-9061-36F0BFA48D58}"/>
               </a:ext>
             </a:extLst>
           </p:cNvPr>
@@ -1457,10 +3536,10 @@
       </p:sp>
       <p:sp>
         <p:nvSpPr>
-          <p:cNvPr id="10" name="header-metric-1-value">
-            <a:extLst xmlns:a="http://schemas.openxmlformats.org/drawingml/2006/main">
-              <a:ext uri="{FF2B5EF4-FFF2-40B4-BE49-F238E27FC236}">
-                <a16:creationId xmlns:a16="http://schemas.microsoft.com/office/drawing/2014/main" id="{E9E0F0C8-35DD-4BD7-B86B-BC95F6AA4269}"/>
+          <p:cNvPr id="73" name="header-metric-1-value">
+            <a:extLst xmlns:a="http://schemas.openxmlformats.org/drawingml/2006/main">
+              <a:ext uri="{FF2B5EF4-FFF2-40B4-BE49-F238E27FC236}">
+                <a16:creationId xmlns:a16="http://schemas.microsoft.com/office/drawing/2014/main" id="{8D404532-AEB5-439A-B661-136B4D44C427}"/>
               </a:ext>
             </a:extLst>
           </p:cNvPr>
@@ -1490,14 +3569,14 @@
             <a:pPr>
               <a:defRPr sz="5100" b="1">
                 <a:solidFill>
-                  <a:srgbClr val="0F5F73"/>
+                  <a:srgbClr val="3E5C78"/>
                 </a:solidFill>
               </a:defRPr>
             </a:pPr>
             <a:r>
               <a:rPr sz="5100" b="1">
                 <a:solidFill>
-                  <a:srgbClr val="0F5F73"/>
+                  <a:srgbClr val="3E5C78"/>
                 </a:solidFill>
               </a:rPr>
               <a:t>1,240</a:t>
@@ -1507,10 +3586,10 @@
       </p:sp>
       <p:sp>
         <p:nvSpPr>
-          <p:cNvPr id="11" name="header-metric-1-label">
-            <a:extLst xmlns:a="http://schemas.openxmlformats.org/drawingml/2006/main">
-              <a:ext uri="{FF2B5EF4-FFF2-40B4-BE49-F238E27FC236}">
-                <a16:creationId xmlns:a16="http://schemas.microsoft.com/office/drawing/2014/main" id="{1A66B039-07CA-4580-BBB4-7A4CA292AB3E}"/>
+          <p:cNvPr id="74" name="header-metric-1-label">
+            <a:extLst xmlns:a="http://schemas.openxmlformats.org/drawingml/2006/main">
+              <a:ext uri="{FF2B5EF4-FFF2-40B4-BE49-F238E27FC236}">
+                <a16:creationId xmlns:a16="http://schemas.microsoft.com/office/drawing/2014/main" id="{E7220522-BA9E-4E5D-A226-A07745AE8324}"/>
               </a:ext>
             </a:extLst>
           </p:cNvPr>
@@ -1540,14 +3619,14 @@
             <a:pPr>
               <a:defRPr sz="2325" b="1">
                 <a:solidFill>
-                  <a:srgbClr val="102A43"/>
+                  <a:srgbClr val="293F55"/>
                 </a:solidFill>
               </a:defRPr>
             </a:pPr>
             <a:r>
               <a:rPr sz="2325" b="1">
                 <a:solidFill>
-                  <a:srgbClr val="102A43"/>
+                  <a:srgbClr val="293F55"/>
                 </a:solidFill>
               </a:rPr>
               <a:t>total profiles</a:t>
@@ -1557,10 +3636,10 @@
       </p:sp>
       <p:sp>
         <p:nvSpPr>
-          <p:cNvPr id="12" name="header-metric-2-value">
-            <a:extLst xmlns:a="http://schemas.openxmlformats.org/drawingml/2006/main">
-              <a:ext uri="{FF2B5EF4-FFF2-40B4-BE49-F238E27FC236}">
-                <a16:creationId xmlns:a16="http://schemas.microsoft.com/office/drawing/2014/main" id="{F8E34B70-B1AF-4CFE-BB41-D53E4FF014A6}"/>
+          <p:cNvPr id="75" name="header-metric-2-value">
+            <a:extLst xmlns:a="http://schemas.openxmlformats.org/drawingml/2006/main">
+              <a:ext uri="{FF2B5EF4-FFF2-40B4-BE49-F238E27FC236}">
+                <a16:creationId xmlns:a16="http://schemas.microsoft.com/office/drawing/2014/main" id="{5027EF3F-E1C4-4693-B74D-B798B760F5DA}"/>
               </a:ext>
             </a:extLst>
           </p:cNvPr>
@@ -1590,14 +3669,14 @@
             <a:pPr>
               <a:defRPr sz="5100" b="1">
                 <a:solidFill>
-                  <a:srgbClr val="2C8C99"/>
+                  <a:srgbClr val="487AA1"/>
                 </a:solidFill>
               </a:defRPr>
             </a:pPr>
             <a:r>
               <a:rPr sz="5100" b="1">
                 <a:solidFill>
-                  <a:srgbClr val="2C8C99"/>
+                  <a:srgbClr val="487AA1"/>
                 </a:solidFill>
               </a:rPr>
               <a:t>12</a:t>
@@ -1607,10 +3686,10 @@
       </p:sp>
       <p:sp>
         <p:nvSpPr>
-          <p:cNvPr id="13" name="header-metric-2-label">
-            <a:extLst xmlns:a="http://schemas.openxmlformats.org/drawingml/2006/main">
-              <a:ext uri="{FF2B5EF4-FFF2-40B4-BE49-F238E27FC236}">
-                <a16:creationId xmlns:a16="http://schemas.microsoft.com/office/drawing/2014/main" id="{6A0C7403-269A-4CB9-96D7-F1F13647BCDA}"/>
+          <p:cNvPr id="76" name="header-metric-2-label">
+            <a:extLst xmlns:a="http://schemas.openxmlformats.org/drawingml/2006/main">
+              <a:ext uri="{FF2B5EF4-FFF2-40B4-BE49-F238E27FC236}">
+                <a16:creationId xmlns:a16="http://schemas.microsoft.com/office/drawing/2014/main" id="{23D2074D-0264-4E6C-92B8-10712FC378E3}"/>
               </a:ext>
             </a:extLst>
           </p:cNvPr>
@@ -1640,14 +3719,14 @@
             <a:pPr>
               <a:defRPr sz="2325" b="1">
                 <a:solidFill>
-                  <a:srgbClr val="102A43"/>
+                  <a:srgbClr val="293F55"/>
                 </a:solidFill>
               </a:defRPr>
             </a:pPr>
             <a:r>
               <a:rPr sz="2325" b="1">
                 <a:solidFill>
-                  <a:srgbClr val="102A43"/>
+                  <a:srgbClr val="293F55"/>
                 </a:solidFill>
               </a:rPr>
               <a:t>selected features</a:t>
@@ -1657,10 +3736,10 @@
       </p:sp>
       <p:sp>
         <p:nvSpPr>
-          <p:cNvPr id="14" name="header-metric-3-value">
-            <a:extLst xmlns:a="http://schemas.openxmlformats.org/drawingml/2006/main">
-              <a:ext uri="{FF2B5EF4-FFF2-40B4-BE49-F238E27FC236}">
-                <a16:creationId xmlns:a16="http://schemas.microsoft.com/office/drawing/2014/main" id="{E0EA2150-3D92-4EE3-8C31-96DE14FD2674}"/>
+          <p:cNvPr id="77" name="header-metric-3-value">
+            <a:extLst xmlns:a="http://schemas.openxmlformats.org/drawingml/2006/main">
+              <a:ext uri="{FF2B5EF4-FFF2-40B4-BE49-F238E27FC236}">
+                <a16:creationId xmlns:a16="http://schemas.microsoft.com/office/drawing/2014/main" id="{D5E41185-F8A5-4B4A-96F4-571D210EEC63}"/>
               </a:ext>
             </a:extLst>
           </p:cNvPr>
@@ -1690,14 +3769,14 @@
             <a:pPr>
               <a:defRPr sz="5100" b="1">
                 <a:solidFill>
-                  <a:srgbClr val="E8B44C"/>
+                  <a:srgbClr val="E5BC6C"/>
                 </a:solidFill>
               </a:defRPr>
             </a:pPr>
             <a:r>
               <a:rPr sz="5100" b="1">
                 <a:solidFill>
-                  <a:srgbClr val="E8B44C"/>
+                  <a:srgbClr val="E5BC6C"/>
                 </a:solidFill>
               </a:rPr>
               <a:t>0.75</a:t>
@@ -1707,10 +3786,10 @@
       </p:sp>
       <p:sp>
         <p:nvSpPr>
-          <p:cNvPr id="15" name="header-metric-3-label">
-            <a:extLst xmlns:a="http://schemas.openxmlformats.org/drawingml/2006/main">
-              <a:ext uri="{FF2B5EF4-FFF2-40B4-BE49-F238E27FC236}">
-                <a16:creationId xmlns:a16="http://schemas.microsoft.com/office/drawing/2014/main" id="{8F2D3E5D-7E00-4374-9D6C-7DC3E1234BE6}"/>
+          <p:cNvPr id="78" name="header-metric-3-label">
+            <a:extLst xmlns:a="http://schemas.openxmlformats.org/drawingml/2006/main">
+              <a:ext uri="{FF2B5EF4-FFF2-40B4-BE49-F238E27FC236}">
+                <a16:creationId xmlns:a16="http://schemas.microsoft.com/office/drawing/2014/main" id="{9F08CAE4-6E4A-4A17-8A64-C07EC371761F}"/>
               </a:ext>
             </a:extLst>
           </p:cNvPr>
@@ -1740,14 +3819,14 @@
             <a:pPr>
               <a:defRPr sz="2325" b="1">
                 <a:solidFill>
-                  <a:srgbClr val="102A43"/>
+                  <a:srgbClr val="293F55"/>
                 </a:solidFill>
               </a:defRPr>
             </a:pPr>
             <a:r>
               <a:rPr sz="2325" b="1">
                 <a:solidFill>
-                  <a:srgbClr val="102A43"/>
+                  <a:srgbClr val="293F55"/>
                 </a:solidFill>
               </a:rPr>
               <a:t>external c index a</a:t>
@@ -1757,10 +3836,10 @@
       </p:sp>
       <p:sp>
         <p:nvSpPr>
-          <p:cNvPr id="16" name="question-title">
-            <a:extLst xmlns:a="http://schemas.openxmlformats.org/drawingml/2006/main">
-              <a:ext uri="{FF2B5EF4-FFF2-40B4-BE49-F238E27FC236}">
-                <a16:creationId xmlns:a16="http://schemas.microsoft.com/office/drawing/2014/main" id="{DDD0D857-5550-48F0-82EA-71947DE4962D}"/>
+          <p:cNvPr id="79" name="question-title">
+            <a:extLst xmlns:a="http://schemas.openxmlformats.org/drawingml/2006/main">
+              <a:ext uri="{FF2B5EF4-FFF2-40B4-BE49-F238E27FC236}">
+                <a16:creationId xmlns:a16="http://schemas.microsoft.com/office/drawing/2014/main" id="{8D4C0A82-6D6F-4637-9639-49F0702E50C9}"/>
               </a:ext>
             </a:extLst>
           </p:cNvPr>
@@ -1790,14 +3869,14 @@
             <a:pPr>
               <a:defRPr sz="3600" b="1">
                 <a:solidFill>
-                  <a:srgbClr val="0F5F73"/>
+                  <a:srgbClr val="3E5C78"/>
                 </a:solidFill>
               </a:defRPr>
             </a:pPr>
             <a:r>
               <a:rPr sz="3600" b="1">
                 <a:solidFill>
-                  <a:srgbClr val="0F5F73"/>
+                  <a:srgbClr val="3E5C78"/>
                 </a:solidFill>
               </a:rPr>
               <a:t>Communication objective</a:t>
@@ -1807,10 +3886,10 @@
       </p:sp>
       <p:sp>
         <p:nvSpPr>
-          <p:cNvPr id="17" name="question-rule">
-            <a:extLst xmlns:a="http://schemas.openxmlformats.org/drawingml/2006/main">
-              <a:ext uri="{FF2B5EF4-FFF2-40B4-BE49-F238E27FC236}">
-                <a16:creationId xmlns:a16="http://schemas.microsoft.com/office/drawing/2014/main" id="{18BB1C6F-13A3-4CDC-A02D-363D0398BCC7}"/>
+          <p:cNvPr id="80" name="question-rule">
+            <a:extLst xmlns:a="http://schemas.openxmlformats.org/drawingml/2006/main">
+              <a:ext uri="{FF2B5EF4-FFF2-40B4-BE49-F238E27FC236}">
+                <a16:creationId xmlns:a16="http://schemas.microsoft.com/office/drawing/2014/main" id="{7F49F4FF-E335-4E2B-9E36-3D2CE5A3DECA}"/>
               </a:ext>
             </a:extLst>
           </p:cNvPr>
@@ -1830,20 +3909,20 @@
             </a:avLst>
           </a:prstGeom>
           <a:solidFill xmlns:a="http://schemas.openxmlformats.org/drawingml/2006/main">
-            <a:srgbClr val="E8B44C"/>
-          </a:solidFill>
-          <a:ln xmlns:a="http://schemas.openxmlformats.org/drawingml/2006/main" w="0">
-            <a:noFill/>
-            <a:prstDash val="solid"/>
-          </a:ln>
-        </p:spPr>
-      </p:sp>
-      <p:sp>
-        <p:nvSpPr>
-          <p:cNvPr id="18" name="research-question">
-            <a:extLst xmlns:a="http://schemas.openxmlformats.org/drawingml/2006/main">
-              <a:ext uri="{FF2B5EF4-FFF2-40B4-BE49-F238E27FC236}">
-                <a16:creationId xmlns:a16="http://schemas.microsoft.com/office/drawing/2014/main" id="{DDF2F0DB-DD44-46B7-BD06-BEA1BFAEB6A3}"/>
+            <a:srgbClr val="E5BC6C"/>
+          </a:solidFill>
+          <a:ln xmlns:a="http://schemas.openxmlformats.org/drawingml/2006/main" w="0">
+            <a:noFill/>
+            <a:prstDash val="solid"/>
+          </a:ln>
+        </p:spPr>
+      </p:sp>
+      <p:sp>
+        <p:nvSpPr>
+          <p:cNvPr id="81" name="research-question">
+            <a:extLst xmlns:a="http://schemas.openxmlformats.org/drawingml/2006/main">
+              <a:ext uri="{FF2B5EF4-FFF2-40B4-BE49-F238E27FC236}">
+                <a16:creationId xmlns:a16="http://schemas.microsoft.com/office/drawing/2014/main" id="{6790A6BD-BD57-4501-8A7F-609E4C1FB05A}"/>
               </a:ext>
             </a:extLst>
           </p:cNvPr>
@@ -1873,14 +3952,14 @@
             <a:pPr>
               <a:defRPr sz="2850">
                 <a:solidFill>
-                  <a:srgbClr val="102A43"/>
+                  <a:srgbClr val="293F55"/>
                 </a:solidFill>
               </a:defRPr>
             </a:pPr>
             <a:r>
               <a:rPr sz="2850">
                 <a:solidFill>
-                  <a:srgbClr val="102A43"/>
+                  <a:srgbClr val="293F55"/>
                 </a:solidFill>
               </a:rPr>
               <a:t>Present the paper's design, central evidence and interpretation boundary in a traceable conference-poster format.</a:t>
@@ -1890,10 +3969,10 @@
       </p:sp>
       <p:sp>
         <p:nvSpPr>
-          <p:cNvPr id="19" name="question-evidence">
-            <a:extLst xmlns:a="http://schemas.openxmlformats.org/drawingml/2006/main">
-              <a:ext uri="{FF2B5EF4-FFF2-40B4-BE49-F238E27FC236}">
-                <a16:creationId xmlns:a16="http://schemas.microsoft.com/office/drawing/2014/main" id="{10ADBB04-C5F0-4E0B-9B44-4E8891A9E206}"/>
+          <p:cNvPr id="82" name="question-evidence">
+            <a:extLst xmlns:a="http://schemas.openxmlformats.org/drawingml/2006/main">
+              <a:ext uri="{FF2B5EF4-FFF2-40B4-BE49-F238E27FC236}">
+                <a16:creationId xmlns:a16="http://schemas.microsoft.com/office/drawing/2014/main" id="{0DF8E1BD-1B47-4F4E-B519-FE1B20BC6898}"/>
               </a:ext>
             </a:extLst>
           </p:cNvPr>
@@ -1923,14 +4002,14 @@
             <a:pPr>
               <a:defRPr sz="1875" i="1">
                 <a:solidFill>
-                  <a:srgbClr val="2C8C99"/>
+                  <a:srgbClr val="487AA1"/>
                 </a:solidFill>
               </a:defRPr>
             </a:pPr>
             <a:r>
               <a:rPr sz="1875" i="1">
                 <a:solidFill>
-                  <a:srgbClr val="2C8C99"/>
+                  <a:srgbClr val="487AA1"/>
                 </a:solidFill>
               </a:rPr>
               <a:t>Evidence fixture: POSTEX-SYNTH-2026-001</a:t>
@@ -1940,10 +4019,10 @@
       </p:sp>
       <p:sp>
         <p:nvSpPr>
-          <p:cNvPr id="20" name="pipeline-title">
-            <a:extLst xmlns:a="http://schemas.openxmlformats.org/drawingml/2006/main">
-              <a:ext uri="{FF2B5EF4-FFF2-40B4-BE49-F238E27FC236}">
-                <a16:creationId xmlns:a16="http://schemas.microsoft.com/office/drawing/2014/main" id="{8B9BA2D7-E7D6-4423-93AB-574DC34066DF}"/>
+          <p:cNvPr id="83" name="pipeline-title">
+            <a:extLst xmlns:a="http://schemas.openxmlformats.org/drawingml/2006/main">
+              <a:ext uri="{FF2B5EF4-FFF2-40B4-BE49-F238E27FC236}">
+                <a16:creationId xmlns:a16="http://schemas.microsoft.com/office/drawing/2014/main" id="{C6D0FD82-A1E8-4583-8B30-6AADBCF9414F}"/>
               </a:ext>
             </a:extLst>
           </p:cNvPr>
@@ -1973,14 +4052,14 @@
             <a:pPr>
               <a:defRPr sz="3600" b="1">
                 <a:solidFill>
-                  <a:srgbClr val="0F5F73"/>
+                  <a:srgbClr val="3E5C78"/>
                 </a:solidFill>
               </a:defRPr>
             </a:pPr>
             <a:r>
               <a:rPr sz="3600" b="1">
                 <a:solidFill>
-                  <a:srgbClr val="0F5F73"/>
+                  <a:srgbClr val="3E5C78"/>
                 </a:solidFill>
               </a:rPr>
               <a:t>Required evidence structure</a:t>
@@ -1990,10 +4069,10 @@
       </p:sp>
       <p:sp>
         <p:nvSpPr>
-          <p:cNvPr id="21" name="pipeline-rule">
-            <a:extLst xmlns:a="http://schemas.openxmlformats.org/drawingml/2006/main">
-              <a:ext uri="{FF2B5EF4-FFF2-40B4-BE49-F238E27FC236}">
-                <a16:creationId xmlns:a16="http://schemas.microsoft.com/office/drawing/2014/main" id="{B0F15EB7-0E77-4DA9-AC7A-B24FC027251D}"/>
+          <p:cNvPr id="84" name="pipeline-rule">
+            <a:extLst xmlns:a="http://schemas.openxmlformats.org/drawingml/2006/main">
+              <a:ext uri="{FF2B5EF4-FFF2-40B4-BE49-F238E27FC236}">
+                <a16:creationId xmlns:a16="http://schemas.microsoft.com/office/drawing/2014/main" id="{E858C7DD-DD6A-4419-B5CF-1F2F60297EEB}"/>
               </a:ext>
             </a:extLst>
           </p:cNvPr>
@@ -2013,20 +4092,20 @@
             </a:avLst>
           </a:prstGeom>
           <a:solidFill xmlns:a="http://schemas.openxmlformats.org/drawingml/2006/main">
-            <a:srgbClr val="E8B44C"/>
-          </a:solidFill>
-          <a:ln xmlns:a="http://schemas.openxmlformats.org/drawingml/2006/main" w="0">
-            <a:noFill/>
-            <a:prstDash val="solid"/>
-          </a:ln>
-        </p:spPr>
-      </p:sp>
-      <p:sp>
-        <p:nvSpPr>
-          <p:cNvPr id="22" name="pipeline-1-number-bg">
-            <a:extLst xmlns:a="http://schemas.openxmlformats.org/drawingml/2006/main">
-              <a:ext uri="{FF2B5EF4-FFF2-40B4-BE49-F238E27FC236}">
-                <a16:creationId xmlns:a16="http://schemas.microsoft.com/office/drawing/2014/main" id="{F4E3E961-C43F-4E2A-AC56-4A4959FAD274}"/>
+            <a:srgbClr val="E5BC6C"/>
+          </a:solidFill>
+          <a:ln xmlns:a="http://schemas.openxmlformats.org/drawingml/2006/main" w="0">
+            <a:noFill/>
+            <a:prstDash val="solid"/>
+          </a:ln>
+        </p:spPr>
+      </p:sp>
+      <p:sp>
+        <p:nvSpPr>
+          <p:cNvPr id="85" name="pipeline-1-number-bg">
+            <a:extLst xmlns:a="http://schemas.openxmlformats.org/drawingml/2006/main">
+              <a:ext uri="{FF2B5EF4-FFF2-40B4-BE49-F238E27FC236}">
+                <a16:creationId xmlns:a16="http://schemas.microsoft.com/office/drawing/2014/main" id="{420584AA-80DA-45D2-83B1-AB423B8E621A}"/>
               </a:ext>
             </a:extLst>
           </p:cNvPr>
@@ -2046,20 +4125,20 @@
             </a:avLst>
           </a:prstGeom>
           <a:solidFill xmlns:a="http://schemas.openxmlformats.org/drawingml/2006/main">
-            <a:srgbClr val="E8B44C"/>
-          </a:solidFill>
-          <a:ln xmlns:a="http://schemas.openxmlformats.org/drawingml/2006/main" w="0">
-            <a:noFill/>
-            <a:prstDash val="solid"/>
-          </a:ln>
-        </p:spPr>
-      </p:sp>
-      <p:sp>
-        <p:nvSpPr>
-          <p:cNvPr id="23" name="pipeline-1-number">
-            <a:extLst xmlns:a="http://schemas.openxmlformats.org/drawingml/2006/main">
-              <a:ext uri="{FF2B5EF4-FFF2-40B4-BE49-F238E27FC236}">
-                <a16:creationId xmlns:a16="http://schemas.microsoft.com/office/drawing/2014/main" id="{C546BA6E-E38C-4DFC-84B3-8ACFF3A9C425}"/>
+            <a:srgbClr val="E5BC6C"/>
+          </a:solidFill>
+          <a:ln xmlns:a="http://schemas.openxmlformats.org/drawingml/2006/main" w="0">
+            <a:noFill/>
+            <a:prstDash val="solid"/>
+          </a:ln>
+        </p:spPr>
+      </p:sp>
+      <p:sp>
+        <p:nvSpPr>
+          <p:cNvPr id="86" name="pipeline-1-number">
+            <a:extLst xmlns:a="http://schemas.openxmlformats.org/drawingml/2006/main">
+              <a:ext uri="{FF2B5EF4-FFF2-40B4-BE49-F238E27FC236}">
+                <a16:creationId xmlns:a16="http://schemas.microsoft.com/office/drawing/2014/main" id="{1FF72836-FDBD-471A-8440-A849A731D0DF}"/>
               </a:ext>
             </a:extLst>
           </p:cNvPr>
@@ -2089,14 +4168,14 @@
             <a:pPr algn="ctr">
               <a:defRPr sz="2325" b="1">
                 <a:solidFill>
-                  <a:srgbClr val="102A43"/>
+                  <a:srgbClr val="293F55"/>
                 </a:solidFill>
               </a:defRPr>
             </a:pPr>
             <a:r>
               <a:rPr sz="2325" b="1">
                 <a:solidFill>
-                  <a:srgbClr val="102A43"/>
+                  <a:srgbClr val="293F55"/>
                 </a:solidFill>
               </a:rPr>
               <a:t>1</a:t>
@@ -2106,10 +4185,10 @@
       </p:sp>
       <p:sp>
         <p:nvSpPr>
-          <p:cNvPr id="24" name="pipeline-1-text">
-            <a:extLst xmlns:a="http://schemas.openxmlformats.org/drawingml/2006/main">
-              <a:ext uri="{FF2B5EF4-FFF2-40B4-BE49-F238E27FC236}">
-                <a16:creationId xmlns:a16="http://schemas.microsoft.com/office/drawing/2014/main" id="{BC84808E-4C0E-4E3A-B0AC-BBF8847C0F84}"/>
+          <p:cNvPr id="87" name="pipeline-1-text">
+            <a:extLst xmlns:a="http://schemas.openxmlformats.org/drawingml/2006/main">
+              <a:ext uri="{FF2B5EF4-FFF2-40B4-BE49-F238E27FC236}">
+                <a16:creationId xmlns:a16="http://schemas.microsoft.com/office/drawing/2014/main" id="{FBA5CA6E-17C7-4453-B6AE-7CBBB12F42B1}"/>
               </a:ext>
             </a:extLst>
           </p:cNvPr>
@@ -2139,14 +4218,14 @@
             <a:pPr>
               <a:defRPr sz="2850" b="1">
                 <a:solidFill>
-                  <a:srgbClr val="102A43"/>
+                  <a:srgbClr val="293F55"/>
                 </a:solidFill>
               </a:defRPr>
             </a:pPr>
             <a:r>
               <a:rPr sz="2850" b="1">
                 <a:solidFill>
-                  <a:srgbClr val="102A43"/>
+                  <a:srgbClr val="293F55"/>
                 </a:solidFill>
               </a:rPr>
               <a:t>Research Question</a:t>
@@ -2156,10 +4235,10 @@
       </p:sp>
       <p:sp>
         <p:nvSpPr>
-          <p:cNvPr id="25" name="pipeline-2-number-bg">
-            <a:extLst xmlns:a="http://schemas.openxmlformats.org/drawingml/2006/main">
-              <a:ext uri="{FF2B5EF4-FFF2-40B4-BE49-F238E27FC236}">
-                <a16:creationId xmlns:a16="http://schemas.microsoft.com/office/drawing/2014/main" id="{E625366C-433D-417A-ADD4-B3AB701A50E8}"/>
+          <p:cNvPr id="88" name="pipeline-2-number-bg">
+            <a:extLst xmlns:a="http://schemas.openxmlformats.org/drawingml/2006/main">
+              <a:ext uri="{FF2B5EF4-FFF2-40B4-BE49-F238E27FC236}">
+                <a16:creationId xmlns:a16="http://schemas.microsoft.com/office/drawing/2014/main" id="{D88383CF-49E7-4557-ABB5-374DFE592A30}"/>
               </a:ext>
             </a:extLst>
           </p:cNvPr>
@@ -2179,20 +4258,20 @@
             </a:avLst>
           </a:prstGeom>
           <a:solidFill xmlns:a="http://schemas.openxmlformats.org/drawingml/2006/main">
-            <a:srgbClr val="E8B44C"/>
-          </a:solidFill>
-          <a:ln xmlns:a="http://schemas.openxmlformats.org/drawingml/2006/main" w="0">
-            <a:noFill/>
-            <a:prstDash val="solid"/>
-          </a:ln>
-        </p:spPr>
-      </p:sp>
-      <p:sp>
-        <p:nvSpPr>
-          <p:cNvPr id="26" name="pipeline-2-number">
-            <a:extLst xmlns:a="http://schemas.openxmlformats.org/drawingml/2006/main">
-              <a:ext uri="{FF2B5EF4-FFF2-40B4-BE49-F238E27FC236}">
-                <a16:creationId xmlns:a16="http://schemas.microsoft.com/office/drawing/2014/main" id="{B08AB636-BCA5-4195-9EDF-E7EB2FE6693E}"/>
+            <a:srgbClr val="E5BC6C"/>
+          </a:solidFill>
+          <a:ln xmlns:a="http://schemas.openxmlformats.org/drawingml/2006/main" w="0">
+            <a:noFill/>
+            <a:prstDash val="solid"/>
+          </a:ln>
+        </p:spPr>
+      </p:sp>
+      <p:sp>
+        <p:nvSpPr>
+          <p:cNvPr id="89" name="pipeline-2-number">
+            <a:extLst xmlns:a="http://schemas.openxmlformats.org/drawingml/2006/main">
+              <a:ext uri="{FF2B5EF4-FFF2-40B4-BE49-F238E27FC236}">
+                <a16:creationId xmlns:a16="http://schemas.microsoft.com/office/drawing/2014/main" id="{ACD7105D-29FD-4E24-A7C2-245E98631F33}"/>
               </a:ext>
             </a:extLst>
           </p:cNvPr>
@@ -2222,14 +4301,14 @@
             <a:pPr algn="ctr">
               <a:defRPr sz="2325" b="1">
                 <a:solidFill>
-                  <a:srgbClr val="102A43"/>
+                  <a:srgbClr val="293F55"/>
                 </a:solidFill>
               </a:defRPr>
             </a:pPr>
             <a:r>
               <a:rPr sz="2325" b="1">
                 <a:solidFill>
-                  <a:srgbClr val="102A43"/>
+                  <a:srgbClr val="293F55"/>
                 </a:solidFill>
               </a:rPr>
               <a:t>2</a:t>
@@ -2239,10 +4318,10 @@
       </p:sp>
       <p:sp>
         <p:nvSpPr>
-          <p:cNvPr id="27" name="pipeline-2-text">
-            <a:extLst xmlns:a="http://schemas.openxmlformats.org/drawingml/2006/main">
-              <a:ext uri="{FF2B5EF4-FFF2-40B4-BE49-F238E27FC236}">
-                <a16:creationId xmlns:a16="http://schemas.microsoft.com/office/drawing/2014/main" id="{AA1DAB5A-140C-4B78-9B74-060C152CB93A}"/>
+          <p:cNvPr id="90" name="pipeline-2-text">
+            <a:extLst xmlns:a="http://schemas.openxmlformats.org/drawingml/2006/main">
+              <a:ext uri="{FF2B5EF4-FFF2-40B4-BE49-F238E27FC236}">
+                <a16:creationId xmlns:a16="http://schemas.microsoft.com/office/drawing/2014/main" id="{4B00C66E-A0C6-46CB-BC61-66E095BA29D9}"/>
               </a:ext>
             </a:extLst>
           </p:cNvPr>
@@ -2272,14 +4351,14 @@
             <a:pPr>
               <a:defRPr sz="2850" b="1">
                 <a:solidFill>
-                  <a:srgbClr val="102A43"/>
+                  <a:srgbClr val="293F55"/>
                 </a:solidFill>
               </a:defRPr>
             </a:pPr>
             <a:r>
               <a:rPr sz="2850" b="1">
                 <a:solidFill>
-                  <a:srgbClr val="102A43"/>
+                  <a:srgbClr val="293F55"/>
                 </a:solidFill>
               </a:rPr>
               <a:t>Datasets</a:t>
@@ -2289,10 +4368,10 @@
       </p:sp>
       <p:sp>
         <p:nvSpPr>
-          <p:cNvPr id="28" name="pipeline-3-number-bg">
-            <a:extLst xmlns:a="http://schemas.openxmlformats.org/drawingml/2006/main">
-              <a:ext uri="{FF2B5EF4-FFF2-40B4-BE49-F238E27FC236}">
-                <a16:creationId xmlns:a16="http://schemas.microsoft.com/office/drawing/2014/main" id="{C1834EAC-B260-4FA3-A4B1-69A7D505E82B}"/>
+          <p:cNvPr id="91" name="pipeline-3-number-bg">
+            <a:extLst xmlns:a="http://schemas.openxmlformats.org/drawingml/2006/main">
+              <a:ext uri="{FF2B5EF4-FFF2-40B4-BE49-F238E27FC236}">
+                <a16:creationId xmlns:a16="http://schemas.microsoft.com/office/drawing/2014/main" id="{CE35BF52-9EBF-4B14-9A5E-67CC33BAE973}"/>
               </a:ext>
             </a:extLst>
           </p:cNvPr>
@@ -2312,20 +4391,20 @@
             </a:avLst>
           </a:prstGeom>
           <a:solidFill xmlns:a="http://schemas.openxmlformats.org/drawingml/2006/main">
-            <a:srgbClr val="E8B44C"/>
-          </a:solidFill>
-          <a:ln xmlns:a="http://schemas.openxmlformats.org/drawingml/2006/main" w="0">
-            <a:noFill/>
-            <a:prstDash val="solid"/>
-          </a:ln>
-        </p:spPr>
-      </p:sp>
-      <p:sp>
-        <p:nvSpPr>
-          <p:cNvPr id="29" name="pipeline-3-number">
-            <a:extLst xmlns:a="http://schemas.openxmlformats.org/drawingml/2006/main">
-              <a:ext uri="{FF2B5EF4-FFF2-40B4-BE49-F238E27FC236}">
-                <a16:creationId xmlns:a16="http://schemas.microsoft.com/office/drawing/2014/main" id="{90EC0F46-6174-4DBC-AF59-3A19004A2476}"/>
+            <a:srgbClr val="E5BC6C"/>
+          </a:solidFill>
+          <a:ln xmlns:a="http://schemas.openxmlformats.org/drawingml/2006/main" w="0">
+            <a:noFill/>
+            <a:prstDash val="solid"/>
+          </a:ln>
+        </p:spPr>
+      </p:sp>
+      <p:sp>
+        <p:nvSpPr>
+          <p:cNvPr id="92" name="pipeline-3-number">
+            <a:extLst xmlns:a="http://schemas.openxmlformats.org/drawingml/2006/main">
+              <a:ext uri="{FF2B5EF4-FFF2-40B4-BE49-F238E27FC236}">
+                <a16:creationId xmlns:a16="http://schemas.microsoft.com/office/drawing/2014/main" id="{C47C3E77-8864-4019-B8FB-1637BC6B3162}"/>
               </a:ext>
             </a:extLst>
           </p:cNvPr>
@@ -2355,14 +4434,14 @@
             <a:pPr algn="ctr">
               <a:defRPr sz="2325" b="1">
                 <a:solidFill>
-                  <a:srgbClr val="102A43"/>
+                  <a:srgbClr val="293F55"/>
                 </a:solidFill>
               </a:defRPr>
             </a:pPr>
             <a:r>
               <a:rPr sz="2325" b="1">
                 <a:solidFill>
-                  <a:srgbClr val="102A43"/>
+                  <a:srgbClr val="293F55"/>
                 </a:solidFill>
               </a:rPr>
               <a:t>3</a:t>
@@ -2372,10 +4451,10 @@
       </p:sp>
       <p:sp>
         <p:nvSpPr>
-          <p:cNvPr id="30" name="pipeline-3-text">
-            <a:extLst xmlns:a="http://schemas.openxmlformats.org/drawingml/2006/main">
-              <a:ext uri="{FF2B5EF4-FFF2-40B4-BE49-F238E27FC236}">
-                <a16:creationId xmlns:a16="http://schemas.microsoft.com/office/drawing/2014/main" id="{33B960BB-63C5-4793-B19A-F01D0C52B86F}"/>
+          <p:cNvPr id="93" name="pipeline-3-text">
+            <a:extLst xmlns:a="http://schemas.openxmlformats.org/drawingml/2006/main">
+              <a:ext uri="{FF2B5EF4-FFF2-40B4-BE49-F238E27FC236}">
+                <a16:creationId xmlns:a16="http://schemas.microsoft.com/office/drawing/2014/main" id="{96AD221E-37F1-4AE4-901D-B3C8DF6BA31F}"/>
               </a:ext>
             </a:extLst>
           </p:cNvPr>
@@ -2405,14 +4484,14 @@
             <a:pPr>
               <a:defRPr sz="2850" b="1">
                 <a:solidFill>
-                  <a:srgbClr val="102A43"/>
+                  <a:srgbClr val="293F55"/>
                 </a:solidFill>
               </a:defRPr>
             </a:pPr>
             <a:r>
               <a:rPr sz="2850" b="1">
                 <a:solidFill>
-                  <a:srgbClr val="102A43"/>
+                  <a:srgbClr val="293F55"/>
                 </a:solidFill>
               </a:rPr>
               <a:t>Analysis Pipeline</a:t>
@@ -2422,10 +4501,10 @@
       </p:sp>
       <p:sp>
         <p:nvSpPr>
-          <p:cNvPr id="31" name="pipeline-4-number-bg">
-            <a:extLst xmlns:a="http://schemas.openxmlformats.org/drawingml/2006/main">
-              <a:ext uri="{FF2B5EF4-FFF2-40B4-BE49-F238E27FC236}">
-                <a16:creationId xmlns:a16="http://schemas.microsoft.com/office/drawing/2014/main" id="{DB82B77E-2C23-4C1A-A7E7-040886FB88B9}"/>
+          <p:cNvPr id="94" name="pipeline-4-number-bg">
+            <a:extLst xmlns:a="http://schemas.openxmlformats.org/drawingml/2006/main">
+              <a:ext uri="{FF2B5EF4-FFF2-40B4-BE49-F238E27FC236}">
+                <a16:creationId xmlns:a16="http://schemas.microsoft.com/office/drawing/2014/main" id="{BA44082E-39B0-49CA-9D77-3F651C7BC0F0}"/>
               </a:ext>
             </a:extLst>
           </p:cNvPr>
@@ -2445,20 +4524,20 @@
             </a:avLst>
           </a:prstGeom>
           <a:solidFill xmlns:a="http://schemas.openxmlformats.org/drawingml/2006/main">
-            <a:srgbClr val="E8B44C"/>
-          </a:solidFill>
-          <a:ln xmlns:a="http://schemas.openxmlformats.org/drawingml/2006/main" w="0">
-            <a:noFill/>
-            <a:prstDash val="solid"/>
-          </a:ln>
-        </p:spPr>
-      </p:sp>
-      <p:sp>
-        <p:nvSpPr>
-          <p:cNvPr id="32" name="pipeline-4-number">
-            <a:extLst xmlns:a="http://schemas.openxmlformats.org/drawingml/2006/main">
-              <a:ext uri="{FF2B5EF4-FFF2-40B4-BE49-F238E27FC236}">
-                <a16:creationId xmlns:a16="http://schemas.microsoft.com/office/drawing/2014/main" id="{8DB87AD2-485C-4E76-8523-82F1E3E12F9C}"/>
+            <a:srgbClr val="E5BC6C"/>
+          </a:solidFill>
+          <a:ln xmlns:a="http://schemas.openxmlformats.org/drawingml/2006/main" w="0">
+            <a:noFill/>
+            <a:prstDash val="solid"/>
+          </a:ln>
+        </p:spPr>
+      </p:sp>
+      <p:sp>
+        <p:nvSpPr>
+          <p:cNvPr id="95" name="pipeline-4-number">
+            <a:extLst xmlns:a="http://schemas.openxmlformats.org/drawingml/2006/main">
+              <a:ext uri="{FF2B5EF4-FFF2-40B4-BE49-F238E27FC236}">
+                <a16:creationId xmlns:a16="http://schemas.microsoft.com/office/drawing/2014/main" id="{4DD9060E-6E63-4670-8BEF-CE7C7F2ABBE6}"/>
               </a:ext>
             </a:extLst>
           </p:cNvPr>
@@ -2488,14 +4567,14 @@
             <a:pPr algn="ctr">
               <a:defRPr sz="2325" b="1">
                 <a:solidFill>
-                  <a:srgbClr val="102A43"/>
+                  <a:srgbClr val="293F55"/>
                 </a:solidFill>
               </a:defRPr>
             </a:pPr>
             <a:r>
               <a:rPr sz="2325" b="1">
                 <a:solidFill>
-                  <a:srgbClr val="102A43"/>
+                  <a:srgbClr val="293F55"/>
                 </a:solidFill>
               </a:rPr>
               <a:t>4</a:t>
@@ -2505,10 +4584,10 @@
       </p:sp>
       <p:sp>
         <p:nvSpPr>
-          <p:cNvPr id="33" name="pipeline-4-text">
-            <a:extLst xmlns:a="http://schemas.openxmlformats.org/drawingml/2006/main">
-              <a:ext uri="{FF2B5EF4-FFF2-40B4-BE49-F238E27FC236}">
-                <a16:creationId xmlns:a16="http://schemas.microsoft.com/office/drawing/2014/main" id="{29883B8C-826B-4985-981A-049E6BBB19B1}"/>
+          <p:cNvPr id="96" name="pipeline-4-text">
+            <a:extLst xmlns:a="http://schemas.openxmlformats.org/drawingml/2006/main">
+              <a:ext uri="{FF2B5EF4-FFF2-40B4-BE49-F238E27FC236}">
+                <a16:creationId xmlns:a16="http://schemas.microsoft.com/office/drawing/2014/main" id="{E8E5D84D-3A1D-4265-8524-1B1206DE2E5D}"/>
               </a:ext>
             </a:extLst>
           </p:cNvPr>
@@ -2538,14 +4617,14 @@
             <a:pPr>
               <a:defRPr sz="2850" b="1">
                 <a:solidFill>
-                  <a:srgbClr val="102A43"/>
+                  <a:srgbClr val="293F55"/>
                 </a:solidFill>
               </a:defRPr>
             </a:pPr>
             <a:r>
               <a:rPr sz="2850" b="1">
                 <a:solidFill>
-                  <a:srgbClr val="102A43"/>
+                  <a:srgbClr val="293F55"/>
                 </a:solidFill>
               </a:rPr>
               <a:t>Key Results</a:t>
@@ -2555,10 +4634,10 @@
       </p:sp>
       <p:sp>
         <p:nvSpPr>
-          <p:cNvPr id="34" name="dataset-panel">
-            <a:extLst xmlns:a="http://schemas.openxmlformats.org/drawingml/2006/main">
-              <a:ext uri="{FF2B5EF4-FFF2-40B4-BE49-F238E27FC236}">
-                <a16:creationId xmlns:a16="http://schemas.microsoft.com/office/drawing/2014/main" id="{E5C666B7-7F91-45CC-9E76-3D0A2069602F}"/>
+          <p:cNvPr id="97" name="dataset-panel">
+            <a:extLst xmlns:a="http://schemas.openxmlformats.org/drawingml/2006/main">
+              <a:ext uri="{FF2B5EF4-FFF2-40B4-BE49-F238E27FC236}">
+                <a16:creationId xmlns:a16="http://schemas.microsoft.com/office/drawing/2014/main" id="{F5EDAA25-F792-41C8-955E-DF10264A92EA}"/>
               </a:ext>
             </a:extLst>
           </p:cNvPr>
@@ -2582,7 +4661,7 @@
           </a:solidFill>
           <a:ln xmlns:a="http://schemas.openxmlformats.org/drawingml/2006/main" w="28575">
             <a:solidFill>
-              <a:srgbClr val="D9E2EC"/>
+              <a:srgbClr val="DDE5E7"/>
             </a:solidFill>
             <a:prstDash val="solid"/>
           </a:ln>
@@ -2590,10 +4669,10 @@
       </p:sp>
       <p:sp>
         <p:nvSpPr>
-          <p:cNvPr id="35" name="dataset-kicker">
-            <a:extLst xmlns:a="http://schemas.openxmlformats.org/drawingml/2006/main">
-              <a:ext uri="{FF2B5EF4-FFF2-40B4-BE49-F238E27FC236}">
-                <a16:creationId xmlns:a16="http://schemas.microsoft.com/office/drawing/2014/main" id="{9FF277AF-0670-451A-A6DC-3527D304D0B2}"/>
+          <p:cNvPr id="98" name="dataset-kicker">
+            <a:extLst xmlns:a="http://schemas.openxmlformats.org/drawingml/2006/main">
+              <a:ext uri="{FF2B5EF4-FFF2-40B4-BE49-F238E27FC236}">
+                <a16:creationId xmlns:a16="http://schemas.microsoft.com/office/drawing/2014/main" id="{BD2B578B-6CF4-4521-BCF5-AE3A73304C53}"/>
               </a:ext>
             </a:extLst>
           </p:cNvPr>
@@ -2623,14 +4702,14 @@
             <a:pPr>
               <a:defRPr sz="2175" b="1">
                 <a:solidFill>
-                  <a:srgbClr val="0F5F73"/>
+                  <a:srgbClr val="3E5C78"/>
                 </a:solidFill>
               </a:defRPr>
             </a:pPr>
             <a:r>
               <a:rPr sz="2175" b="1">
                 <a:solidFill>
-                  <a:srgbClr val="0F5F73"/>
+                  <a:srgbClr val="3E5C78"/>
                 </a:solidFill>
               </a:rPr>
               <a:t>SOURCE CONTRACT</a:t>
@@ -2640,10 +4719,10 @@
       </p:sp>
       <p:sp>
         <p:nvSpPr>
-          <p:cNvPr id="36" name="datasets">
-            <a:extLst xmlns:a="http://schemas.openxmlformats.org/drawingml/2006/main">
-              <a:ext uri="{FF2B5EF4-FFF2-40B4-BE49-F238E27FC236}">
-                <a16:creationId xmlns:a16="http://schemas.microsoft.com/office/drawing/2014/main" id="{B826FAD3-AB16-4E02-8EEE-3C5A5F41EBA5}"/>
+          <p:cNvPr id="99" name="datasets">
+            <a:extLst xmlns:a="http://schemas.openxmlformats.org/drawingml/2006/main">
+              <a:ext uri="{FF2B5EF4-FFF2-40B4-BE49-F238E27FC236}">
+                <a16:creationId xmlns:a16="http://schemas.microsoft.com/office/drawing/2014/main" id="{DAE2D3B5-453C-4F37-9788-08B5E052228A}"/>
               </a:ext>
             </a:extLst>
           </p:cNvPr>
@@ -2673,14 +4752,14 @@
             <a:pPr>
               <a:defRPr sz="2850">
                 <a:solidFill>
-                  <a:srgbClr val="102A43"/>
+                  <a:srgbClr val="293F55"/>
                 </a:solidFill>
               </a:defRPr>
             </a:pPr>
             <a:r>
               <a:rPr sz="2850">
                 <a:solidFill>
-                  <a:srgbClr val="102A43"/>
+                  <a:srgbClr val="293F55"/>
                 </a:solidFill>
               </a:rPr>
               <a:t>Input: full paper</a:t>
@@ -2690,14 +4769,14 @@
             <a:pPr>
               <a:defRPr sz="2850">
                 <a:solidFill>
-                  <a:srgbClr val="102A43"/>
+                  <a:srgbClr val="293F55"/>
                 </a:solidFill>
               </a:defRPr>
             </a:pPr>
             <a:r>
               <a:rPr sz="2850">
                 <a:solidFill>
-                  <a:srgbClr val="102A43"/>
+                  <a:srgbClr val="293F55"/>
                 </a:solidFill>
               </a:rPr>
               <a:t>License: CC0-1.0</a:t>
@@ -2707,14 +4786,14 @@
             <a:pPr>
               <a:defRPr sz="2850">
                 <a:solidFill>
-                  <a:srgbClr val="102A43"/>
+                  <a:srgbClr val="293F55"/>
                 </a:solidFill>
               </a:defRPr>
             </a:pPr>
             <a:r>
               <a:rPr sz="2850">
                 <a:solidFill>
-                  <a:srgbClr val="102A43"/>
+                  <a:srgbClr val="293F55"/>
                 </a:solidFill>
               </a:rPr>
               <a:t>Profile: bioinformatics</a:t>
@@ -2724,14 +4803,14 @@
             <a:pPr>
               <a:defRPr sz="2850">
                 <a:solidFill>
-                  <a:srgbClr val="102A43"/>
+                  <a:srgbClr val="293F55"/>
                 </a:solidFill>
               </a:defRPr>
             </a:pPr>
             <a:r>
               <a:rPr sz="2850">
                 <a:solidFill>
-                  <a:srgbClr val="102A43"/>
+                  <a:srgbClr val="293F55"/>
                 </a:solidFill>
               </a:rPr>
               <a:t>Claims checked: 5</a:t>
@@ -2741,10 +4820,10 @@
       </p:sp>
       <p:sp>
         <p:nvSpPr>
-          <p:cNvPr id="37" name="dataset-evidence">
-            <a:extLst xmlns:a="http://schemas.openxmlformats.org/drawingml/2006/main">
-              <a:ext uri="{FF2B5EF4-FFF2-40B4-BE49-F238E27FC236}">
-                <a16:creationId xmlns:a16="http://schemas.microsoft.com/office/drawing/2014/main" id="{DF6AE7CA-0D6B-4935-A46D-58E3CF0AC4C4}"/>
+          <p:cNvPr id="100" name="dataset-evidence">
+            <a:extLst xmlns:a="http://schemas.openxmlformats.org/drawingml/2006/main">
+              <a:ext uri="{FF2B5EF4-FFF2-40B4-BE49-F238E27FC236}">
+                <a16:creationId xmlns:a16="http://schemas.microsoft.com/office/drawing/2014/main" id="{059A3C6B-79C7-4EB6-A35E-B0F0D1161737}"/>
               </a:ext>
             </a:extLst>
           </p:cNvPr>
@@ -2774,14 +4853,14 @@
             <a:pPr>
               <a:defRPr sz="1875" i="1">
                 <a:solidFill>
-                  <a:srgbClr val="2C8C99"/>
+                  <a:srgbClr val="487AA1"/>
                 </a:solidFill>
               </a:defRPr>
             </a:pPr>
             <a:r>
               <a:rPr sz="1875" i="1">
                 <a:solidFill>
-                  <a:srgbClr val="2C8C99"/>
+                  <a:srgbClr val="487AA1"/>
                 </a:solidFill>
               </a:rPr>
               <a:t>examples/aurora-synthetic/AURORA-12-synthetic-manuscript.pdf</a:t>
@@ -2791,10 +4870,10 @@
       </p:sp>
       <p:sp>
         <p:nvSpPr>
-          <p:cNvPr id="38" name="figure-one-heading-title">
-            <a:extLst xmlns:a="http://schemas.openxmlformats.org/drawingml/2006/main">
-              <a:ext uri="{FF2B5EF4-FFF2-40B4-BE49-F238E27FC236}">
-                <a16:creationId xmlns:a16="http://schemas.microsoft.com/office/drawing/2014/main" id="{48CAAF7B-BCCA-4103-A494-91A12EF72EFC}"/>
+          <p:cNvPr id="101" name="figure-one-heading-title">
+            <a:extLst xmlns:a="http://schemas.openxmlformats.org/drawingml/2006/main">
+              <a:ext uri="{FF2B5EF4-FFF2-40B4-BE49-F238E27FC236}">
+                <a16:creationId xmlns:a16="http://schemas.microsoft.com/office/drawing/2014/main" id="{1A931174-CACA-4DFA-BC70-2487250DF60E}"/>
               </a:ext>
             </a:extLst>
           </p:cNvPr>
@@ -2824,14 +4903,14 @@
             <a:pPr>
               <a:defRPr sz="3600" b="1">
                 <a:solidFill>
-                  <a:srgbClr val="0F5F73"/>
+                  <a:srgbClr val="3E5C78"/>
                 </a:solidFill>
               </a:defRPr>
             </a:pPr>
             <a:r>
               <a:rPr sz="3600" b="1">
                 <a:solidFill>
-                  <a:srgbClr val="0F5F73"/>
+                  <a:srgbClr val="3E5C78"/>
                 </a:solidFill>
               </a:rPr>
               <a:t>Methods and source evidence</a:t>
@@ -2841,10 +4920,10 @@
       </p:sp>
       <p:sp>
         <p:nvSpPr>
-          <p:cNvPr id="39" name="figure-one-heading-rule">
-            <a:extLst xmlns:a="http://schemas.openxmlformats.org/drawingml/2006/main">
-              <a:ext uri="{FF2B5EF4-FFF2-40B4-BE49-F238E27FC236}">
-                <a16:creationId xmlns:a16="http://schemas.microsoft.com/office/drawing/2014/main" id="{431FE9D5-C94F-4822-8361-DCE3DAD63A76}"/>
+          <p:cNvPr id="102" name="figure-one-heading-rule">
+            <a:extLst xmlns:a="http://schemas.openxmlformats.org/drawingml/2006/main">
+              <a:ext uri="{FF2B5EF4-FFF2-40B4-BE49-F238E27FC236}">
+                <a16:creationId xmlns:a16="http://schemas.microsoft.com/office/drawing/2014/main" id="{1BFBBFB6-95AE-42F9-AF44-6602EF95533E}"/>
               </a:ext>
             </a:extLst>
           </p:cNvPr>
@@ -2864,20 +4943,20 @@
             </a:avLst>
           </a:prstGeom>
           <a:solidFill xmlns:a="http://schemas.openxmlformats.org/drawingml/2006/main">
-            <a:srgbClr val="E8B44C"/>
-          </a:solidFill>
-          <a:ln xmlns:a="http://schemas.openxmlformats.org/drawingml/2006/main" w="0">
-            <a:noFill/>
-            <a:prstDash val="solid"/>
-          </a:ln>
-        </p:spPr>
-      </p:sp>
-      <p:sp>
-        <p:nvSpPr>
-          <p:cNvPr id="40" name="figure-one-frame">
-            <a:extLst xmlns:a="http://schemas.openxmlformats.org/drawingml/2006/main">
-              <a:ext uri="{FF2B5EF4-FFF2-40B4-BE49-F238E27FC236}">
-                <a16:creationId xmlns:a16="http://schemas.microsoft.com/office/drawing/2014/main" id="{0699AB8C-AA6E-4D8E-B82F-6B21C51E3675}"/>
+            <a:srgbClr val="E5BC6C"/>
+          </a:solidFill>
+          <a:ln xmlns:a="http://schemas.openxmlformats.org/drawingml/2006/main" w="0">
+            <a:noFill/>
+            <a:prstDash val="solid"/>
+          </a:ln>
+        </p:spPr>
+      </p:sp>
+      <p:sp>
+        <p:nvSpPr>
+          <p:cNvPr id="103" name="figure-one-frame">
+            <a:extLst xmlns:a="http://schemas.openxmlformats.org/drawingml/2006/main">
+              <a:ext uri="{FF2B5EF4-FFF2-40B4-BE49-F238E27FC236}">
+                <a16:creationId xmlns:a16="http://schemas.microsoft.com/office/drawing/2014/main" id="{27A211F5-BCD5-44F9-8282-E3A0333D1ED0}"/>
               </a:ext>
             </a:extLst>
           </p:cNvPr>
@@ -2901,7 +4980,7 @@
           </a:solidFill>
           <a:ln xmlns:a="http://schemas.openxmlformats.org/drawingml/2006/main" w="28575">
             <a:solidFill>
-              <a:srgbClr val="D9E2EC"/>
+              <a:srgbClr val="DDE5E7"/>
             </a:solidFill>
             <a:prstDash val="solid"/>
           </a:ln>
@@ -2909,10 +4988,10 @@
       </p:sp>
       <p:sp>
         <p:nvSpPr>
-          <p:cNvPr id="41" name="figure-one-placeholder">
-            <a:extLst xmlns:a="http://schemas.openxmlformats.org/drawingml/2006/main">
-              <a:ext uri="{FF2B5EF4-FFF2-40B4-BE49-F238E27FC236}">
-                <a16:creationId xmlns:a16="http://schemas.microsoft.com/office/drawing/2014/main" id="{AFE7E54F-BD61-4C0B-99B4-809B38FB5632}"/>
+          <p:cNvPr id="104" name="figure-one-placeholder">
+            <a:extLst xmlns:a="http://schemas.openxmlformats.org/drawingml/2006/main">
+              <a:ext uri="{FF2B5EF4-FFF2-40B4-BE49-F238E27FC236}">
+                <a16:creationId xmlns:a16="http://schemas.microsoft.com/office/drawing/2014/main" id="{27542B28-EFA4-49F4-993D-67C79557B3C2}"/>
               </a:ext>
             </a:extLst>
           </p:cNvPr>
@@ -2932,11 +5011,11 @@
             </a:avLst>
           </a:prstGeom>
           <a:solidFill xmlns:a="http://schemas.openxmlformats.org/drawingml/2006/main">
-            <a:srgbClr val="F6F8FA"/>
+            <a:srgbClr val="F6F2EE"/>
           </a:solidFill>
           <a:ln xmlns:a="http://schemas.openxmlformats.org/drawingml/2006/main" w="19050">
             <a:solidFill>
-              <a:srgbClr val="D9E2EC"/>
+              <a:srgbClr val="DDE5E7"/>
             </a:solidFill>
             <a:prstDash val="solid"/>
           </a:ln>
@@ -2944,10 +5023,10 @@
       </p:sp>
       <p:sp>
         <p:nvSpPr>
-          <p:cNvPr id="42" name="figure-one-placeholder-label">
-            <a:extLst xmlns:a="http://schemas.openxmlformats.org/drawingml/2006/main">
-              <a:ext uri="{FF2B5EF4-FFF2-40B4-BE49-F238E27FC236}">
-                <a16:creationId xmlns:a16="http://schemas.microsoft.com/office/drawing/2014/main" id="{31B0FC08-87E7-4B41-87A4-BCFAB2F02C45}"/>
+          <p:cNvPr id="105" name="figure-one-placeholder-label">
+            <a:extLst xmlns:a="http://schemas.openxmlformats.org/drawingml/2006/main">
+              <a:ext uri="{FF2B5EF4-FFF2-40B4-BE49-F238E27FC236}">
+                <a16:creationId xmlns:a16="http://schemas.microsoft.com/office/drawing/2014/main" id="{59189B2C-05F8-4FE0-8216-F8CE982F3CD2}"/>
               </a:ext>
             </a:extLst>
           </p:cNvPr>
@@ -2977,14 +5056,14 @@
             <a:pPr algn="ctr">
               <a:defRPr sz="2700" b="1">
                 <a:solidFill>
-                  <a:srgbClr val="2C8C99"/>
+                  <a:srgbClr val="487AA1"/>
                 </a:solidFill>
               </a:defRPr>
             </a:pPr>
             <a:r>
               <a:rPr sz="2700" b="1">
                 <a:solidFill>
-                  <a:srgbClr val="2C8C99"/>
+                  <a:srgbClr val="487AA1"/>
                 </a:solidFill>
               </a:rPr>
               <a:t>SOURCE FIGURE SLOT</a:t>
@@ -2994,10 +5073,10 @@
       </p:sp>
       <p:sp>
         <p:nvSpPr>
-          <p:cNvPr id="43" name="figure-one-caption">
-            <a:extLst xmlns:a="http://schemas.openxmlformats.org/drawingml/2006/main">
-              <a:ext uri="{FF2B5EF4-FFF2-40B4-BE49-F238E27FC236}">
-                <a16:creationId xmlns:a16="http://schemas.microsoft.com/office/drawing/2014/main" id="{524C511D-6A86-4CA1-8D28-F7F73F87A94F}"/>
+          <p:cNvPr id="106" name="figure-one-caption">
+            <a:extLst xmlns:a="http://schemas.openxmlformats.org/drawingml/2006/main">
+              <a:ext uri="{FF2B5EF4-FFF2-40B4-BE49-F238E27FC236}">
+                <a16:creationId xmlns:a16="http://schemas.microsoft.com/office/drawing/2014/main" id="{A8C1C2DD-04A8-4334-B05C-F97DD7D2CEC4}"/>
               </a:ext>
             </a:extLst>
           </p:cNvPr>
@@ -3027,14 +5106,14 @@
             <a:pPr>
               <a:defRPr sz="2250" b="1">
                 <a:solidFill>
-                  <a:srgbClr val="102A43"/>
+                  <a:srgbClr val="293F55"/>
                 </a:solidFill>
               </a:defRPr>
             </a:pPr>
             <a:r>
               <a:rPr sz="2250" b="1">
                 <a:solidFill>
-                  <a:srgbClr val="102A43"/>
+                  <a:srgbClr val="293F55"/>
                 </a:solidFill>
               </a:rPr>
               <a:t>Source figure selected during full-paper generation</a:t>
@@ -3044,10 +5123,10 @@
       </p:sp>
       <p:sp>
         <p:nvSpPr>
-          <p:cNvPr id="44" name="figure-one-source">
-            <a:extLst xmlns:a="http://schemas.openxmlformats.org/drawingml/2006/main">
-              <a:ext uri="{FF2B5EF4-FFF2-40B4-BE49-F238E27FC236}">
-                <a16:creationId xmlns:a16="http://schemas.microsoft.com/office/drawing/2014/main" id="{A012AEBF-FCA4-4CB7-AA50-55A4F5BC5236}"/>
+          <p:cNvPr id="107" name="figure-one-source">
+            <a:extLst xmlns:a="http://schemas.openxmlformats.org/drawingml/2006/main">
+              <a:ext uri="{FF2B5EF4-FFF2-40B4-BE49-F238E27FC236}">
+                <a16:creationId xmlns:a16="http://schemas.microsoft.com/office/drawing/2014/main" id="{12229EEC-FB6B-4549-B160-710BED20117E}"/>
               </a:ext>
             </a:extLst>
           </p:cNvPr>
@@ -3077,14 +5156,14 @@
             <a:pPr>
               <a:defRPr sz="1875" i="1">
                 <a:solidFill>
-                  <a:srgbClr val="2C8C99"/>
+                  <a:srgbClr val="487AA1"/>
                 </a:solidFill>
               </a:defRPr>
             </a:pPr>
             <a:r>
               <a:rPr sz="1875" i="1">
                 <a:solidFill>
-                  <a:srgbClr val="2C8C99"/>
+                  <a:srgbClr val="487AA1"/>
                 </a:solidFill>
               </a:rPr>
               <a:t>Source: POSTEX-SYNTH-2026-001</a:t>
@@ -3094,10 +5173,10 @@
       </p:sp>
       <p:sp>
         <p:nvSpPr>
-          <p:cNvPr id="45" name="central-takeaway">
-            <a:extLst xmlns:a="http://schemas.openxmlformats.org/drawingml/2006/main">
-              <a:ext uri="{FF2B5EF4-FFF2-40B4-BE49-F238E27FC236}">
-                <a16:creationId xmlns:a16="http://schemas.microsoft.com/office/drawing/2014/main" id="{1E501206-9D31-4CBF-A060-77C8E77A1395}"/>
+          <p:cNvPr id="108" name="central-takeaway">
+            <a:extLst xmlns:a="http://schemas.openxmlformats.org/drawingml/2006/main">
+              <a:ext uri="{FF2B5EF4-FFF2-40B4-BE49-F238E27FC236}">
+                <a16:creationId xmlns:a16="http://schemas.microsoft.com/office/drawing/2014/main" id="{FDFA805F-BF7E-47E8-A98B-BCE78C9F55D2}"/>
               </a:ext>
             </a:extLst>
           </p:cNvPr>
@@ -3117,20 +5196,1076 @@
             </a:avLst>
           </a:prstGeom>
           <a:solidFill xmlns:a="http://schemas.openxmlformats.org/drawingml/2006/main">
-            <a:srgbClr val="E8B44C"/>
-          </a:solidFill>
-          <a:ln xmlns:a="http://schemas.openxmlformats.org/drawingml/2006/main" w="0">
-            <a:noFill/>
-            <a:prstDash val="solid"/>
-          </a:ln>
-        </p:spPr>
-      </p:sp>
-      <p:sp>
-        <p:nvSpPr>
-          <p:cNvPr id="46" name="central-takeaway-title">
-            <a:extLst xmlns:a="http://schemas.openxmlformats.org/drawingml/2006/main">
-              <a:ext uri="{FF2B5EF4-FFF2-40B4-BE49-F238E27FC236}">
-                <a16:creationId xmlns:a16="http://schemas.microsoft.com/office/drawing/2014/main" id="{23133A08-0F1B-4F4C-B67A-9F4BB54B56C0}"/>
+            <a:srgbClr val="E5BC6C"/>
+          </a:solidFill>
+          <a:ln xmlns:a="http://schemas.openxmlformats.org/drawingml/2006/main" w="0">
+            <a:noFill/>
+            <a:prstDash val="solid"/>
+          </a:ln>
+        </p:spPr>
+      </p:sp>
+      <p:sp>
+        <p:nvSpPr>
+          <p:cNvPr id="109" name="takeaway-cape-gradient-1">
+            <a:extLst xmlns:a="http://schemas.openxmlformats.org/drawingml/2006/main">
+              <a:ext uri="{FF2B5EF4-FFF2-40B4-BE49-F238E27FC236}">
+                <a16:creationId xmlns:a16="http://schemas.microsoft.com/office/drawing/2014/main" id="{C82CB38C-F124-4501-938A-8178565C7ACD}"/>
+              </a:ext>
+            </a:extLst>
+          </p:cNvPr>
+          <p:cNvSpPr>
+            <a:spLocks xmlns:a="http://schemas.openxmlformats.org/drawingml/2006/main" noGrp="1"/>
+          </p:cNvSpPr>
+          <p:nvPr/>
+        </p:nvSpPr>
+        <p:spPr>
+          <a:xfrm xmlns:a="http://schemas.openxmlformats.org/drawingml/2006/main">
+            <a:off x="13525500" y="5619750"/>
+            <a:ext cx="436662" cy="190500"/>
+          </a:xfrm>
+          <a:prstGeom xmlns:a="http://schemas.openxmlformats.org/drawingml/2006/main" prst="roundRect">
+            <a:avLst>
+              <a:gd name="adj" fmla="val 0"/>
+            </a:avLst>
+          </a:prstGeom>
+          <a:solidFill xmlns:a="http://schemas.openxmlformats.org/drawingml/2006/main">
+            <a:srgbClr val="293F55"/>
+          </a:solidFill>
+          <a:ln xmlns:a="http://schemas.openxmlformats.org/drawingml/2006/main" w="0">
+            <a:noFill/>
+            <a:prstDash val="solid"/>
+          </a:ln>
+        </p:spPr>
+      </p:sp>
+      <p:sp>
+        <p:nvSpPr>
+          <p:cNvPr id="110" name="takeaway-cape-gradient-2">
+            <a:extLst xmlns:a="http://schemas.openxmlformats.org/drawingml/2006/main">
+              <a:ext uri="{FF2B5EF4-FFF2-40B4-BE49-F238E27FC236}">
+                <a16:creationId xmlns:a16="http://schemas.microsoft.com/office/drawing/2014/main" id="{909A7879-EB83-453A-A8D7-32BE984C463D}"/>
+              </a:ext>
+            </a:extLst>
+          </p:cNvPr>
+          <p:cNvSpPr>
+            <a:spLocks xmlns:a="http://schemas.openxmlformats.org/drawingml/2006/main" noGrp="1"/>
+          </p:cNvSpPr>
+          <p:nvPr/>
+        </p:nvSpPr>
+        <p:spPr>
+          <a:xfrm xmlns:a="http://schemas.openxmlformats.org/drawingml/2006/main">
+            <a:off x="13952637" y="5619750"/>
+            <a:ext cx="436662" cy="190500"/>
+          </a:xfrm>
+          <a:prstGeom xmlns:a="http://schemas.openxmlformats.org/drawingml/2006/main" prst="roundRect">
+            <a:avLst>
+              <a:gd name="adj" fmla="val 0"/>
+            </a:avLst>
+          </a:prstGeom>
+          <a:solidFill xmlns:a="http://schemas.openxmlformats.org/drawingml/2006/main">
+            <a:srgbClr val="2B4258"/>
+          </a:solidFill>
+          <a:ln xmlns:a="http://schemas.openxmlformats.org/drawingml/2006/main" w="0">
+            <a:noFill/>
+            <a:prstDash val="solid"/>
+          </a:ln>
+        </p:spPr>
+      </p:sp>
+      <p:sp>
+        <p:nvSpPr>
+          <p:cNvPr id="111" name="takeaway-cape-gradient-3">
+            <a:extLst xmlns:a="http://schemas.openxmlformats.org/drawingml/2006/main">
+              <a:ext uri="{FF2B5EF4-FFF2-40B4-BE49-F238E27FC236}">
+                <a16:creationId xmlns:a16="http://schemas.microsoft.com/office/drawing/2014/main" id="{6A706C3E-7EC1-4B3B-B4ED-F1052F799E9F}"/>
+              </a:ext>
+            </a:extLst>
+          </p:cNvPr>
+          <p:cNvSpPr>
+            <a:spLocks xmlns:a="http://schemas.openxmlformats.org/drawingml/2006/main" noGrp="1"/>
+          </p:cNvSpPr>
+          <p:nvPr/>
+        </p:nvSpPr>
+        <p:spPr>
+          <a:xfrm xmlns:a="http://schemas.openxmlformats.org/drawingml/2006/main">
+            <a:off x="14379773" y="5619750"/>
+            <a:ext cx="436662" cy="190500"/>
+          </a:xfrm>
+          <a:prstGeom xmlns:a="http://schemas.openxmlformats.org/drawingml/2006/main" prst="roundRect">
+            <a:avLst>
+              <a:gd name="adj" fmla="val 0"/>
+            </a:avLst>
+          </a:prstGeom>
+          <a:solidFill xmlns:a="http://schemas.openxmlformats.org/drawingml/2006/main">
+            <a:srgbClr val="2D455C"/>
+          </a:solidFill>
+          <a:ln xmlns:a="http://schemas.openxmlformats.org/drawingml/2006/main" w="0">
+            <a:noFill/>
+            <a:prstDash val="solid"/>
+          </a:ln>
+        </p:spPr>
+      </p:sp>
+      <p:sp>
+        <p:nvSpPr>
+          <p:cNvPr id="112" name="takeaway-cape-gradient-4">
+            <a:extLst xmlns:a="http://schemas.openxmlformats.org/drawingml/2006/main">
+              <a:ext uri="{FF2B5EF4-FFF2-40B4-BE49-F238E27FC236}">
+                <a16:creationId xmlns:a16="http://schemas.microsoft.com/office/drawing/2014/main" id="{7CA24A77-C4B9-4102-B3EB-A7CCB78A0797}"/>
+              </a:ext>
+            </a:extLst>
+          </p:cNvPr>
+          <p:cNvSpPr>
+            <a:spLocks xmlns:a="http://schemas.openxmlformats.org/drawingml/2006/main" noGrp="1"/>
+          </p:cNvSpPr>
+          <p:nvPr/>
+        </p:nvSpPr>
+        <p:spPr>
+          <a:xfrm xmlns:a="http://schemas.openxmlformats.org/drawingml/2006/main">
+            <a:off x="14806910" y="5619750"/>
+            <a:ext cx="436662" cy="190500"/>
+          </a:xfrm>
+          <a:prstGeom xmlns:a="http://schemas.openxmlformats.org/drawingml/2006/main" prst="roundRect">
+            <a:avLst>
+              <a:gd name="adj" fmla="val 0"/>
+            </a:avLst>
+          </a:prstGeom>
+          <a:solidFill xmlns:a="http://schemas.openxmlformats.org/drawingml/2006/main">
+            <a:srgbClr val="2F475F"/>
+          </a:solidFill>
+          <a:ln xmlns:a="http://schemas.openxmlformats.org/drawingml/2006/main" w="0">
+            <a:noFill/>
+            <a:prstDash val="solid"/>
+          </a:ln>
+        </p:spPr>
+      </p:sp>
+      <p:sp>
+        <p:nvSpPr>
+          <p:cNvPr id="113" name="takeaway-cape-gradient-5">
+            <a:extLst xmlns:a="http://schemas.openxmlformats.org/drawingml/2006/main">
+              <a:ext uri="{FF2B5EF4-FFF2-40B4-BE49-F238E27FC236}">
+                <a16:creationId xmlns:a16="http://schemas.microsoft.com/office/drawing/2014/main" id="{0E9BEE8E-FCBB-4C23-8B66-EF03D2095D25}"/>
+              </a:ext>
+            </a:extLst>
+          </p:cNvPr>
+          <p:cNvSpPr>
+            <a:spLocks xmlns:a="http://schemas.openxmlformats.org/drawingml/2006/main" noGrp="1"/>
+          </p:cNvSpPr>
+          <p:nvPr/>
+        </p:nvSpPr>
+        <p:spPr>
+          <a:xfrm xmlns:a="http://schemas.openxmlformats.org/drawingml/2006/main">
+            <a:off x="15234047" y="5619750"/>
+            <a:ext cx="436662" cy="190500"/>
+          </a:xfrm>
+          <a:prstGeom xmlns:a="http://schemas.openxmlformats.org/drawingml/2006/main" prst="roundRect">
+            <a:avLst>
+              <a:gd name="adj" fmla="val 0"/>
+            </a:avLst>
+          </a:prstGeom>
+          <a:solidFill xmlns:a="http://schemas.openxmlformats.org/drawingml/2006/main">
+            <a:srgbClr val="314A63"/>
+          </a:solidFill>
+          <a:ln xmlns:a="http://schemas.openxmlformats.org/drawingml/2006/main" w="0">
+            <a:noFill/>
+            <a:prstDash val="solid"/>
+          </a:ln>
+        </p:spPr>
+      </p:sp>
+      <p:sp>
+        <p:nvSpPr>
+          <p:cNvPr id="114" name="takeaway-cape-gradient-6">
+            <a:extLst xmlns:a="http://schemas.openxmlformats.org/drawingml/2006/main">
+              <a:ext uri="{FF2B5EF4-FFF2-40B4-BE49-F238E27FC236}">
+                <a16:creationId xmlns:a16="http://schemas.microsoft.com/office/drawing/2014/main" id="{DD89AFCC-7DC2-4035-8610-5DF89F2A059F}"/>
+              </a:ext>
+            </a:extLst>
+          </p:cNvPr>
+          <p:cNvSpPr>
+            <a:spLocks xmlns:a="http://schemas.openxmlformats.org/drawingml/2006/main" noGrp="1"/>
+          </p:cNvSpPr>
+          <p:nvPr/>
+        </p:nvSpPr>
+        <p:spPr>
+          <a:xfrm xmlns:a="http://schemas.openxmlformats.org/drawingml/2006/main">
+            <a:off x="15661184" y="5619750"/>
+            <a:ext cx="436662" cy="190500"/>
+          </a:xfrm>
+          <a:prstGeom xmlns:a="http://schemas.openxmlformats.org/drawingml/2006/main" prst="roundRect">
+            <a:avLst>
+              <a:gd name="adj" fmla="val 0"/>
+            </a:avLst>
+          </a:prstGeom>
+          <a:solidFill xmlns:a="http://schemas.openxmlformats.org/drawingml/2006/main">
+            <a:srgbClr val="334D66"/>
+          </a:solidFill>
+          <a:ln xmlns:a="http://schemas.openxmlformats.org/drawingml/2006/main" w="0">
+            <a:noFill/>
+            <a:prstDash val="solid"/>
+          </a:ln>
+        </p:spPr>
+      </p:sp>
+      <p:sp>
+        <p:nvSpPr>
+          <p:cNvPr id="115" name="takeaway-cape-gradient-7">
+            <a:extLst xmlns:a="http://schemas.openxmlformats.org/drawingml/2006/main">
+              <a:ext uri="{FF2B5EF4-FFF2-40B4-BE49-F238E27FC236}">
+                <a16:creationId xmlns:a16="http://schemas.microsoft.com/office/drawing/2014/main" id="{972D8019-EBD2-4F2D-BA4E-48CDC83F58CC}"/>
+              </a:ext>
+            </a:extLst>
+          </p:cNvPr>
+          <p:cNvSpPr>
+            <a:spLocks xmlns:a="http://schemas.openxmlformats.org/drawingml/2006/main" noGrp="1"/>
+          </p:cNvSpPr>
+          <p:nvPr/>
+        </p:nvSpPr>
+        <p:spPr>
+          <a:xfrm xmlns:a="http://schemas.openxmlformats.org/drawingml/2006/main">
+            <a:off x="16088320" y="5619750"/>
+            <a:ext cx="436662" cy="190500"/>
+          </a:xfrm>
+          <a:prstGeom xmlns:a="http://schemas.openxmlformats.org/drawingml/2006/main" prst="roundRect">
+            <a:avLst>
+              <a:gd name="adj" fmla="val 0"/>
+            </a:avLst>
+          </a:prstGeom>
+          <a:solidFill xmlns:a="http://schemas.openxmlformats.org/drawingml/2006/main">
+            <a:srgbClr val="355069"/>
+          </a:solidFill>
+          <a:ln xmlns:a="http://schemas.openxmlformats.org/drawingml/2006/main" w="0">
+            <a:noFill/>
+            <a:prstDash val="solid"/>
+          </a:ln>
+        </p:spPr>
+      </p:sp>
+      <p:sp>
+        <p:nvSpPr>
+          <p:cNvPr id="116" name="takeaway-cape-gradient-8">
+            <a:extLst xmlns:a="http://schemas.openxmlformats.org/drawingml/2006/main">
+              <a:ext uri="{FF2B5EF4-FFF2-40B4-BE49-F238E27FC236}">
+                <a16:creationId xmlns:a16="http://schemas.microsoft.com/office/drawing/2014/main" id="{6AC37E25-AB5C-4736-8EE1-6852CD393A77}"/>
+              </a:ext>
+            </a:extLst>
+          </p:cNvPr>
+          <p:cNvSpPr>
+            <a:spLocks xmlns:a="http://schemas.openxmlformats.org/drawingml/2006/main" noGrp="1"/>
+          </p:cNvSpPr>
+          <p:nvPr/>
+        </p:nvSpPr>
+        <p:spPr>
+          <a:xfrm xmlns:a="http://schemas.openxmlformats.org/drawingml/2006/main">
+            <a:off x="16515457" y="5619750"/>
+            <a:ext cx="436662" cy="190500"/>
+          </a:xfrm>
+          <a:prstGeom xmlns:a="http://schemas.openxmlformats.org/drawingml/2006/main" prst="roundRect">
+            <a:avLst>
+              <a:gd name="adj" fmla="val 0"/>
+            </a:avLst>
+          </a:prstGeom>
+          <a:solidFill xmlns:a="http://schemas.openxmlformats.org/drawingml/2006/main">
+            <a:srgbClr val="37536D"/>
+          </a:solidFill>
+          <a:ln xmlns:a="http://schemas.openxmlformats.org/drawingml/2006/main" w="0">
+            <a:noFill/>
+            <a:prstDash val="solid"/>
+          </a:ln>
+        </p:spPr>
+      </p:sp>
+      <p:sp>
+        <p:nvSpPr>
+          <p:cNvPr id="117" name="takeaway-cape-gradient-9">
+            <a:extLst xmlns:a="http://schemas.openxmlformats.org/drawingml/2006/main">
+              <a:ext uri="{FF2B5EF4-FFF2-40B4-BE49-F238E27FC236}">
+                <a16:creationId xmlns:a16="http://schemas.microsoft.com/office/drawing/2014/main" id="{BBBBD7B7-9E8E-4D1F-9D3D-FB328B8A1DA9}"/>
+              </a:ext>
+            </a:extLst>
+          </p:cNvPr>
+          <p:cNvSpPr>
+            <a:spLocks xmlns:a="http://schemas.openxmlformats.org/drawingml/2006/main" noGrp="1"/>
+          </p:cNvSpPr>
+          <p:nvPr/>
+        </p:nvSpPr>
+        <p:spPr>
+          <a:xfrm xmlns:a="http://schemas.openxmlformats.org/drawingml/2006/main">
+            <a:off x="16942594" y="5619750"/>
+            <a:ext cx="436662" cy="190500"/>
+          </a:xfrm>
+          <a:prstGeom xmlns:a="http://schemas.openxmlformats.org/drawingml/2006/main" prst="roundRect">
+            <a:avLst>
+              <a:gd name="adj" fmla="val 0"/>
+            </a:avLst>
+          </a:prstGeom>
+          <a:solidFill xmlns:a="http://schemas.openxmlformats.org/drawingml/2006/main">
+            <a:srgbClr val="395570"/>
+          </a:solidFill>
+          <a:ln xmlns:a="http://schemas.openxmlformats.org/drawingml/2006/main" w="0">
+            <a:noFill/>
+            <a:prstDash val="solid"/>
+          </a:ln>
+        </p:spPr>
+      </p:sp>
+      <p:sp>
+        <p:nvSpPr>
+          <p:cNvPr id="118" name="takeaway-cape-gradient-10">
+            <a:extLst xmlns:a="http://schemas.openxmlformats.org/drawingml/2006/main">
+              <a:ext uri="{FF2B5EF4-FFF2-40B4-BE49-F238E27FC236}">
+                <a16:creationId xmlns:a16="http://schemas.microsoft.com/office/drawing/2014/main" id="{2037D40C-87CF-4B8F-B0A9-C2366393759A}"/>
+              </a:ext>
+            </a:extLst>
+          </p:cNvPr>
+          <p:cNvSpPr>
+            <a:spLocks xmlns:a="http://schemas.openxmlformats.org/drawingml/2006/main" noGrp="1"/>
+          </p:cNvSpPr>
+          <p:nvPr/>
+        </p:nvSpPr>
+        <p:spPr>
+          <a:xfrm xmlns:a="http://schemas.openxmlformats.org/drawingml/2006/main">
+            <a:off x="17369730" y="5619750"/>
+            <a:ext cx="436662" cy="190500"/>
+          </a:xfrm>
+          <a:prstGeom xmlns:a="http://schemas.openxmlformats.org/drawingml/2006/main" prst="roundRect">
+            <a:avLst>
+              <a:gd name="adj" fmla="val 0"/>
+            </a:avLst>
+          </a:prstGeom>
+          <a:solidFill xmlns:a="http://schemas.openxmlformats.org/drawingml/2006/main">
+            <a:srgbClr val="3B5873"/>
+          </a:solidFill>
+          <a:ln xmlns:a="http://schemas.openxmlformats.org/drawingml/2006/main" w="0">
+            <a:noFill/>
+            <a:prstDash val="solid"/>
+          </a:ln>
+        </p:spPr>
+      </p:sp>
+      <p:sp>
+        <p:nvSpPr>
+          <p:cNvPr id="119" name="takeaway-cape-gradient-11">
+            <a:extLst xmlns:a="http://schemas.openxmlformats.org/drawingml/2006/main">
+              <a:ext uri="{FF2B5EF4-FFF2-40B4-BE49-F238E27FC236}">
+                <a16:creationId xmlns:a16="http://schemas.microsoft.com/office/drawing/2014/main" id="{7C6EC7F0-D4A2-4F0B-AC47-B0D9895963FA}"/>
+              </a:ext>
+            </a:extLst>
+          </p:cNvPr>
+          <p:cNvSpPr>
+            <a:spLocks xmlns:a="http://schemas.openxmlformats.org/drawingml/2006/main" noGrp="1"/>
+          </p:cNvSpPr>
+          <p:nvPr/>
+        </p:nvSpPr>
+        <p:spPr>
+          <a:xfrm xmlns:a="http://schemas.openxmlformats.org/drawingml/2006/main">
+            <a:off x="17796867" y="5619750"/>
+            <a:ext cx="436662" cy="190500"/>
+          </a:xfrm>
+          <a:prstGeom xmlns:a="http://schemas.openxmlformats.org/drawingml/2006/main" prst="roundRect">
+            <a:avLst>
+              <a:gd name="adj" fmla="val 0"/>
+            </a:avLst>
+          </a:prstGeom>
+          <a:solidFill xmlns:a="http://schemas.openxmlformats.org/drawingml/2006/main">
+            <a:srgbClr val="3D5B77"/>
+          </a:solidFill>
+          <a:ln xmlns:a="http://schemas.openxmlformats.org/drawingml/2006/main" w="0">
+            <a:noFill/>
+            <a:prstDash val="solid"/>
+          </a:ln>
+        </p:spPr>
+      </p:sp>
+      <p:sp>
+        <p:nvSpPr>
+          <p:cNvPr id="120" name="takeaway-cape-gradient-12">
+            <a:extLst xmlns:a="http://schemas.openxmlformats.org/drawingml/2006/main">
+              <a:ext uri="{FF2B5EF4-FFF2-40B4-BE49-F238E27FC236}">
+                <a16:creationId xmlns:a16="http://schemas.microsoft.com/office/drawing/2014/main" id="{CBAFB51A-530B-453A-8EAA-2749633C1BC4}"/>
+              </a:ext>
+            </a:extLst>
+          </p:cNvPr>
+          <p:cNvSpPr>
+            <a:spLocks xmlns:a="http://schemas.openxmlformats.org/drawingml/2006/main" noGrp="1"/>
+          </p:cNvSpPr>
+          <p:nvPr/>
+        </p:nvSpPr>
+        <p:spPr>
+          <a:xfrm xmlns:a="http://schemas.openxmlformats.org/drawingml/2006/main">
+            <a:off x="18224004" y="5619750"/>
+            <a:ext cx="436662" cy="190500"/>
+          </a:xfrm>
+          <a:prstGeom xmlns:a="http://schemas.openxmlformats.org/drawingml/2006/main" prst="roundRect">
+            <a:avLst>
+              <a:gd name="adj" fmla="val 0"/>
+            </a:avLst>
+          </a:prstGeom>
+          <a:solidFill xmlns:a="http://schemas.openxmlformats.org/drawingml/2006/main">
+            <a:srgbClr val="3F5E7B"/>
+          </a:solidFill>
+          <a:ln xmlns:a="http://schemas.openxmlformats.org/drawingml/2006/main" w="0">
+            <a:noFill/>
+            <a:prstDash val="solid"/>
+          </a:ln>
+        </p:spPr>
+      </p:sp>
+      <p:sp>
+        <p:nvSpPr>
+          <p:cNvPr id="121" name="takeaway-cape-gradient-13">
+            <a:extLst xmlns:a="http://schemas.openxmlformats.org/drawingml/2006/main">
+              <a:ext uri="{FF2B5EF4-FFF2-40B4-BE49-F238E27FC236}">
+                <a16:creationId xmlns:a16="http://schemas.microsoft.com/office/drawing/2014/main" id="{7B99B9AA-CE4F-4030-A9FF-0EF99333302D}"/>
+              </a:ext>
+            </a:extLst>
+          </p:cNvPr>
+          <p:cNvSpPr>
+            <a:spLocks xmlns:a="http://schemas.openxmlformats.org/drawingml/2006/main" noGrp="1"/>
+          </p:cNvSpPr>
+          <p:nvPr/>
+        </p:nvSpPr>
+        <p:spPr>
+          <a:xfrm xmlns:a="http://schemas.openxmlformats.org/drawingml/2006/main">
+            <a:off x="18651141" y="5619750"/>
+            <a:ext cx="436662" cy="190500"/>
+          </a:xfrm>
+          <a:prstGeom xmlns:a="http://schemas.openxmlformats.org/drawingml/2006/main" prst="roundRect">
+            <a:avLst>
+              <a:gd name="adj" fmla="val 0"/>
+            </a:avLst>
+          </a:prstGeom>
+          <a:solidFill xmlns:a="http://schemas.openxmlformats.org/drawingml/2006/main">
+            <a:srgbClr val="40617F"/>
+          </a:solidFill>
+          <a:ln xmlns:a="http://schemas.openxmlformats.org/drawingml/2006/main" w="0">
+            <a:noFill/>
+            <a:prstDash val="solid"/>
+          </a:ln>
+        </p:spPr>
+      </p:sp>
+      <p:sp>
+        <p:nvSpPr>
+          <p:cNvPr id="122" name="takeaway-cape-gradient-14">
+            <a:extLst xmlns:a="http://schemas.openxmlformats.org/drawingml/2006/main">
+              <a:ext uri="{FF2B5EF4-FFF2-40B4-BE49-F238E27FC236}">
+                <a16:creationId xmlns:a16="http://schemas.microsoft.com/office/drawing/2014/main" id="{01844BE9-F59D-4C88-8269-6F60DC22C71A}"/>
+              </a:ext>
+            </a:extLst>
+          </p:cNvPr>
+          <p:cNvSpPr>
+            <a:spLocks xmlns:a="http://schemas.openxmlformats.org/drawingml/2006/main" noGrp="1"/>
+          </p:cNvSpPr>
+          <p:nvPr/>
+        </p:nvSpPr>
+        <p:spPr>
+          <a:xfrm xmlns:a="http://schemas.openxmlformats.org/drawingml/2006/main">
+            <a:off x="19078277" y="5619750"/>
+            <a:ext cx="436662" cy="190500"/>
+          </a:xfrm>
+          <a:prstGeom xmlns:a="http://schemas.openxmlformats.org/drawingml/2006/main" prst="roundRect">
+            <a:avLst>
+              <a:gd name="adj" fmla="val 0"/>
+            </a:avLst>
+          </a:prstGeom>
+          <a:solidFill xmlns:a="http://schemas.openxmlformats.org/drawingml/2006/main">
+            <a:srgbClr val="416483"/>
+          </a:solidFill>
+          <a:ln xmlns:a="http://schemas.openxmlformats.org/drawingml/2006/main" w="0">
+            <a:noFill/>
+            <a:prstDash val="solid"/>
+          </a:ln>
+        </p:spPr>
+      </p:sp>
+      <p:sp>
+        <p:nvSpPr>
+          <p:cNvPr id="123" name="takeaway-cape-gradient-15">
+            <a:extLst xmlns:a="http://schemas.openxmlformats.org/drawingml/2006/main">
+              <a:ext uri="{FF2B5EF4-FFF2-40B4-BE49-F238E27FC236}">
+                <a16:creationId xmlns:a16="http://schemas.microsoft.com/office/drawing/2014/main" id="{71F66F6B-2A2A-4897-915D-C788314839EC}"/>
+              </a:ext>
+            </a:extLst>
+          </p:cNvPr>
+          <p:cNvSpPr>
+            <a:spLocks xmlns:a="http://schemas.openxmlformats.org/drawingml/2006/main" noGrp="1"/>
+          </p:cNvSpPr>
+          <p:nvPr/>
+        </p:nvSpPr>
+        <p:spPr>
+          <a:xfrm xmlns:a="http://schemas.openxmlformats.org/drawingml/2006/main">
+            <a:off x="19505414" y="5619750"/>
+            <a:ext cx="436662" cy="190500"/>
+          </a:xfrm>
+          <a:prstGeom xmlns:a="http://schemas.openxmlformats.org/drawingml/2006/main" prst="roundRect">
+            <a:avLst>
+              <a:gd name="adj" fmla="val 0"/>
+            </a:avLst>
+          </a:prstGeom>
+          <a:solidFill xmlns:a="http://schemas.openxmlformats.org/drawingml/2006/main">
+            <a:srgbClr val="426787"/>
+          </a:solidFill>
+          <a:ln xmlns:a="http://schemas.openxmlformats.org/drawingml/2006/main" w="0">
+            <a:noFill/>
+            <a:prstDash val="solid"/>
+          </a:ln>
+        </p:spPr>
+      </p:sp>
+      <p:sp>
+        <p:nvSpPr>
+          <p:cNvPr id="124" name="takeaway-cape-gradient-16">
+            <a:extLst xmlns:a="http://schemas.openxmlformats.org/drawingml/2006/main">
+              <a:ext uri="{FF2B5EF4-FFF2-40B4-BE49-F238E27FC236}">
+                <a16:creationId xmlns:a16="http://schemas.microsoft.com/office/drawing/2014/main" id="{56BF1A42-729C-43E7-B34B-3E2D33C1ECA0}"/>
+              </a:ext>
+            </a:extLst>
+          </p:cNvPr>
+          <p:cNvSpPr>
+            <a:spLocks xmlns:a="http://schemas.openxmlformats.org/drawingml/2006/main" noGrp="1"/>
+          </p:cNvSpPr>
+          <p:nvPr/>
+        </p:nvSpPr>
+        <p:spPr>
+          <a:xfrm xmlns:a="http://schemas.openxmlformats.org/drawingml/2006/main">
+            <a:off x="19932551" y="5619750"/>
+            <a:ext cx="436662" cy="190500"/>
+          </a:xfrm>
+          <a:prstGeom xmlns:a="http://schemas.openxmlformats.org/drawingml/2006/main" prst="roundRect">
+            <a:avLst>
+              <a:gd name="adj" fmla="val 0"/>
+            </a:avLst>
+          </a:prstGeom>
+          <a:solidFill xmlns:a="http://schemas.openxmlformats.org/drawingml/2006/main">
+            <a:srgbClr val="436A8B"/>
+          </a:solidFill>
+          <a:ln xmlns:a="http://schemas.openxmlformats.org/drawingml/2006/main" w="0">
+            <a:noFill/>
+            <a:prstDash val="solid"/>
+          </a:ln>
+        </p:spPr>
+      </p:sp>
+      <p:sp>
+        <p:nvSpPr>
+          <p:cNvPr id="125" name="takeaway-cape-gradient-17">
+            <a:extLst xmlns:a="http://schemas.openxmlformats.org/drawingml/2006/main">
+              <a:ext uri="{FF2B5EF4-FFF2-40B4-BE49-F238E27FC236}">
+                <a16:creationId xmlns:a16="http://schemas.microsoft.com/office/drawing/2014/main" id="{727F92AB-A534-4E64-B0E9-9584371C6B3B}"/>
+              </a:ext>
+            </a:extLst>
+          </p:cNvPr>
+          <p:cNvSpPr>
+            <a:spLocks xmlns:a="http://schemas.openxmlformats.org/drawingml/2006/main" noGrp="1"/>
+          </p:cNvSpPr>
+          <p:nvPr/>
+        </p:nvSpPr>
+        <p:spPr>
+          <a:xfrm xmlns:a="http://schemas.openxmlformats.org/drawingml/2006/main">
+            <a:off x="20359688" y="5619750"/>
+            <a:ext cx="436662" cy="190500"/>
+          </a:xfrm>
+          <a:prstGeom xmlns:a="http://schemas.openxmlformats.org/drawingml/2006/main" prst="roundRect">
+            <a:avLst>
+              <a:gd name="adj" fmla="val 0"/>
+            </a:avLst>
+          </a:prstGeom>
+          <a:solidFill xmlns:a="http://schemas.openxmlformats.org/drawingml/2006/main">
+            <a:srgbClr val="436C8E"/>
+          </a:solidFill>
+          <a:ln xmlns:a="http://schemas.openxmlformats.org/drawingml/2006/main" w="0">
+            <a:noFill/>
+            <a:prstDash val="solid"/>
+          </a:ln>
+        </p:spPr>
+      </p:sp>
+      <p:sp>
+        <p:nvSpPr>
+          <p:cNvPr id="126" name="takeaway-cape-gradient-18">
+            <a:extLst xmlns:a="http://schemas.openxmlformats.org/drawingml/2006/main">
+              <a:ext uri="{FF2B5EF4-FFF2-40B4-BE49-F238E27FC236}">
+                <a16:creationId xmlns:a16="http://schemas.microsoft.com/office/drawing/2014/main" id="{7E04E69A-0D05-493F-B0CB-653C782293B6}"/>
+              </a:ext>
+            </a:extLst>
+          </p:cNvPr>
+          <p:cNvSpPr>
+            <a:spLocks xmlns:a="http://schemas.openxmlformats.org/drawingml/2006/main" noGrp="1"/>
+          </p:cNvSpPr>
+          <p:nvPr/>
+        </p:nvSpPr>
+        <p:spPr>
+          <a:xfrm xmlns:a="http://schemas.openxmlformats.org/drawingml/2006/main">
+            <a:off x="20786824" y="5619750"/>
+            <a:ext cx="436662" cy="190500"/>
+          </a:xfrm>
+          <a:prstGeom xmlns:a="http://schemas.openxmlformats.org/drawingml/2006/main" prst="roundRect">
+            <a:avLst>
+              <a:gd name="adj" fmla="val 0"/>
+            </a:avLst>
+          </a:prstGeom>
+          <a:solidFill xmlns:a="http://schemas.openxmlformats.org/drawingml/2006/main">
+            <a:srgbClr val="446F92"/>
+          </a:solidFill>
+          <a:ln xmlns:a="http://schemas.openxmlformats.org/drawingml/2006/main" w="0">
+            <a:noFill/>
+            <a:prstDash val="solid"/>
+          </a:ln>
+        </p:spPr>
+      </p:sp>
+      <p:sp>
+        <p:nvSpPr>
+          <p:cNvPr id="127" name="takeaway-cape-gradient-19">
+            <a:extLst xmlns:a="http://schemas.openxmlformats.org/drawingml/2006/main">
+              <a:ext uri="{FF2B5EF4-FFF2-40B4-BE49-F238E27FC236}">
+                <a16:creationId xmlns:a16="http://schemas.microsoft.com/office/drawing/2014/main" id="{1FDD5D9B-DA64-47BB-B902-C3D4606A1966}"/>
+              </a:ext>
+            </a:extLst>
+          </p:cNvPr>
+          <p:cNvSpPr>
+            <a:spLocks xmlns:a="http://schemas.openxmlformats.org/drawingml/2006/main" noGrp="1"/>
+          </p:cNvSpPr>
+          <p:nvPr/>
+        </p:nvSpPr>
+        <p:spPr>
+          <a:xfrm xmlns:a="http://schemas.openxmlformats.org/drawingml/2006/main">
+            <a:off x="21213961" y="5619750"/>
+            <a:ext cx="436662" cy="190500"/>
+          </a:xfrm>
+          <a:prstGeom xmlns:a="http://schemas.openxmlformats.org/drawingml/2006/main" prst="roundRect">
+            <a:avLst>
+              <a:gd name="adj" fmla="val 0"/>
+            </a:avLst>
+          </a:prstGeom>
+          <a:solidFill xmlns:a="http://schemas.openxmlformats.org/drawingml/2006/main">
+            <a:srgbClr val="457296"/>
+          </a:solidFill>
+          <a:ln xmlns:a="http://schemas.openxmlformats.org/drawingml/2006/main" w="0">
+            <a:noFill/>
+            <a:prstDash val="solid"/>
+          </a:ln>
+        </p:spPr>
+      </p:sp>
+      <p:sp>
+        <p:nvSpPr>
+          <p:cNvPr id="128" name="takeaway-cape-gradient-20">
+            <a:extLst xmlns:a="http://schemas.openxmlformats.org/drawingml/2006/main">
+              <a:ext uri="{FF2B5EF4-FFF2-40B4-BE49-F238E27FC236}">
+                <a16:creationId xmlns:a16="http://schemas.microsoft.com/office/drawing/2014/main" id="{76B8D5AF-C6E5-4E9D-B5D4-B4C1ACFF83F6}"/>
+              </a:ext>
+            </a:extLst>
+          </p:cNvPr>
+          <p:cNvSpPr>
+            <a:spLocks xmlns:a="http://schemas.openxmlformats.org/drawingml/2006/main" noGrp="1"/>
+          </p:cNvSpPr>
+          <p:nvPr/>
+        </p:nvSpPr>
+        <p:spPr>
+          <a:xfrm xmlns:a="http://schemas.openxmlformats.org/drawingml/2006/main">
+            <a:off x="21641098" y="5619750"/>
+            <a:ext cx="436662" cy="190500"/>
+          </a:xfrm>
+          <a:prstGeom xmlns:a="http://schemas.openxmlformats.org/drawingml/2006/main" prst="roundRect">
+            <a:avLst>
+              <a:gd name="adj" fmla="val 0"/>
+            </a:avLst>
+          </a:prstGeom>
+          <a:solidFill xmlns:a="http://schemas.openxmlformats.org/drawingml/2006/main">
+            <a:srgbClr val="46759A"/>
+          </a:solidFill>
+          <a:ln xmlns:a="http://schemas.openxmlformats.org/drawingml/2006/main" w="0">
+            <a:noFill/>
+            <a:prstDash val="solid"/>
+          </a:ln>
+        </p:spPr>
+      </p:sp>
+      <p:sp>
+        <p:nvSpPr>
+          <p:cNvPr id="129" name="takeaway-cape-gradient-21">
+            <a:extLst xmlns:a="http://schemas.openxmlformats.org/drawingml/2006/main">
+              <a:ext uri="{FF2B5EF4-FFF2-40B4-BE49-F238E27FC236}">
+                <a16:creationId xmlns:a16="http://schemas.microsoft.com/office/drawing/2014/main" id="{FAD0E776-E58E-4B87-9CC1-BFF6F9A46AC5}"/>
+              </a:ext>
+            </a:extLst>
+          </p:cNvPr>
+          <p:cNvSpPr>
+            <a:spLocks xmlns:a="http://schemas.openxmlformats.org/drawingml/2006/main" noGrp="1"/>
+          </p:cNvSpPr>
+          <p:nvPr/>
+        </p:nvSpPr>
+        <p:spPr>
+          <a:xfrm xmlns:a="http://schemas.openxmlformats.org/drawingml/2006/main">
+            <a:off x="22068234" y="5619750"/>
+            <a:ext cx="436662" cy="190500"/>
+          </a:xfrm>
+          <a:prstGeom xmlns:a="http://schemas.openxmlformats.org/drawingml/2006/main" prst="roundRect">
+            <a:avLst>
+              <a:gd name="adj" fmla="val 0"/>
+            </a:avLst>
+          </a:prstGeom>
+          <a:solidFill xmlns:a="http://schemas.openxmlformats.org/drawingml/2006/main">
+            <a:srgbClr val="47789E"/>
+          </a:solidFill>
+          <a:ln xmlns:a="http://schemas.openxmlformats.org/drawingml/2006/main" w="0">
+            <a:noFill/>
+            <a:prstDash val="solid"/>
+          </a:ln>
+        </p:spPr>
+      </p:sp>
+      <p:sp>
+        <p:nvSpPr>
+          <p:cNvPr id="130" name="takeaway-cape-gradient-22">
+            <a:extLst xmlns:a="http://schemas.openxmlformats.org/drawingml/2006/main">
+              <a:ext uri="{FF2B5EF4-FFF2-40B4-BE49-F238E27FC236}">
+                <a16:creationId xmlns:a16="http://schemas.microsoft.com/office/drawing/2014/main" id="{84C20EA2-39E1-4DD8-9342-28850430FBB1}"/>
+              </a:ext>
+            </a:extLst>
+          </p:cNvPr>
+          <p:cNvSpPr>
+            <a:spLocks xmlns:a="http://schemas.openxmlformats.org/drawingml/2006/main" noGrp="1"/>
+          </p:cNvSpPr>
+          <p:nvPr/>
+        </p:nvSpPr>
+        <p:spPr>
+          <a:xfrm xmlns:a="http://schemas.openxmlformats.org/drawingml/2006/main">
+            <a:off x="22495371" y="5619750"/>
+            <a:ext cx="436662" cy="190500"/>
+          </a:xfrm>
+          <a:prstGeom xmlns:a="http://schemas.openxmlformats.org/drawingml/2006/main" prst="roundRect">
+            <a:avLst>
+              <a:gd name="adj" fmla="val 0"/>
+            </a:avLst>
+          </a:prstGeom>
+          <a:solidFill xmlns:a="http://schemas.openxmlformats.org/drawingml/2006/main">
+            <a:srgbClr val="4A7CA2"/>
+          </a:solidFill>
+          <a:ln xmlns:a="http://schemas.openxmlformats.org/drawingml/2006/main" w="0">
+            <a:noFill/>
+            <a:prstDash val="solid"/>
+          </a:ln>
+        </p:spPr>
+      </p:sp>
+      <p:sp>
+        <p:nvSpPr>
+          <p:cNvPr id="131" name="takeaway-cape-gradient-23">
+            <a:extLst xmlns:a="http://schemas.openxmlformats.org/drawingml/2006/main">
+              <a:ext uri="{FF2B5EF4-FFF2-40B4-BE49-F238E27FC236}">
+                <a16:creationId xmlns:a16="http://schemas.microsoft.com/office/drawing/2014/main" id="{CAFCFACE-7D2A-4BC1-ABE1-3E84A81780C2}"/>
+              </a:ext>
+            </a:extLst>
+          </p:cNvPr>
+          <p:cNvSpPr>
+            <a:spLocks xmlns:a="http://schemas.openxmlformats.org/drawingml/2006/main" noGrp="1"/>
+          </p:cNvSpPr>
+          <p:nvPr/>
+        </p:nvSpPr>
+        <p:spPr>
+          <a:xfrm xmlns:a="http://schemas.openxmlformats.org/drawingml/2006/main">
+            <a:off x="22922508" y="5619750"/>
+            <a:ext cx="436662" cy="190500"/>
+          </a:xfrm>
+          <a:prstGeom xmlns:a="http://schemas.openxmlformats.org/drawingml/2006/main" prst="roundRect">
+            <a:avLst>
+              <a:gd name="adj" fmla="val 0"/>
+            </a:avLst>
+          </a:prstGeom>
+          <a:solidFill xmlns:a="http://schemas.openxmlformats.org/drawingml/2006/main">
+            <a:srgbClr val="5082A6"/>
+          </a:solidFill>
+          <a:ln xmlns:a="http://schemas.openxmlformats.org/drawingml/2006/main" w="0">
+            <a:noFill/>
+            <a:prstDash val="solid"/>
+          </a:ln>
+        </p:spPr>
+      </p:sp>
+      <p:sp>
+        <p:nvSpPr>
+          <p:cNvPr id="132" name="takeaway-cape-gradient-24">
+            <a:extLst xmlns:a="http://schemas.openxmlformats.org/drawingml/2006/main">
+              <a:ext uri="{FF2B5EF4-FFF2-40B4-BE49-F238E27FC236}">
+                <a16:creationId xmlns:a16="http://schemas.microsoft.com/office/drawing/2014/main" id="{B4DC301D-E5E2-47F8-98BA-9A2C84B6EB0F}"/>
+              </a:ext>
+            </a:extLst>
+          </p:cNvPr>
+          <p:cNvSpPr>
+            <a:spLocks xmlns:a="http://schemas.openxmlformats.org/drawingml/2006/main" noGrp="1"/>
+          </p:cNvSpPr>
+          <p:nvPr/>
+        </p:nvSpPr>
+        <p:spPr>
+          <a:xfrm xmlns:a="http://schemas.openxmlformats.org/drawingml/2006/main">
+            <a:off x="23349645" y="5619750"/>
+            <a:ext cx="436662" cy="190500"/>
+          </a:xfrm>
+          <a:prstGeom xmlns:a="http://schemas.openxmlformats.org/drawingml/2006/main" prst="roundRect">
+            <a:avLst>
+              <a:gd name="adj" fmla="val 0"/>
+            </a:avLst>
+          </a:prstGeom>
+          <a:solidFill xmlns:a="http://schemas.openxmlformats.org/drawingml/2006/main">
+            <a:srgbClr val="5788AA"/>
+          </a:solidFill>
+          <a:ln xmlns:a="http://schemas.openxmlformats.org/drawingml/2006/main" w="0">
+            <a:noFill/>
+            <a:prstDash val="solid"/>
+          </a:ln>
+        </p:spPr>
+      </p:sp>
+      <p:sp>
+        <p:nvSpPr>
+          <p:cNvPr id="133" name="takeaway-cape-gradient-25">
+            <a:extLst xmlns:a="http://schemas.openxmlformats.org/drawingml/2006/main">
+              <a:ext uri="{FF2B5EF4-FFF2-40B4-BE49-F238E27FC236}">
+                <a16:creationId xmlns:a16="http://schemas.microsoft.com/office/drawing/2014/main" id="{8E8E0163-159B-4A88-8139-BB26263DCCC7}"/>
+              </a:ext>
+            </a:extLst>
+          </p:cNvPr>
+          <p:cNvSpPr>
+            <a:spLocks xmlns:a="http://schemas.openxmlformats.org/drawingml/2006/main" noGrp="1"/>
+          </p:cNvSpPr>
+          <p:nvPr/>
+        </p:nvSpPr>
+        <p:spPr>
+          <a:xfrm xmlns:a="http://schemas.openxmlformats.org/drawingml/2006/main">
+            <a:off x="23776781" y="5619750"/>
+            <a:ext cx="436662" cy="190500"/>
+          </a:xfrm>
+          <a:prstGeom xmlns:a="http://schemas.openxmlformats.org/drawingml/2006/main" prst="roundRect">
+            <a:avLst>
+              <a:gd name="adj" fmla="val 0"/>
+            </a:avLst>
+          </a:prstGeom>
+          <a:solidFill xmlns:a="http://schemas.openxmlformats.org/drawingml/2006/main">
+            <a:srgbClr val="5D8EAE"/>
+          </a:solidFill>
+          <a:ln xmlns:a="http://schemas.openxmlformats.org/drawingml/2006/main" w="0">
+            <a:noFill/>
+            <a:prstDash val="solid"/>
+          </a:ln>
+        </p:spPr>
+      </p:sp>
+      <p:sp>
+        <p:nvSpPr>
+          <p:cNvPr id="134" name="takeaway-cape-gradient-26">
+            <a:extLst xmlns:a="http://schemas.openxmlformats.org/drawingml/2006/main">
+              <a:ext uri="{FF2B5EF4-FFF2-40B4-BE49-F238E27FC236}">
+                <a16:creationId xmlns:a16="http://schemas.microsoft.com/office/drawing/2014/main" id="{681E86CC-18D5-4E41-A5E3-84CE8A11391E}"/>
+              </a:ext>
+            </a:extLst>
+          </p:cNvPr>
+          <p:cNvSpPr>
+            <a:spLocks xmlns:a="http://schemas.openxmlformats.org/drawingml/2006/main" noGrp="1"/>
+          </p:cNvSpPr>
+          <p:nvPr/>
+        </p:nvSpPr>
+        <p:spPr>
+          <a:xfrm xmlns:a="http://schemas.openxmlformats.org/drawingml/2006/main">
+            <a:off x="24203918" y="5619750"/>
+            <a:ext cx="436662" cy="190500"/>
+          </a:xfrm>
+          <a:prstGeom xmlns:a="http://schemas.openxmlformats.org/drawingml/2006/main" prst="roundRect">
+            <a:avLst>
+              <a:gd name="adj" fmla="val 0"/>
+            </a:avLst>
+          </a:prstGeom>
+          <a:solidFill xmlns:a="http://schemas.openxmlformats.org/drawingml/2006/main">
+            <a:srgbClr val="6394B2"/>
+          </a:solidFill>
+          <a:ln xmlns:a="http://schemas.openxmlformats.org/drawingml/2006/main" w="0">
+            <a:noFill/>
+            <a:prstDash val="solid"/>
+          </a:ln>
+        </p:spPr>
+      </p:sp>
+      <p:sp>
+        <p:nvSpPr>
+          <p:cNvPr id="135" name="takeaway-cape-gradient-27">
+            <a:extLst xmlns:a="http://schemas.openxmlformats.org/drawingml/2006/main">
+              <a:ext uri="{FF2B5EF4-FFF2-40B4-BE49-F238E27FC236}">
+                <a16:creationId xmlns:a16="http://schemas.microsoft.com/office/drawing/2014/main" id="{45CF6733-46DA-4AEA-B1F1-6F098B63AA63}"/>
+              </a:ext>
+            </a:extLst>
+          </p:cNvPr>
+          <p:cNvSpPr>
+            <a:spLocks xmlns:a="http://schemas.openxmlformats.org/drawingml/2006/main" noGrp="1"/>
+          </p:cNvSpPr>
+          <p:nvPr/>
+        </p:nvSpPr>
+        <p:spPr>
+          <a:xfrm xmlns:a="http://schemas.openxmlformats.org/drawingml/2006/main">
+            <a:off x="24631055" y="5619750"/>
+            <a:ext cx="436662" cy="190500"/>
+          </a:xfrm>
+          <a:prstGeom xmlns:a="http://schemas.openxmlformats.org/drawingml/2006/main" prst="roundRect">
+            <a:avLst>
+              <a:gd name="adj" fmla="val 0"/>
+            </a:avLst>
+          </a:prstGeom>
+          <a:solidFill xmlns:a="http://schemas.openxmlformats.org/drawingml/2006/main">
+            <a:srgbClr val="6A9AB6"/>
+          </a:solidFill>
+          <a:ln xmlns:a="http://schemas.openxmlformats.org/drawingml/2006/main" w="0">
+            <a:noFill/>
+            <a:prstDash val="solid"/>
+          </a:ln>
+        </p:spPr>
+      </p:sp>
+      <p:sp>
+        <p:nvSpPr>
+          <p:cNvPr id="136" name="takeaway-cape-gradient-28">
+            <a:extLst xmlns:a="http://schemas.openxmlformats.org/drawingml/2006/main">
+              <a:ext uri="{FF2B5EF4-FFF2-40B4-BE49-F238E27FC236}">
+                <a16:creationId xmlns:a16="http://schemas.microsoft.com/office/drawing/2014/main" id="{20274538-0F92-41BF-BE8E-E723976D1AD4}"/>
+              </a:ext>
+            </a:extLst>
+          </p:cNvPr>
+          <p:cNvSpPr>
+            <a:spLocks xmlns:a="http://schemas.openxmlformats.org/drawingml/2006/main" noGrp="1"/>
+          </p:cNvSpPr>
+          <p:nvPr/>
+        </p:nvSpPr>
+        <p:spPr>
+          <a:xfrm xmlns:a="http://schemas.openxmlformats.org/drawingml/2006/main">
+            <a:off x="25058191" y="5619750"/>
+            <a:ext cx="436662" cy="190500"/>
+          </a:xfrm>
+          <a:prstGeom xmlns:a="http://schemas.openxmlformats.org/drawingml/2006/main" prst="roundRect">
+            <a:avLst>
+              <a:gd name="adj" fmla="val 0"/>
+            </a:avLst>
+          </a:prstGeom>
+          <a:solidFill xmlns:a="http://schemas.openxmlformats.org/drawingml/2006/main">
+            <a:srgbClr val="70A0BA"/>
+          </a:solidFill>
+          <a:ln xmlns:a="http://schemas.openxmlformats.org/drawingml/2006/main" w="0">
+            <a:noFill/>
+            <a:prstDash val="solid"/>
+          </a:ln>
+        </p:spPr>
+      </p:sp>
+      <p:sp>
+        <p:nvSpPr>
+          <p:cNvPr id="137" name="takeaway-cape-gradient-29">
+            <a:extLst xmlns:a="http://schemas.openxmlformats.org/drawingml/2006/main">
+              <a:ext uri="{FF2B5EF4-FFF2-40B4-BE49-F238E27FC236}">
+                <a16:creationId xmlns:a16="http://schemas.microsoft.com/office/drawing/2014/main" id="{750C7D64-49A0-4A0C-8BBE-F0D2DE2CEEB6}"/>
+              </a:ext>
+            </a:extLst>
+          </p:cNvPr>
+          <p:cNvSpPr>
+            <a:spLocks xmlns:a="http://schemas.openxmlformats.org/drawingml/2006/main" noGrp="1"/>
+          </p:cNvSpPr>
+          <p:nvPr/>
+        </p:nvSpPr>
+        <p:spPr>
+          <a:xfrm xmlns:a="http://schemas.openxmlformats.org/drawingml/2006/main">
+            <a:off x="25485328" y="5619750"/>
+            <a:ext cx="436662" cy="190500"/>
+          </a:xfrm>
+          <a:prstGeom xmlns:a="http://schemas.openxmlformats.org/drawingml/2006/main" prst="roundRect">
+            <a:avLst>
+              <a:gd name="adj" fmla="val 0"/>
+            </a:avLst>
+          </a:prstGeom>
+          <a:solidFill xmlns:a="http://schemas.openxmlformats.org/drawingml/2006/main">
+            <a:srgbClr val="76A6BD"/>
+          </a:solidFill>
+          <a:ln xmlns:a="http://schemas.openxmlformats.org/drawingml/2006/main" w="0">
+            <a:noFill/>
+            <a:prstDash val="solid"/>
+          </a:ln>
+        </p:spPr>
+      </p:sp>
+      <p:sp>
+        <p:nvSpPr>
+          <p:cNvPr id="138" name="takeaway-cape-gradient-30">
+            <a:extLst xmlns:a="http://schemas.openxmlformats.org/drawingml/2006/main">
+              <a:ext uri="{FF2B5EF4-FFF2-40B4-BE49-F238E27FC236}">
+                <a16:creationId xmlns:a16="http://schemas.microsoft.com/office/drawing/2014/main" id="{EECFCE09-FB76-4E25-9D62-0BE989773F35}"/>
+              </a:ext>
+            </a:extLst>
+          </p:cNvPr>
+          <p:cNvSpPr>
+            <a:spLocks xmlns:a="http://schemas.openxmlformats.org/drawingml/2006/main" noGrp="1"/>
+          </p:cNvSpPr>
+          <p:nvPr/>
+        </p:nvSpPr>
+        <p:spPr>
+          <a:xfrm xmlns:a="http://schemas.openxmlformats.org/drawingml/2006/main">
+            <a:off x="25912465" y="5619750"/>
+            <a:ext cx="436662" cy="190500"/>
+          </a:xfrm>
+          <a:prstGeom xmlns:a="http://schemas.openxmlformats.org/drawingml/2006/main" prst="roundRect">
+            <a:avLst>
+              <a:gd name="adj" fmla="val 0"/>
+            </a:avLst>
+          </a:prstGeom>
+          <a:solidFill xmlns:a="http://schemas.openxmlformats.org/drawingml/2006/main">
+            <a:srgbClr val="7CACC1"/>
+          </a:solidFill>
+          <a:ln xmlns:a="http://schemas.openxmlformats.org/drawingml/2006/main" w="0">
+            <a:noFill/>
+            <a:prstDash val="solid"/>
+          </a:ln>
+        </p:spPr>
+      </p:sp>
+      <p:sp>
+        <p:nvSpPr>
+          <p:cNvPr id="139" name="takeaway-cape-gradient-31">
+            <a:extLst xmlns:a="http://schemas.openxmlformats.org/drawingml/2006/main">
+              <a:ext uri="{FF2B5EF4-FFF2-40B4-BE49-F238E27FC236}">
+                <a16:creationId xmlns:a16="http://schemas.microsoft.com/office/drawing/2014/main" id="{8192327D-08D5-4C7A-BD16-51AA5D9853CC}"/>
+              </a:ext>
+            </a:extLst>
+          </p:cNvPr>
+          <p:cNvSpPr>
+            <a:spLocks xmlns:a="http://schemas.openxmlformats.org/drawingml/2006/main" noGrp="1"/>
+          </p:cNvSpPr>
+          <p:nvPr/>
+        </p:nvSpPr>
+        <p:spPr>
+          <a:xfrm xmlns:a="http://schemas.openxmlformats.org/drawingml/2006/main">
+            <a:off x="26339602" y="5619750"/>
+            <a:ext cx="436662" cy="190500"/>
+          </a:xfrm>
+          <a:prstGeom xmlns:a="http://schemas.openxmlformats.org/drawingml/2006/main" prst="roundRect">
+            <a:avLst>
+              <a:gd name="adj" fmla="val 0"/>
+            </a:avLst>
+          </a:prstGeom>
+          <a:solidFill xmlns:a="http://schemas.openxmlformats.org/drawingml/2006/main">
+            <a:srgbClr val="83B2C5"/>
+          </a:solidFill>
+          <a:ln xmlns:a="http://schemas.openxmlformats.org/drawingml/2006/main" w="0">
+            <a:noFill/>
+            <a:prstDash val="solid"/>
+          </a:ln>
+        </p:spPr>
+      </p:sp>
+      <p:sp>
+        <p:nvSpPr>
+          <p:cNvPr id="140" name="takeaway-cape-gradient-32">
+            <a:extLst xmlns:a="http://schemas.openxmlformats.org/drawingml/2006/main">
+              <a:ext uri="{FF2B5EF4-FFF2-40B4-BE49-F238E27FC236}">
+                <a16:creationId xmlns:a16="http://schemas.microsoft.com/office/drawing/2014/main" id="{A08DB35E-B483-4E78-B64C-F8992C04C38B}"/>
+              </a:ext>
+            </a:extLst>
+          </p:cNvPr>
+          <p:cNvSpPr>
+            <a:spLocks xmlns:a="http://schemas.openxmlformats.org/drawingml/2006/main" noGrp="1"/>
+          </p:cNvSpPr>
+          <p:nvPr/>
+        </p:nvSpPr>
+        <p:spPr>
+          <a:xfrm xmlns:a="http://schemas.openxmlformats.org/drawingml/2006/main">
+            <a:off x="26766738" y="5619750"/>
+            <a:ext cx="436662" cy="190500"/>
+          </a:xfrm>
+          <a:prstGeom xmlns:a="http://schemas.openxmlformats.org/drawingml/2006/main" prst="roundRect">
+            <a:avLst>
+              <a:gd name="adj" fmla="val 0"/>
+            </a:avLst>
+          </a:prstGeom>
+          <a:solidFill xmlns:a="http://schemas.openxmlformats.org/drawingml/2006/main">
+            <a:srgbClr val="89B8C9"/>
+          </a:solidFill>
+          <a:ln xmlns:a="http://schemas.openxmlformats.org/drawingml/2006/main" w="0">
+            <a:noFill/>
+            <a:prstDash val="solid"/>
+          </a:ln>
+        </p:spPr>
+      </p:sp>
+      <p:sp>
+        <p:nvSpPr>
+          <p:cNvPr id="141" name="central-takeaway-title">
+            <a:extLst xmlns:a="http://schemas.openxmlformats.org/drawingml/2006/main">
+              <a:ext uri="{FF2B5EF4-FFF2-40B4-BE49-F238E27FC236}">
+                <a16:creationId xmlns:a16="http://schemas.microsoft.com/office/drawing/2014/main" id="{365FE4B7-06D3-49E7-8EC7-0E2EBBAD0E03}"/>
               </a:ext>
             </a:extLst>
           </p:cNvPr>
@@ -3160,14 +6295,14 @@
             <a:pPr algn="ctr">
               <a:defRPr sz="4125" b="1">
                 <a:solidFill>
-                  <a:srgbClr val="102A43"/>
+                  <a:srgbClr val="293F55"/>
                 </a:solidFill>
               </a:defRPr>
             </a:pPr>
             <a:r>
               <a:rPr sz="4125" b="1">
                 <a:solidFill>
-                  <a:srgbClr val="102A43"/>
+                  <a:srgbClr val="293F55"/>
                 </a:solidFill>
               </a:rPr>
               <a:t>1,240</a:t>
@@ -3177,10 +6312,10 @@
       </p:sp>
       <p:sp>
         <p:nvSpPr>
-          <p:cNvPr id="47" name="central-takeaway-subtitle">
-            <a:extLst xmlns:a="http://schemas.openxmlformats.org/drawingml/2006/main">
-              <a:ext uri="{FF2B5EF4-FFF2-40B4-BE49-F238E27FC236}">
-                <a16:creationId xmlns:a16="http://schemas.microsoft.com/office/drawing/2014/main" id="{8C4D533C-5127-4235-B5CA-32556E05B44C}"/>
+          <p:cNvPr id="142" name="central-takeaway-subtitle">
+            <a:extLst xmlns:a="http://schemas.openxmlformats.org/drawingml/2006/main">
+              <a:ext uri="{FF2B5EF4-FFF2-40B4-BE49-F238E27FC236}">
+                <a16:creationId xmlns:a16="http://schemas.microsoft.com/office/drawing/2014/main" id="{487771B2-E655-4015-B1F0-6A6E9623AE0F}"/>
               </a:ext>
             </a:extLst>
           </p:cNvPr>
@@ -3210,14 +6345,14 @@
             <a:pPr algn="ctr">
               <a:defRPr sz="2400" b="1">
                 <a:solidFill>
-                  <a:srgbClr val="102A43"/>
+                  <a:srgbClr val="293F55"/>
                 </a:solidFill>
               </a:defRPr>
             </a:pPr>
             <a:r>
               <a:rPr sz="2400" b="1">
                 <a:solidFill>
-                  <a:srgbClr val="102A43"/>
+                  <a:srgbClr val="293F55"/>
                 </a:solidFill>
               </a:rPr>
               <a:t>Key facts remain bound to the source and study design</a:t>
@@ -3227,10 +6362,10 @@
       </p:sp>
       <p:sp>
         <p:nvSpPr>
-          <p:cNvPr id="48" name="takeaway-evidence">
-            <a:extLst xmlns:a="http://schemas.openxmlformats.org/drawingml/2006/main">
-              <a:ext uri="{FF2B5EF4-FFF2-40B4-BE49-F238E27FC236}">
-                <a16:creationId xmlns:a16="http://schemas.microsoft.com/office/drawing/2014/main" id="{09A0E524-0480-4651-9CF8-7EFEAA21FA9E}"/>
+          <p:cNvPr id="143" name="takeaway-evidence">
+            <a:extLst xmlns:a="http://schemas.openxmlformats.org/drawingml/2006/main">
+              <a:ext uri="{FF2B5EF4-FFF2-40B4-BE49-F238E27FC236}">
+                <a16:creationId xmlns:a16="http://schemas.microsoft.com/office/drawing/2014/main" id="{31462797-76D9-47FE-B1BE-531670DF424B}"/>
               </a:ext>
             </a:extLst>
           </p:cNvPr>
@@ -3260,14 +6395,14 @@
             <a:pPr>
               <a:defRPr sz="1875" i="1">
                 <a:solidFill>
-                  <a:srgbClr val="2C8C99"/>
+                  <a:srgbClr val="487AA1"/>
                 </a:solidFill>
               </a:defRPr>
             </a:pPr>
             <a:r>
               <a:rPr sz="1875" i="1">
                 <a:solidFill>
-                  <a:srgbClr val="2C8C99"/>
+                  <a:srgbClr val="487AA1"/>
                 </a:solidFill>
               </a:rPr>
               <a:t>Evidence fixture: POSTEX-SYNTH-2026-001</a:t>
@@ -3277,10 +6412,10 @@
       </p:sp>
       <p:sp>
         <p:nvSpPr>
-          <p:cNvPr id="49" name="figure-two-heading-title">
-            <a:extLst xmlns:a="http://schemas.openxmlformats.org/drawingml/2006/main">
-              <a:ext uri="{FF2B5EF4-FFF2-40B4-BE49-F238E27FC236}">
-                <a16:creationId xmlns:a16="http://schemas.microsoft.com/office/drawing/2014/main" id="{D5BB8425-52CD-460A-AE71-B2465EF78112}"/>
+          <p:cNvPr id="144" name="figure-two-heading-title">
+            <a:extLst xmlns:a="http://schemas.openxmlformats.org/drawingml/2006/main">
+              <a:ext uri="{FF2B5EF4-FFF2-40B4-BE49-F238E27FC236}">
+                <a16:creationId xmlns:a16="http://schemas.microsoft.com/office/drawing/2014/main" id="{DFAA5787-CD55-40EB-AB29-4B1A5FB0B8DF}"/>
               </a:ext>
             </a:extLst>
           </p:cNvPr>
@@ -3310,14 +6445,14 @@
             <a:pPr>
               <a:defRPr sz="3600" b="1">
                 <a:solidFill>
-                  <a:srgbClr val="0F5F73"/>
+                  <a:srgbClr val="3E5C78"/>
                 </a:solidFill>
               </a:defRPr>
             </a:pPr>
             <a:r>
               <a:rPr sz="3600" b="1">
                 <a:solidFill>
-                  <a:srgbClr val="0F5F73"/>
+                  <a:srgbClr val="3E5C78"/>
                 </a:solidFill>
               </a:rPr>
               <a:t>Primary evidence</a:t>
@@ -3327,10 +6462,10 @@
       </p:sp>
       <p:sp>
         <p:nvSpPr>
-          <p:cNvPr id="50" name="figure-two-heading-rule">
-            <a:extLst xmlns:a="http://schemas.openxmlformats.org/drawingml/2006/main">
-              <a:ext uri="{FF2B5EF4-FFF2-40B4-BE49-F238E27FC236}">
-                <a16:creationId xmlns:a16="http://schemas.microsoft.com/office/drawing/2014/main" id="{EEFB768A-29A2-4D51-90E2-6F2EB810A2C4}"/>
+          <p:cNvPr id="145" name="figure-two-heading-rule">
+            <a:extLst xmlns:a="http://schemas.openxmlformats.org/drawingml/2006/main">
+              <a:ext uri="{FF2B5EF4-FFF2-40B4-BE49-F238E27FC236}">
+                <a16:creationId xmlns:a16="http://schemas.microsoft.com/office/drawing/2014/main" id="{AD1BEAE2-667B-4E69-A6B3-134FE7083A46}"/>
               </a:ext>
             </a:extLst>
           </p:cNvPr>
@@ -3350,20 +6485,20 @@
             </a:avLst>
           </a:prstGeom>
           <a:solidFill xmlns:a="http://schemas.openxmlformats.org/drawingml/2006/main">
-            <a:srgbClr val="E8B44C"/>
-          </a:solidFill>
-          <a:ln xmlns:a="http://schemas.openxmlformats.org/drawingml/2006/main" w="0">
-            <a:noFill/>
-            <a:prstDash val="solid"/>
-          </a:ln>
-        </p:spPr>
-      </p:sp>
-      <p:sp>
-        <p:nvSpPr>
-          <p:cNvPr id="51" name="figure-two-frame">
-            <a:extLst xmlns:a="http://schemas.openxmlformats.org/drawingml/2006/main">
-              <a:ext uri="{FF2B5EF4-FFF2-40B4-BE49-F238E27FC236}">
-                <a16:creationId xmlns:a16="http://schemas.microsoft.com/office/drawing/2014/main" id="{47D135D6-DD96-47D5-9734-D477C439FC2A}"/>
+            <a:srgbClr val="E5BC6C"/>
+          </a:solidFill>
+          <a:ln xmlns:a="http://schemas.openxmlformats.org/drawingml/2006/main" w="0">
+            <a:noFill/>
+            <a:prstDash val="solid"/>
+          </a:ln>
+        </p:spPr>
+      </p:sp>
+      <p:sp>
+        <p:nvSpPr>
+          <p:cNvPr id="146" name="figure-two-frame">
+            <a:extLst xmlns:a="http://schemas.openxmlformats.org/drawingml/2006/main">
+              <a:ext uri="{FF2B5EF4-FFF2-40B4-BE49-F238E27FC236}">
+                <a16:creationId xmlns:a16="http://schemas.microsoft.com/office/drawing/2014/main" id="{62249B23-B898-4DE2-9B7D-7E4387DDD5C1}"/>
               </a:ext>
             </a:extLst>
           </p:cNvPr>
@@ -3387,7 +6522,7 @@
           </a:solidFill>
           <a:ln xmlns:a="http://schemas.openxmlformats.org/drawingml/2006/main" w="28575">
             <a:solidFill>
-              <a:srgbClr val="D9E2EC"/>
+              <a:srgbClr val="DDE5E7"/>
             </a:solidFill>
             <a:prstDash val="solid"/>
           </a:ln>
@@ -3395,10 +6530,10 @@
       </p:sp>
       <p:sp>
         <p:nvSpPr>
-          <p:cNvPr id="52" name="figure-two-placeholder">
-            <a:extLst xmlns:a="http://schemas.openxmlformats.org/drawingml/2006/main">
-              <a:ext uri="{FF2B5EF4-FFF2-40B4-BE49-F238E27FC236}">
-                <a16:creationId xmlns:a16="http://schemas.microsoft.com/office/drawing/2014/main" id="{D4107CAC-4365-4BCC-82A7-5FC95AF7A862}"/>
+          <p:cNvPr id="147" name="figure-two-placeholder">
+            <a:extLst xmlns:a="http://schemas.openxmlformats.org/drawingml/2006/main">
+              <a:ext uri="{FF2B5EF4-FFF2-40B4-BE49-F238E27FC236}">
+                <a16:creationId xmlns:a16="http://schemas.microsoft.com/office/drawing/2014/main" id="{875D7006-927A-49F0-A74D-C43F9E77A02D}"/>
               </a:ext>
             </a:extLst>
           </p:cNvPr>
@@ -3418,11 +6553,11 @@
             </a:avLst>
           </a:prstGeom>
           <a:solidFill xmlns:a="http://schemas.openxmlformats.org/drawingml/2006/main">
-            <a:srgbClr val="F6F8FA"/>
+            <a:srgbClr val="F6F2EE"/>
           </a:solidFill>
           <a:ln xmlns:a="http://schemas.openxmlformats.org/drawingml/2006/main" w="19050">
             <a:solidFill>
-              <a:srgbClr val="D9E2EC"/>
+              <a:srgbClr val="DDE5E7"/>
             </a:solidFill>
             <a:prstDash val="solid"/>
           </a:ln>
@@ -3430,10 +6565,10 @@
       </p:sp>
       <p:sp>
         <p:nvSpPr>
-          <p:cNvPr id="53" name="figure-two-placeholder-label">
-            <a:extLst xmlns:a="http://schemas.openxmlformats.org/drawingml/2006/main">
-              <a:ext uri="{FF2B5EF4-FFF2-40B4-BE49-F238E27FC236}">
-                <a16:creationId xmlns:a16="http://schemas.microsoft.com/office/drawing/2014/main" id="{099F1539-FA22-4E2B-8B74-5967DB47D3BE}"/>
+          <p:cNvPr id="148" name="figure-two-placeholder-label">
+            <a:extLst xmlns:a="http://schemas.openxmlformats.org/drawingml/2006/main">
+              <a:ext uri="{FF2B5EF4-FFF2-40B4-BE49-F238E27FC236}">
+                <a16:creationId xmlns:a16="http://schemas.microsoft.com/office/drawing/2014/main" id="{551686ED-C2C7-426F-B627-60FEDECB2ECA}"/>
               </a:ext>
             </a:extLst>
           </p:cNvPr>
@@ -3463,14 +6598,14 @@
             <a:pPr algn="ctr">
               <a:defRPr sz="2700" b="1">
                 <a:solidFill>
-                  <a:srgbClr val="2C8C99"/>
+                  <a:srgbClr val="487AA1"/>
                 </a:solidFill>
               </a:defRPr>
             </a:pPr>
             <a:r>
               <a:rPr sz="2700" b="1">
                 <a:solidFill>
-                  <a:srgbClr val="2C8C99"/>
+                  <a:srgbClr val="487AA1"/>
                 </a:solidFill>
               </a:rPr>
               <a:t>SOURCE FIGURE SLOT</a:t>
@@ -3480,10 +6615,10 @@
       </p:sp>
       <p:sp>
         <p:nvSpPr>
-          <p:cNvPr id="54" name="figure-two-caption">
-            <a:extLst xmlns:a="http://schemas.openxmlformats.org/drawingml/2006/main">
-              <a:ext uri="{FF2B5EF4-FFF2-40B4-BE49-F238E27FC236}">
-                <a16:creationId xmlns:a16="http://schemas.microsoft.com/office/drawing/2014/main" id="{ECB58929-D14D-4085-9CE7-34255B0CF670}"/>
+          <p:cNvPr id="149" name="figure-two-caption">
+            <a:extLst xmlns:a="http://schemas.openxmlformats.org/drawingml/2006/main">
+              <a:ext uri="{FF2B5EF4-FFF2-40B4-BE49-F238E27FC236}">
+                <a16:creationId xmlns:a16="http://schemas.microsoft.com/office/drawing/2014/main" id="{23259FC8-4455-4678-8382-DAEA2D1AB876}"/>
               </a:ext>
             </a:extLst>
           </p:cNvPr>
@@ -3513,14 +6648,14 @@
             <a:pPr>
               <a:defRPr sz="2250" b="1">
                 <a:solidFill>
-                  <a:srgbClr val="102A43"/>
+                  <a:srgbClr val="293F55"/>
                 </a:solidFill>
               </a:defRPr>
             </a:pPr>
             <a:r>
               <a:rPr sz="2250" b="1">
                 <a:solidFill>
-                  <a:srgbClr val="102A43"/>
+                  <a:srgbClr val="293F55"/>
                 </a:solidFill>
               </a:rPr>
               <a:t>Source figure selected during full-paper generation</a:t>
@@ -3530,10 +6665,10 @@
       </p:sp>
       <p:sp>
         <p:nvSpPr>
-          <p:cNvPr id="55" name="figure-two-source">
-            <a:extLst xmlns:a="http://schemas.openxmlformats.org/drawingml/2006/main">
-              <a:ext uri="{FF2B5EF4-FFF2-40B4-BE49-F238E27FC236}">
-                <a16:creationId xmlns:a16="http://schemas.microsoft.com/office/drawing/2014/main" id="{B478D925-5182-4F7C-BDB9-A28352CD6B7C}"/>
+          <p:cNvPr id="150" name="figure-two-source">
+            <a:extLst xmlns:a="http://schemas.openxmlformats.org/drawingml/2006/main">
+              <a:ext uri="{FF2B5EF4-FFF2-40B4-BE49-F238E27FC236}">
+                <a16:creationId xmlns:a16="http://schemas.microsoft.com/office/drawing/2014/main" id="{C395B675-BDD8-4774-BD82-E59CFA0EDC6A}"/>
               </a:ext>
             </a:extLst>
           </p:cNvPr>
@@ -3563,14 +6698,14 @@
             <a:pPr>
               <a:defRPr sz="1875" i="1">
                 <a:solidFill>
-                  <a:srgbClr val="2C8C99"/>
+                  <a:srgbClr val="487AA1"/>
                 </a:solidFill>
               </a:defRPr>
             </a:pPr>
             <a:r>
               <a:rPr sz="1875" i="1">
                 <a:solidFill>
-                  <a:srgbClr val="2C8C99"/>
+                  <a:srgbClr val="487AA1"/>
                 </a:solidFill>
               </a:rPr>
               <a:t>Source: POSTEX-SYNTH-2026-001</a:t>
@@ -3580,10 +6715,10 @@
       </p:sp>
       <p:sp>
         <p:nvSpPr>
-          <p:cNvPr id="56" name="validation-heading-title">
-            <a:extLst xmlns:a="http://schemas.openxmlformats.org/drawingml/2006/main">
-              <a:ext uri="{FF2B5EF4-FFF2-40B4-BE49-F238E27FC236}">
-                <a16:creationId xmlns:a16="http://schemas.microsoft.com/office/drawing/2014/main" id="{9B76C07C-E462-478A-9FEC-AF578788F68A}"/>
+          <p:cNvPr id="151" name="validation-heading-title">
+            <a:extLst xmlns:a="http://schemas.openxmlformats.org/drawingml/2006/main">
+              <a:ext uri="{FF2B5EF4-FFF2-40B4-BE49-F238E27FC236}">
+                <a16:creationId xmlns:a16="http://schemas.microsoft.com/office/drawing/2014/main" id="{EA623759-CE2A-4E64-9639-C0791B1A20B3}"/>
               </a:ext>
             </a:extLst>
           </p:cNvPr>
@@ -3613,14 +6748,14 @@
             <a:pPr>
               <a:defRPr sz="3600" b="1">
                 <a:solidFill>
-                  <a:srgbClr val="0F5F73"/>
+                  <a:srgbClr val="3E5C78"/>
                 </a:solidFill>
               </a:defRPr>
             </a:pPr>
             <a:r>
               <a:rPr sz="3600" b="1">
                 <a:solidFill>
-                  <a:srgbClr val="0F5F73"/>
+                  <a:srgbClr val="3E5C78"/>
                 </a:solidFill>
               </a:rPr>
               <a:t>Required factual anchors</a:t>
@@ -3630,10 +6765,10 @@
       </p:sp>
       <p:sp>
         <p:nvSpPr>
-          <p:cNvPr id="57" name="validation-heading-rule">
-            <a:extLst xmlns:a="http://schemas.openxmlformats.org/drawingml/2006/main">
-              <a:ext uri="{FF2B5EF4-FFF2-40B4-BE49-F238E27FC236}">
-                <a16:creationId xmlns:a16="http://schemas.microsoft.com/office/drawing/2014/main" id="{3099C971-9893-4476-8D50-6DC970919E78}"/>
+          <p:cNvPr id="152" name="validation-heading-rule">
+            <a:extLst xmlns:a="http://schemas.openxmlformats.org/drawingml/2006/main">
+              <a:ext uri="{FF2B5EF4-FFF2-40B4-BE49-F238E27FC236}">
+                <a16:creationId xmlns:a16="http://schemas.microsoft.com/office/drawing/2014/main" id="{D0E79EA1-FDA8-4692-AC1E-693514038F91}"/>
               </a:ext>
             </a:extLst>
           </p:cNvPr>
@@ -3653,20 +6788,20 @@
             </a:avLst>
           </a:prstGeom>
           <a:solidFill xmlns:a="http://schemas.openxmlformats.org/drawingml/2006/main">
-            <a:srgbClr val="E8B44C"/>
-          </a:solidFill>
-          <a:ln xmlns:a="http://schemas.openxmlformats.org/drawingml/2006/main" w="0">
-            <a:noFill/>
-            <a:prstDash val="solid"/>
-          </a:ln>
-        </p:spPr>
-      </p:sp>
-      <p:sp>
-        <p:nvSpPr>
-          <p:cNvPr id="58" name="validation-panel">
-            <a:extLst xmlns:a="http://schemas.openxmlformats.org/drawingml/2006/main">
-              <a:ext uri="{FF2B5EF4-FFF2-40B4-BE49-F238E27FC236}">
-                <a16:creationId xmlns:a16="http://schemas.microsoft.com/office/drawing/2014/main" id="{D5508964-B2E7-4B6F-9CAD-2DD764E49A0E}"/>
+            <a:srgbClr val="E5BC6C"/>
+          </a:solidFill>
+          <a:ln xmlns:a="http://schemas.openxmlformats.org/drawingml/2006/main" w="0">
+            <a:noFill/>
+            <a:prstDash val="solid"/>
+          </a:ln>
+        </p:spPr>
+      </p:sp>
+      <p:sp>
+        <p:nvSpPr>
+          <p:cNvPr id="153" name="validation-panel">
+            <a:extLst xmlns:a="http://schemas.openxmlformats.org/drawingml/2006/main">
+              <a:ext uri="{FF2B5EF4-FFF2-40B4-BE49-F238E27FC236}">
+                <a16:creationId xmlns:a16="http://schemas.microsoft.com/office/drawing/2014/main" id="{E9134C3E-6A4E-4C19-B861-BF73A6E19E7E}"/>
               </a:ext>
             </a:extLst>
           </p:cNvPr>
@@ -3690,7 +6825,7 @@
           </a:solidFill>
           <a:ln xmlns:a="http://schemas.openxmlformats.org/drawingml/2006/main" w="28575">
             <a:solidFill>
-              <a:srgbClr val="D9E2EC"/>
+              <a:srgbClr val="DDE5E7"/>
             </a:solidFill>
             <a:prstDash val="solid"/>
           </a:ln>
@@ -3698,10 +6833,10 @@
       </p:sp>
       <p:sp>
         <p:nvSpPr>
-          <p:cNvPr id="59" name="validation">
-            <a:extLst xmlns:a="http://schemas.openxmlformats.org/drawingml/2006/main">
-              <a:ext uri="{FF2B5EF4-FFF2-40B4-BE49-F238E27FC236}">
-                <a16:creationId xmlns:a16="http://schemas.microsoft.com/office/drawing/2014/main" id="{0DF4FF2B-8637-419F-8E15-63F4DBDD62C8}"/>
+          <p:cNvPr id="154" name="validation">
+            <a:extLst xmlns:a="http://schemas.openxmlformats.org/drawingml/2006/main">
+              <a:ext uri="{FF2B5EF4-FFF2-40B4-BE49-F238E27FC236}">
+                <a16:creationId xmlns:a16="http://schemas.microsoft.com/office/drawing/2014/main" id="{9EC4F1C0-2E5F-4241-9A56-30F5729FF8B8}"/>
               </a:ext>
             </a:extLst>
           </p:cNvPr>
@@ -3731,14 +6866,14 @@
             <a:pPr>
               <a:defRPr sz="2850">
                 <a:solidFill>
-                  <a:srgbClr val="102A43"/>
+                  <a:srgbClr val="293F55"/>
                 </a:solidFill>
               </a:defRPr>
             </a:pPr>
             <a:r>
               <a:rPr sz="2850">
                 <a:solidFill>
-                  <a:srgbClr val="102A43"/>
+                  <a:srgbClr val="293F55"/>
                 </a:solidFill>
               </a:rPr>
               <a:t>• total profiles: 1,240</a:t>
@@ -3748,14 +6883,14 @@
             <a:pPr>
               <a:defRPr sz="2850">
                 <a:solidFill>
-                  <a:srgbClr val="102A43"/>
+                  <a:srgbClr val="293F55"/>
                 </a:solidFill>
               </a:defRPr>
             </a:pPr>
             <a:r>
               <a:rPr sz="2850">
                 <a:solidFill>
-                  <a:srgbClr val="102A43"/>
+                  <a:srgbClr val="293F55"/>
                 </a:solidFill>
               </a:rPr>
               <a:t>• selected features: 12-feature</a:t>
@@ -3765,14 +6900,14 @@
             <a:pPr>
               <a:defRPr sz="2850">
                 <a:solidFill>
-                  <a:srgbClr val="102A43"/>
+                  <a:srgbClr val="293F55"/>
                 </a:solidFill>
               </a:defRPr>
             </a:pPr>
             <a:r>
               <a:rPr sz="2850">
                 <a:solidFill>
-                  <a:srgbClr val="102A43"/>
+                  <a:srgbClr val="293F55"/>
                 </a:solidFill>
               </a:rPr>
               <a:t>• external c index a: 0.75</a:t>
@@ -3782,14 +6917,14 @@
             <a:pPr>
               <a:defRPr sz="2850">
                 <a:solidFill>
-                  <a:srgbClr val="102A43"/>
+                  <a:srgbClr val="293F55"/>
                 </a:solidFill>
               </a:defRPr>
             </a:pPr>
             <a:r>
               <a:rPr sz="2850">
                 <a:solidFill>
-                  <a:srgbClr val="102A43"/>
+                  <a:srgbClr val="293F55"/>
                 </a:solidFill>
               </a:rPr>
               <a:t>• external c index b: 0.74</a:t>
@@ -3799,14 +6934,14 @@
             <a:pPr>
               <a:defRPr sz="2850">
                 <a:solidFill>
-                  <a:srgbClr val="102A43"/>
+                  <a:srgbClr val="293F55"/>
                 </a:solidFill>
               </a:defRPr>
             </a:pPr>
             <a:r>
               <a:rPr sz="2850">
                 <a:solidFill>
-                  <a:srgbClr val="102A43"/>
+                  <a:srgbClr val="293F55"/>
                 </a:solidFill>
               </a:rPr>
               <a:t>• sign stability: 92%</a:t>
@@ -3816,10 +6951,10 @@
       </p:sp>
       <p:sp>
         <p:nvSpPr>
-          <p:cNvPr id="60" name="validation-evidence">
-            <a:extLst xmlns:a="http://schemas.openxmlformats.org/drawingml/2006/main">
-              <a:ext uri="{FF2B5EF4-FFF2-40B4-BE49-F238E27FC236}">
-                <a16:creationId xmlns:a16="http://schemas.microsoft.com/office/drawing/2014/main" id="{F7763289-43FF-4508-9961-8D14D80DA7AA}"/>
+          <p:cNvPr id="155" name="validation-evidence">
+            <a:extLst xmlns:a="http://schemas.openxmlformats.org/drawingml/2006/main">
+              <a:ext uri="{FF2B5EF4-FFF2-40B4-BE49-F238E27FC236}">
+                <a16:creationId xmlns:a16="http://schemas.microsoft.com/office/drawing/2014/main" id="{C550C13B-89D4-45D4-8155-A3E4587B9CFD}"/>
               </a:ext>
             </a:extLst>
           </p:cNvPr>
@@ -3849,14 +6984,14 @@
             <a:pPr>
               <a:defRPr sz="1875" i="1">
                 <a:solidFill>
-                  <a:srgbClr val="2C8C99"/>
+                  <a:srgbClr val="487AA1"/>
                 </a:solidFill>
               </a:defRPr>
             </a:pPr>
             <a:r>
               <a:rPr sz="1875" i="1">
                 <a:solidFill>
-                  <a:srgbClr val="2C8C99"/>
+                  <a:srgbClr val="487AA1"/>
                 </a:solidFill>
               </a:rPr>
               <a:t>Ground-truth case: aurora-synthetic-benchmark</a:t>
@@ -3866,10 +7001,10 @@
       </p:sp>
       <p:sp>
         <p:nvSpPr>
-          <p:cNvPr id="61" name="performance-strip">
-            <a:extLst xmlns:a="http://schemas.openxmlformats.org/drawingml/2006/main">
-              <a:ext uri="{FF2B5EF4-FFF2-40B4-BE49-F238E27FC236}">
-                <a16:creationId xmlns:a16="http://schemas.microsoft.com/office/drawing/2014/main" id="{14A11AB9-AB72-4320-9A31-9D596AAAB838}"/>
+          <p:cNvPr id="156" name="performance-strip">
+            <a:extLst xmlns:a="http://schemas.openxmlformats.org/drawingml/2006/main">
+              <a:ext uri="{FF2B5EF4-FFF2-40B4-BE49-F238E27FC236}">
+                <a16:creationId xmlns:a16="http://schemas.microsoft.com/office/drawing/2014/main" id="{7A17EBF2-18A8-45ED-AC91-37D378ECD13E}"/>
               </a:ext>
             </a:extLst>
           </p:cNvPr>
@@ -3889,20 +7024,20 @@
             </a:avLst>
           </a:prstGeom>
           <a:solidFill xmlns:a="http://schemas.openxmlformats.org/drawingml/2006/main">
-            <a:srgbClr val="0F5F73"/>
-          </a:solidFill>
-          <a:ln xmlns:a="http://schemas.openxmlformats.org/drawingml/2006/main" w="0">
-            <a:noFill/>
-            <a:prstDash val="solid"/>
-          </a:ln>
-        </p:spPr>
-      </p:sp>
-      <p:sp>
-        <p:nvSpPr>
-          <p:cNvPr id="62" name="performance-strip-text">
-            <a:extLst xmlns:a="http://schemas.openxmlformats.org/drawingml/2006/main">
-              <a:ext uri="{FF2B5EF4-FFF2-40B4-BE49-F238E27FC236}">
-                <a16:creationId xmlns:a16="http://schemas.microsoft.com/office/drawing/2014/main" id="{B3458204-EFED-4276-9F69-5458F988210B}"/>
+            <a:srgbClr val="3E5C78"/>
+          </a:solidFill>
+          <a:ln xmlns:a="http://schemas.openxmlformats.org/drawingml/2006/main" w="0">
+            <a:noFill/>
+            <a:prstDash val="solid"/>
+          </a:ln>
+        </p:spPr>
+      </p:sp>
+      <p:sp>
+        <p:nvSpPr>
+          <p:cNvPr id="157" name="performance-strip-text">
+            <a:extLst xmlns:a="http://schemas.openxmlformats.org/drawingml/2006/main">
+              <a:ext uri="{FF2B5EF4-FFF2-40B4-BE49-F238E27FC236}">
+                <a16:creationId xmlns:a16="http://schemas.microsoft.com/office/drawing/2014/main" id="{5E64A3CD-40C0-4E39-9623-869DA9C699AC}"/>
               </a:ext>
             </a:extLst>
           </p:cNvPr>
@@ -3949,10 +7084,10 @@
       </p:sp>
       <p:sp>
         <p:nvSpPr>
-          <p:cNvPr id="63" name="biology-heading-title">
-            <a:extLst xmlns:a="http://schemas.openxmlformats.org/drawingml/2006/main">
-              <a:ext uri="{FF2B5EF4-FFF2-40B4-BE49-F238E27FC236}">
-                <a16:creationId xmlns:a16="http://schemas.microsoft.com/office/drawing/2014/main" id="{60B2DBB8-FD9D-4E17-8037-600B59218A8E}"/>
+          <p:cNvPr id="158" name="biology-heading-title">
+            <a:extLst xmlns:a="http://schemas.openxmlformats.org/drawingml/2006/main">
+              <a:ext uri="{FF2B5EF4-FFF2-40B4-BE49-F238E27FC236}">
+                <a16:creationId xmlns:a16="http://schemas.microsoft.com/office/drawing/2014/main" id="{8F47F01D-295B-4E98-825D-5831FE252ADA}"/>
               </a:ext>
             </a:extLst>
           </p:cNvPr>
@@ -3982,14 +7117,14 @@
             <a:pPr>
               <a:defRPr sz="3600" b="1">
                 <a:solidFill>
-                  <a:srgbClr val="0F5F73"/>
+                  <a:srgbClr val="3E5C78"/>
                 </a:solidFill>
               </a:defRPr>
             </a:pPr>
             <a:r>
               <a:rPr sz="3600" b="1">
                 <a:solidFill>
-                  <a:srgbClr val="0F5F73"/>
+                  <a:srgbClr val="3E5C78"/>
                 </a:solidFill>
               </a:rPr>
               <a:t>Fact checks</a:t>
@@ -3999,10 +7134,10 @@
       </p:sp>
       <p:sp>
         <p:nvSpPr>
-          <p:cNvPr id="64" name="biology-heading-rule">
-            <a:extLst xmlns:a="http://schemas.openxmlformats.org/drawingml/2006/main">
-              <a:ext uri="{FF2B5EF4-FFF2-40B4-BE49-F238E27FC236}">
-                <a16:creationId xmlns:a16="http://schemas.microsoft.com/office/drawing/2014/main" id="{3D4D1B6E-E0C3-4AD5-B25C-895C1FA96442}"/>
+          <p:cNvPr id="159" name="biology-heading-rule">
+            <a:extLst xmlns:a="http://schemas.openxmlformats.org/drawingml/2006/main">
+              <a:ext uri="{FF2B5EF4-FFF2-40B4-BE49-F238E27FC236}">
+                <a16:creationId xmlns:a16="http://schemas.microsoft.com/office/drawing/2014/main" id="{E3652B84-8540-44F8-99EB-529BFA711E8A}"/>
               </a:ext>
             </a:extLst>
           </p:cNvPr>
@@ -4022,20 +7157,20 @@
             </a:avLst>
           </a:prstGeom>
           <a:solidFill xmlns:a="http://schemas.openxmlformats.org/drawingml/2006/main">
-            <a:srgbClr val="E8B44C"/>
-          </a:solidFill>
-          <a:ln xmlns:a="http://schemas.openxmlformats.org/drawingml/2006/main" w="0">
-            <a:noFill/>
-            <a:prstDash val="solid"/>
-          </a:ln>
-        </p:spPr>
-      </p:sp>
-      <p:sp>
-        <p:nvSpPr>
-          <p:cNvPr id="65" name="biology-1-value">
-            <a:extLst xmlns:a="http://schemas.openxmlformats.org/drawingml/2006/main">
-              <a:ext uri="{FF2B5EF4-FFF2-40B4-BE49-F238E27FC236}">
-                <a16:creationId xmlns:a16="http://schemas.microsoft.com/office/drawing/2014/main" id="{8DD01C4C-F49F-4A81-AACA-5049E1353F52}"/>
+            <a:srgbClr val="E5BC6C"/>
+          </a:solidFill>
+          <a:ln xmlns:a="http://schemas.openxmlformats.org/drawingml/2006/main" w="0">
+            <a:noFill/>
+            <a:prstDash val="solid"/>
+          </a:ln>
+        </p:spPr>
+      </p:sp>
+      <p:sp>
+        <p:nvSpPr>
+          <p:cNvPr id="160" name="biology-1-value">
+            <a:extLst xmlns:a="http://schemas.openxmlformats.org/drawingml/2006/main">
+              <a:ext uri="{FF2B5EF4-FFF2-40B4-BE49-F238E27FC236}">
+                <a16:creationId xmlns:a16="http://schemas.microsoft.com/office/drawing/2014/main" id="{9F963A07-A716-4576-BD90-B45515A67A66}"/>
               </a:ext>
             </a:extLst>
           </p:cNvPr>
@@ -4065,14 +7200,14 @@
             <a:pPr>
               <a:defRPr sz="5100" b="1">
                 <a:solidFill>
-                  <a:srgbClr val="0F5F73"/>
+                  <a:srgbClr val="3E5C78"/>
                 </a:solidFill>
               </a:defRPr>
             </a:pPr>
             <a:r>
               <a:rPr sz="5100" b="1">
                 <a:solidFill>
-                  <a:srgbClr val="0F5F73"/>
+                  <a:srgbClr val="3E5C78"/>
                 </a:solidFill>
               </a:rPr>
               <a:t>1,240</a:t>
@@ -4082,10 +7217,10 @@
       </p:sp>
       <p:sp>
         <p:nvSpPr>
-          <p:cNvPr id="66" name="biology-1-label">
-            <a:extLst xmlns:a="http://schemas.openxmlformats.org/drawingml/2006/main">
-              <a:ext uri="{FF2B5EF4-FFF2-40B4-BE49-F238E27FC236}">
-                <a16:creationId xmlns:a16="http://schemas.microsoft.com/office/drawing/2014/main" id="{A33EB098-F353-4B94-BD7E-B4F3FBD69A8C}"/>
+          <p:cNvPr id="161" name="biology-1-label">
+            <a:extLst xmlns:a="http://schemas.openxmlformats.org/drawingml/2006/main">
+              <a:ext uri="{FF2B5EF4-FFF2-40B4-BE49-F238E27FC236}">
+                <a16:creationId xmlns:a16="http://schemas.microsoft.com/office/drawing/2014/main" id="{C6F32D63-FDE1-460A-B4B5-C565B558B084}"/>
               </a:ext>
             </a:extLst>
           </p:cNvPr>
@@ -4115,14 +7250,14 @@
             <a:pPr>
               <a:defRPr sz="2325" b="1">
                 <a:solidFill>
-                  <a:srgbClr val="102A43"/>
+                  <a:srgbClr val="293F55"/>
                 </a:solidFill>
               </a:defRPr>
             </a:pPr>
             <a:r>
               <a:rPr sz="2325" b="1">
                 <a:solidFill>
-                  <a:srgbClr val="102A43"/>
+                  <a:srgbClr val="293F55"/>
                 </a:solidFill>
               </a:rPr>
               <a:t>total profiles</a:t>
@@ -4132,10 +7267,10 @@
       </p:sp>
       <p:sp>
         <p:nvSpPr>
-          <p:cNvPr id="67" name="biology-2-value">
-            <a:extLst xmlns:a="http://schemas.openxmlformats.org/drawingml/2006/main">
-              <a:ext uri="{FF2B5EF4-FFF2-40B4-BE49-F238E27FC236}">
-                <a16:creationId xmlns:a16="http://schemas.microsoft.com/office/drawing/2014/main" id="{48B65DA2-8960-4B29-9A6B-10E5BA5F4400}"/>
+          <p:cNvPr id="162" name="biology-2-value">
+            <a:extLst xmlns:a="http://schemas.openxmlformats.org/drawingml/2006/main">
+              <a:ext uri="{FF2B5EF4-FFF2-40B4-BE49-F238E27FC236}">
+                <a16:creationId xmlns:a16="http://schemas.microsoft.com/office/drawing/2014/main" id="{0B38B32B-012C-47BD-8486-34C7D446D697}"/>
               </a:ext>
             </a:extLst>
           </p:cNvPr>
@@ -4165,14 +7300,14 @@
             <a:pPr>
               <a:defRPr sz="5100" b="1">
                 <a:solidFill>
-                  <a:srgbClr val="2C8C99"/>
+                  <a:srgbClr val="487AA1"/>
                 </a:solidFill>
               </a:defRPr>
             </a:pPr>
             <a:r>
               <a:rPr sz="5100" b="1">
                 <a:solidFill>
-                  <a:srgbClr val="2C8C99"/>
+                  <a:srgbClr val="487AA1"/>
                 </a:solidFill>
               </a:rPr>
               <a:t>12</a:t>
@@ -4182,10 +7317,10 @@
       </p:sp>
       <p:sp>
         <p:nvSpPr>
-          <p:cNvPr id="68" name="biology-2-label">
-            <a:extLst xmlns:a="http://schemas.openxmlformats.org/drawingml/2006/main">
-              <a:ext uri="{FF2B5EF4-FFF2-40B4-BE49-F238E27FC236}">
-                <a16:creationId xmlns:a16="http://schemas.microsoft.com/office/drawing/2014/main" id="{9307F4A4-C28C-4370-AB6B-D6DC1B2E86AF}"/>
+          <p:cNvPr id="163" name="biology-2-label">
+            <a:extLst xmlns:a="http://schemas.openxmlformats.org/drawingml/2006/main">
+              <a:ext uri="{FF2B5EF4-FFF2-40B4-BE49-F238E27FC236}">
+                <a16:creationId xmlns:a16="http://schemas.microsoft.com/office/drawing/2014/main" id="{916D872D-F4AE-43F9-9DF5-57F3AA1A7A18}"/>
               </a:ext>
             </a:extLst>
           </p:cNvPr>
@@ -4215,14 +7350,14 @@
             <a:pPr>
               <a:defRPr sz="2325" b="1">
                 <a:solidFill>
-                  <a:srgbClr val="102A43"/>
+                  <a:srgbClr val="293F55"/>
                 </a:solidFill>
               </a:defRPr>
             </a:pPr>
             <a:r>
               <a:rPr sz="2325" b="1">
                 <a:solidFill>
-                  <a:srgbClr val="102A43"/>
+                  <a:srgbClr val="293F55"/>
                 </a:solidFill>
               </a:rPr>
               <a:t>selected features</a:t>
@@ -4232,10 +7367,10 @@
       </p:sp>
       <p:sp>
         <p:nvSpPr>
-          <p:cNvPr id="69" name="biology-3-value">
-            <a:extLst xmlns:a="http://schemas.openxmlformats.org/drawingml/2006/main">
-              <a:ext uri="{FF2B5EF4-FFF2-40B4-BE49-F238E27FC236}">
-                <a16:creationId xmlns:a16="http://schemas.microsoft.com/office/drawing/2014/main" id="{C02F6EE4-663F-4FE3-984C-B0D3DDBF3865}"/>
+          <p:cNvPr id="164" name="biology-3-value">
+            <a:extLst xmlns:a="http://schemas.openxmlformats.org/drawingml/2006/main">
+              <a:ext uri="{FF2B5EF4-FFF2-40B4-BE49-F238E27FC236}">
+                <a16:creationId xmlns:a16="http://schemas.microsoft.com/office/drawing/2014/main" id="{627D5554-A4C8-48AD-A5DD-C636E7BDA6DC}"/>
               </a:ext>
             </a:extLst>
           </p:cNvPr>
@@ -4265,14 +7400,14 @@
             <a:pPr>
               <a:defRPr sz="5100" b="1">
                 <a:solidFill>
-                  <a:srgbClr val="E8B44C"/>
+                  <a:srgbClr val="E5BC6C"/>
                 </a:solidFill>
               </a:defRPr>
             </a:pPr>
             <a:r>
               <a:rPr sz="5100" b="1">
                 <a:solidFill>
-                  <a:srgbClr val="E8B44C"/>
+                  <a:srgbClr val="E5BC6C"/>
                 </a:solidFill>
               </a:rPr>
               <a:t>0.75</a:t>
@@ -4282,10 +7417,10 @@
       </p:sp>
       <p:sp>
         <p:nvSpPr>
-          <p:cNvPr id="70" name="biology-3-label">
-            <a:extLst xmlns:a="http://schemas.openxmlformats.org/drawingml/2006/main">
-              <a:ext uri="{FF2B5EF4-FFF2-40B4-BE49-F238E27FC236}">
-                <a16:creationId xmlns:a16="http://schemas.microsoft.com/office/drawing/2014/main" id="{786873D8-8691-4246-BC95-67509CCC05B7}"/>
+          <p:cNvPr id="165" name="biology-3-label">
+            <a:extLst xmlns:a="http://schemas.openxmlformats.org/drawingml/2006/main">
+              <a:ext uri="{FF2B5EF4-FFF2-40B4-BE49-F238E27FC236}">
+                <a16:creationId xmlns:a16="http://schemas.microsoft.com/office/drawing/2014/main" id="{003BEB55-7F72-438A-9C91-F886A8493F7D}"/>
               </a:ext>
             </a:extLst>
           </p:cNvPr>
@@ -4315,14 +7450,14 @@
             <a:pPr>
               <a:defRPr sz="2325" b="1">
                 <a:solidFill>
-                  <a:srgbClr val="102A43"/>
+                  <a:srgbClr val="293F55"/>
                 </a:solidFill>
               </a:defRPr>
             </a:pPr>
             <a:r>
               <a:rPr sz="2325" b="1">
                 <a:solidFill>
-                  <a:srgbClr val="102A43"/>
+                  <a:srgbClr val="293F55"/>
                 </a:solidFill>
               </a:rPr>
               <a:t>external c index a</a:t>
@@ -4332,10 +7467,10 @@
       </p:sp>
       <p:sp>
         <p:nvSpPr>
-          <p:cNvPr id="71" name="biology-evidence">
-            <a:extLst xmlns:a="http://schemas.openxmlformats.org/drawingml/2006/main">
-              <a:ext uri="{FF2B5EF4-FFF2-40B4-BE49-F238E27FC236}">
-                <a16:creationId xmlns:a16="http://schemas.microsoft.com/office/drawing/2014/main" id="{EC70F5B3-0212-4829-81AD-564896374E65}"/>
+          <p:cNvPr id="166" name="biology-evidence">
+            <a:extLst xmlns:a="http://schemas.openxmlformats.org/drawingml/2006/main">
+              <a:ext uri="{FF2B5EF4-FFF2-40B4-BE49-F238E27FC236}">
+                <a16:creationId xmlns:a16="http://schemas.microsoft.com/office/drawing/2014/main" id="{269C402B-5E64-45BE-9F7A-E29B0129CDA3}"/>
               </a:ext>
             </a:extLst>
           </p:cNvPr>
@@ -4365,14 +7500,14 @@
             <a:pPr>
               <a:defRPr sz="1875" i="1">
                 <a:solidFill>
-                  <a:srgbClr val="2C8C99"/>
+                  <a:srgbClr val="487AA1"/>
                 </a:solidFill>
               </a:defRPr>
             </a:pPr>
             <a:r>
               <a:rPr sz="1875" i="1">
                 <a:solidFill>
-                  <a:srgbClr val="2C8C99"/>
+                  <a:srgbClr val="487AA1"/>
                 </a:solidFill>
               </a:rPr>
               <a:t>Machine-checkable evaluation fixture</a:t>
@@ -4382,10 +7517,10 @@
       </p:sp>
       <p:sp>
         <p:nvSpPr>
-          <p:cNvPr id="72" name="figure-three-frame">
-            <a:extLst xmlns:a="http://schemas.openxmlformats.org/drawingml/2006/main">
-              <a:ext uri="{FF2B5EF4-FFF2-40B4-BE49-F238E27FC236}">
-                <a16:creationId xmlns:a16="http://schemas.microsoft.com/office/drawing/2014/main" id="{8B6334F0-1BA9-4279-AA34-4F9F6340CD7E}"/>
+          <p:cNvPr id="167" name="figure-three-frame">
+            <a:extLst xmlns:a="http://schemas.openxmlformats.org/drawingml/2006/main">
+              <a:ext uri="{FF2B5EF4-FFF2-40B4-BE49-F238E27FC236}">
+                <a16:creationId xmlns:a16="http://schemas.microsoft.com/office/drawing/2014/main" id="{9F22C868-3180-4DC7-BF67-FEC6CFBEA6BF}"/>
               </a:ext>
             </a:extLst>
           </p:cNvPr>
@@ -4409,7 +7544,7 @@
           </a:solidFill>
           <a:ln xmlns:a="http://schemas.openxmlformats.org/drawingml/2006/main" w="28575">
             <a:solidFill>
-              <a:srgbClr val="D9E2EC"/>
+              <a:srgbClr val="DDE5E7"/>
             </a:solidFill>
             <a:prstDash val="solid"/>
           </a:ln>
@@ -4417,10 +7552,10 @@
       </p:sp>
       <p:sp>
         <p:nvSpPr>
-          <p:cNvPr id="73" name="figure-three-placeholder">
-            <a:extLst xmlns:a="http://schemas.openxmlformats.org/drawingml/2006/main">
-              <a:ext uri="{FF2B5EF4-FFF2-40B4-BE49-F238E27FC236}">
-                <a16:creationId xmlns:a16="http://schemas.microsoft.com/office/drawing/2014/main" id="{89857F5E-FC36-49E2-B231-5862F334855F}"/>
+          <p:cNvPr id="168" name="figure-three-placeholder">
+            <a:extLst xmlns:a="http://schemas.openxmlformats.org/drawingml/2006/main">
+              <a:ext uri="{FF2B5EF4-FFF2-40B4-BE49-F238E27FC236}">
+                <a16:creationId xmlns:a16="http://schemas.microsoft.com/office/drawing/2014/main" id="{714204EA-06CA-4489-9828-E0F4622E4A8A}"/>
               </a:ext>
             </a:extLst>
           </p:cNvPr>
@@ -4440,11 +7575,11 @@
             </a:avLst>
           </a:prstGeom>
           <a:solidFill xmlns:a="http://schemas.openxmlformats.org/drawingml/2006/main">
-            <a:srgbClr val="F6F8FA"/>
+            <a:srgbClr val="F6F2EE"/>
           </a:solidFill>
           <a:ln xmlns:a="http://schemas.openxmlformats.org/drawingml/2006/main" w="19050">
             <a:solidFill>
-              <a:srgbClr val="D9E2EC"/>
+              <a:srgbClr val="DDE5E7"/>
             </a:solidFill>
             <a:prstDash val="solid"/>
           </a:ln>
@@ -4452,10 +7587,10 @@
       </p:sp>
       <p:sp>
         <p:nvSpPr>
-          <p:cNvPr id="74" name="figure-three-placeholder-label">
-            <a:extLst xmlns:a="http://schemas.openxmlformats.org/drawingml/2006/main">
-              <a:ext uri="{FF2B5EF4-FFF2-40B4-BE49-F238E27FC236}">
-                <a16:creationId xmlns:a16="http://schemas.microsoft.com/office/drawing/2014/main" id="{8B788331-3305-4E6C-9F8A-B5AF7FA9A7F2}"/>
+          <p:cNvPr id="169" name="figure-three-placeholder-label">
+            <a:extLst xmlns:a="http://schemas.openxmlformats.org/drawingml/2006/main">
+              <a:ext uri="{FF2B5EF4-FFF2-40B4-BE49-F238E27FC236}">
+                <a16:creationId xmlns:a16="http://schemas.microsoft.com/office/drawing/2014/main" id="{E0784B35-6127-4AA0-8218-F620D90B438E}"/>
               </a:ext>
             </a:extLst>
           </p:cNvPr>
@@ -4485,14 +7620,14 @@
             <a:pPr algn="ctr">
               <a:defRPr sz="2700" b="1">
                 <a:solidFill>
-                  <a:srgbClr val="2C8C99"/>
+                  <a:srgbClr val="487AA1"/>
                 </a:solidFill>
               </a:defRPr>
             </a:pPr>
             <a:r>
               <a:rPr sz="2700" b="1">
                 <a:solidFill>
-                  <a:srgbClr val="2C8C99"/>
+                  <a:srgbClr val="487AA1"/>
                 </a:solidFill>
               </a:rPr>
               <a:t>SOURCE FIGURE SLOT</a:t>
@@ -4502,10 +7637,10 @@
       </p:sp>
       <p:sp>
         <p:nvSpPr>
-          <p:cNvPr id="75" name="figure-three-caption">
-            <a:extLst xmlns:a="http://schemas.openxmlformats.org/drawingml/2006/main">
-              <a:ext uri="{FF2B5EF4-FFF2-40B4-BE49-F238E27FC236}">
-                <a16:creationId xmlns:a16="http://schemas.microsoft.com/office/drawing/2014/main" id="{847F18A3-4A14-478B-82EC-41C1247D682F}"/>
+          <p:cNvPr id="170" name="figure-three-caption">
+            <a:extLst xmlns:a="http://schemas.openxmlformats.org/drawingml/2006/main">
+              <a:ext uri="{FF2B5EF4-FFF2-40B4-BE49-F238E27FC236}">
+                <a16:creationId xmlns:a16="http://schemas.microsoft.com/office/drawing/2014/main" id="{95AC3CFB-7606-45C0-A9EB-4C1D49BDBA10}"/>
               </a:ext>
             </a:extLst>
           </p:cNvPr>
@@ -4535,14 +7670,14 @@
             <a:pPr>
               <a:defRPr sz="2250" b="1">
                 <a:solidFill>
-                  <a:srgbClr val="102A43"/>
+                  <a:srgbClr val="293F55"/>
                 </a:solidFill>
               </a:defRPr>
             </a:pPr>
             <a:r>
               <a:rPr sz="2250" b="1">
                 <a:solidFill>
-                  <a:srgbClr val="102A43"/>
+                  <a:srgbClr val="293F55"/>
                 </a:solidFill>
               </a:rPr>
               <a:t>Source figure selected during full-paper generation</a:t>
@@ -4552,10 +7687,10 @@
       </p:sp>
       <p:sp>
         <p:nvSpPr>
-          <p:cNvPr id="76" name="figure-three-source">
-            <a:extLst xmlns:a="http://schemas.openxmlformats.org/drawingml/2006/main">
-              <a:ext uri="{FF2B5EF4-FFF2-40B4-BE49-F238E27FC236}">
-                <a16:creationId xmlns:a16="http://schemas.microsoft.com/office/drawing/2014/main" id="{E59E2D19-E261-4F55-B60E-0B493FDFF49F}"/>
+          <p:cNvPr id="171" name="figure-three-source">
+            <a:extLst xmlns:a="http://schemas.openxmlformats.org/drawingml/2006/main">
+              <a:ext uri="{FF2B5EF4-FFF2-40B4-BE49-F238E27FC236}">
+                <a16:creationId xmlns:a16="http://schemas.microsoft.com/office/drawing/2014/main" id="{1893F62A-15E6-472B-8B99-5EEAE78856E5}"/>
               </a:ext>
             </a:extLst>
           </p:cNvPr>
@@ -4585,14 +7720,14 @@
             <a:pPr>
               <a:defRPr sz="1875" i="1">
                 <a:solidFill>
-                  <a:srgbClr val="2C8C99"/>
+                  <a:srgbClr val="487AA1"/>
                 </a:solidFill>
               </a:defRPr>
             </a:pPr>
             <a:r>
               <a:rPr sz="1875" i="1">
                 <a:solidFill>
-                  <a:srgbClr val="2C8C99"/>
+                  <a:srgbClr val="487AA1"/>
                 </a:solidFill>
               </a:rPr>
               <a:t>Source: POSTEX-SYNTH-2026-001</a:t>
@@ -4602,10 +7737,10 @@
       </p:sp>
       <p:sp>
         <p:nvSpPr>
-          <p:cNvPr id="77" name="validation-visual-heading-title">
-            <a:extLst xmlns:a="http://schemas.openxmlformats.org/drawingml/2006/main">
-              <a:ext uri="{FF2B5EF4-FFF2-40B4-BE49-F238E27FC236}">
-                <a16:creationId xmlns:a16="http://schemas.microsoft.com/office/drawing/2014/main" id="{C897AEF6-39F5-4692-867E-97939528FDFA}"/>
+          <p:cNvPr id="172" name="validation-visual-heading-title">
+            <a:extLst xmlns:a="http://schemas.openxmlformats.org/drawingml/2006/main">
+              <a:ext uri="{FF2B5EF4-FFF2-40B4-BE49-F238E27FC236}">
+                <a16:creationId xmlns:a16="http://schemas.microsoft.com/office/drawing/2014/main" id="{508F88D0-B61B-416A-BCC8-C172871E49D6}"/>
               </a:ext>
             </a:extLst>
           </p:cNvPr>
@@ -4635,14 +7770,14 @@
             <a:pPr>
               <a:defRPr sz="3600" b="1">
                 <a:solidFill>
-                  <a:srgbClr val="0F5F73"/>
+                  <a:srgbClr val="3E5C78"/>
                 </a:solidFill>
               </a:defRPr>
             </a:pPr>
             <a:r>
               <a:rPr sz="3600" b="1">
                 <a:solidFill>
-                  <a:srgbClr val="0F5F73"/>
+                  <a:srgbClr val="3E5C78"/>
                 </a:solidFill>
               </a:rPr>
               <a:t>Independent evidence slot</a:t>
@@ -4652,10 +7787,10 @@
       </p:sp>
       <p:sp>
         <p:nvSpPr>
-          <p:cNvPr id="78" name="validation-visual-heading-rule">
-            <a:extLst xmlns:a="http://schemas.openxmlformats.org/drawingml/2006/main">
-              <a:ext uri="{FF2B5EF4-FFF2-40B4-BE49-F238E27FC236}">
-                <a16:creationId xmlns:a16="http://schemas.microsoft.com/office/drawing/2014/main" id="{7FA189F5-0883-48B5-B931-E183036D5DAE}"/>
+          <p:cNvPr id="173" name="validation-visual-heading-rule">
+            <a:extLst xmlns:a="http://schemas.openxmlformats.org/drawingml/2006/main">
+              <a:ext uri="{FF2B5EF4-FFF2-40B4-BE49-F238E27FC236}">
+                <a16:creationId xmlns:a16="http://schemas.microsoft.com/office/drawing/2014/main" id="{5F3E7E8C-F47D-4823-B7E3-B54D4B47F695}"/>
               </a:ext>
             </a:extLst>
           </p:cNvPr>
@@ -4675,20 +7810,20 @@
             </a:avLst>
           </a:prstGeom>
           <a:solidFill xmlns:a="http://schemas.openxmlformats.org/drawingml/2006/main">
-            <a:srgbClr val="E8B44C"/>
-          </a:solidFill>
-          <a:ln xmlns:a="http://schemas.openxmlformats.org/drawingml/2006/main" w="0">
-            <a:noFill/>
-            <a:prstDash val="solid"/>
-          </a:ln>
-        </p:spPr>
-      </p:sp>
-      <p:sp>
-        <p:nvSpPr>
-          <p:cNvPr id="79" name="figure-four-frame">
-            <a:extLst xmlns:a="http://schemas.openxmlformats.org/drawingml/2006/main">
-              <a:ext uri="{FF2B5EF4-FFF2-40B4-BE49-F238E27FC236}">
-                <a16:creationId xmlns:a16="http://schemas.microsoft.com/office/drawing/2014/main" id="{6E8970A8-E3C8-4DFD-A384-B5D48976B754}"/>
+            <a:srgbClr val="E5BC6C"/>
+          </a:solidFill>
+          <a:ln xmlns:a="http://schemas.openxmlformats.org/drawingml/2006/main" w="0">
+            <a:noFill/>
+            <a:prstDash val="solid"/>
+          </a:ln>
+        </p:spPr>
+      </p:sp>
+      <p:sp>
+        <p:nvSpPr>
+          <p:cNvPr id="174" name="figure-four-frame">
+            <a:extLst xmlns:a="http://schemas.openxmlformats.org/drawingml/2006/main">
+              <a:ext uri="{FF2B5EF4-FFF2-40B4-BE49-F238E27FC236}">
+                <a16:creationId xmlns:a16="http://schemas.microsoft.com/office/drawing/2014/main" id="{F108CF47-C66C-417B-9729-FC3C900824AA}"/>
               </a:ext>
             </a:extLst>
           </p:cNvPr>
@@ -4712,7 +7847,7 @@
           </a:solidFill>
           <a:ln xmlns:a="http://schemas.openxmlformats.org/drawingml/2006/main" w="28575">
             <a:solidFill>
-              <a:srgbClr val="D9E2EC"/>
+              <a:srgbClr val="DDE5E7"/>
             </a:solidFill>
             <a:prstDash val="solid"/>
           </a:ln>
@@ -4720,10 +7855,10 @@
       </p:sp>
       <p:sp>
         <p:nvSpPr>
-          <p:cNvPr id="80" name="figure-four-placeholder">
-            <a:extLst xmlns:a="http://schemas.openxmlformats.org/drawingml/2006/main">
-              <a:ext uri="{FF2B5EF4-FFF2-40B4-BE49-F238E27FC236}">
-                <a16:creationId xmlns:a16="http://schemas.microsoft.com/office/drawing/2014/main" id="{FCCED4E1-29D4-4B0C-829E-71A4E74C924E}"/>
+          <p:cNvPr id="175" name="figure-four-placeholder">
+            <a:extLst xmlns:a="http://schemas.openxmlformats.org/drawingml/2006/main">
+              <a:ext uri="{FF2B5EF4-FFF2-40B4-BE49-F238E27FC236}">
+                <a16:creationId xmlns:a16="http://schemas.microsoft.com/office/drawing/2014/main" id="{9F31614F-D1FD-416F-8993-2FF1FCB0A929}"/>
               </a:ext>
             </a:extLst>
           </p:cNvPr>
@@ -4743,11 +7878,11 @@
             </a:avLst>
           </a:prstGeom>
           <a:solidFill xmlns:a="http://schemas.openxmlformats.org/drawingml/2006/main">
-            <a:srgbClr val="F6F8FA"/>
+            <a:srgbClr val="F6F2EE"/>
           </a:solidFill>
           <a:ln xmlns:a="http://schemas.openxmlformats.org/drawingml/2006/main" w="19050">
             <a:solidFill>
-              <a:srgbClr val="D9E2EC"/>
+              <a:srgbClr val="DDE5E7"/>
             </a:solidFill>
             <a:prstDash val="solid"/>
           </a:ln>
@@ -4755,10 +7890,10 @@
       </p:sp>
       <p:sp>
         <p:nvSpPr>
-          <p:cNvPr id="81" name="figure-four-placeholder-label">
-            <a:extLst xmlns:a="http://schemas.openxmlformats.org/drawingml/2006/main">
-              <a:ext uri="{FF2B5EF4-FFF2-40B4-BE49-F238E27FC236}">
-                <a16:creationId xmlns:a16="http://schemas.microsoft.com/office/drawing/2014/main" id="{FD6B6915-5760-44B6-87F2-9B89BFEC8DEE}"/>
+          <p:cNvPr id="176" name="figure-four-placeholder-label">
+            <a:extLst xmlns:a="http://schemas.openxmlformats.org/drawingml/2006/main">
+              <a:ext uri="{FF2B5EF4-FFF2-40B4-BE49-F238E27FC236}">
+                <a16:creationId xmlns:a16="http://schemas.microsoft.com/office/drawing/2014/main" id="{2A555E50-1013-4797-9896-DBFDEAAB85E2}"/>
               </a:ext>
             </a:extLst>
           </p:cNvPr>
@@ -4788,14 +7923,14 @@
             <a:pPr algn="ctr">
               <a:defRPr sz="2700" b="1">
                 <a:solidFill>
-                  <a:srgbClr val="2C8C99"/>
+                  <a:srgbClr val="487AA1"/>
                 </a:solidFill>
               </a:defRPr>
             </a:pPr>
             <a:r>
               <a:rPr sz="2700" b="1">
                 <a:solidFill>
-                  <a:srgbClr val="2C8C99"/>
+                  <a:srgbClr val="487AA1"/>
                 </a:solidFill>
               </a:rPr>
               <a:t>SOURCE FIGURE SLOT</a:t>
@@ -4805,10 +7940,10 @@
       </p:sp>
       <p:sp>
         <p:nvSpPr>
-          <p:cNvPr id="82" name="figure-four-caption">
-            <a:extLst xmlns:a="http://schemas.openxmlformats.org/drawingml/2006/main">
-              <a:ext uri="{FF2B5EF4-FFF2-40B4-BE49-F238E27FC236}">
-                <a16:creationId xmlns:a16="http://schemas.microsoft.com/office/drawing/2014/main" id="{91182C3B-459E-46D6-B22E-BD2B551AA458}"/>
+          <p:cNvPr id="177" name="figure-four-caption">
+            <a:extLst xmlns:a="http://schemas.openxmlformats.org/drawingml/2006/main">
+              <a:ext uri="{FF2B5EF4-FFF2-40B4-BE49-F238E27FC236}">
+                <a16:creationId xmlns:a16="http://schemas.microsoft.com/office/drawing/2014/main" id="{EC8B747C-BCE0-477A-8915-71D4E9C09818}"/>
               </a:ext>
             </a:extLst>
           </p:cNvPr>
@@ -4838,14 +7973,14 @@
             <a:pPr>
               <a:defRPr sz="2250" b="1">
                 <a:solidFill>
-                  <a:srgbClr val="102A43"/>
+                  <a:srgbClr val="293F55"/>
                 </a:solidFill>
               </a:defRPr>
             </a:pPr>
             <a:r>
               <a:rPr sz="2250" b="1">
                 <a:solidFill>
-                  <a:srgbClr val="102A43"/>
+                  <a:srgbClr val="293F55"/>
                 </a:solidFill>
               </a:rPr>
               <a:t>Source figure selected during full-paper generation</a:t>
@@ -4855,10 +7990,10 @@
       </p:sp>
       <p:sp>
         <p:nvSpPr>
-          <p:cNvPr id="83" name="figure-four-source">
-            <a:extLst xmlns:a="http://schemas.openxmlformats.org/drawingml/2006/main">
-              <a:ext uri="{FF2B5EF4-FFF2-40B4-BE49-F238E27FC236}">
-                <a16:creationId xmlns:a16="http://schemas.microsoft.com/office/drawing/2014/main" id="{656C78C4-EF8D-49FD-85D9-F4BF9F34DF69}"/>
+          <p:cNvPr id="178" name="figure-four-source">
+            <a:extLst xmlns:a="http://schemas.openxmlformats.org/drawingml/2006/main">
+              <a:ext uri="{FF2B5EF4-FFF2-40B4-BE49-F238E27FC236}">
+                <a16:creationId xmlns:a16="http://schemas.microsoft.com/office/drawing/2014/main" id="{46645FC8-31D9-4099-98D3-28BB00129708}"/>
               </a:ext>
             </a:extLst>
           </p:cNvPr>
@@ -4888,14 +8023,14 @@
             <a:pPr>
               <a:defRPr sz="1875" i="1">
                 <a:solidFill>
-                  <a:srgbClr val="2C8C99"/>
+                  <a:srgbClr val="487AA1"/>
                 </a:solidFill>
               </a:defRPr>
             </a:pPr>
             <a:r>
               <a:rPr sz="1875" i="1">
                 <a:solidFill>
-                  <a:srgbClr val="2C8C99"/>
+                  <a:srgbClr val="487AA1"/>
                 </a:solidFill>
               </a:rPr>
               <a:t>Source: POSTEX-SYNTH-2026-001</a:t>
@@ -4905,10 +8040,10 @@
       </p:sp>
       <p:sp>
         <p:nvSpPr>
-          <p:cNvPr id="84" name="conclusion-heading-title">
-            <a:extLst xmlns:a="http://schemas.openxmlformats.org/drawingml/2006/main">
-              <a:ext uri="{FF2B5EF4-FFF2-40B4-BE49-F238E27FC236}">
-                <a16:creationId xmlns:a16="http://schemas.microsoft.com/office/drawing/2014/main" id="{86E2F1F4-D31C-42E5-9AB4-1223B6D55C5C}"/>
+          <p:cNvPr id="179" name="conclusion-heading-title">
+            <a:extLst xmlns:a="http://schemas.openxmlformats.org/drawingml/2006/main">
+              <a:ext uri="{FF2B5EF4-FFF2-40B4-BE49-F238E27FC236}">
+                <a16:creationId xmlns:a16="http://schemas.microsoft.com/office/drawing/2014/main" id="{F6BB3DAA-A18A-42D5-9A4E-B1F6B2160287}"/>
               </a:ext>
             </a:extLst>
           </p:cNvPr>
@@ -4938,14 +8073,14 @@
             <a:pPr>
               <a:defRPr sz="3600" b="1">
                 <a:solidFill>
-                  <a:srgbClr val="0F5F73"/>
+                  <a:srgbClr val="3E5C78"/>
                 </a:solidFill>
               </a:defRPr>
             </a:pPr>
             <a:r>
               <a:rPr sz="3600" b="1">
                 <a:solidFill>
-                  <a:srgbClr val="0F5F73"/>
+                  <a:srgbClr val="3E5C78"/>
                 </a:solidFill>
               </a:rPr>
               <a:t>Interpretation boundary</a:t>
@@ -4955,10 +8090,10 @@
       </p:sp>
       <p:sp>
         <p:nvSpPr>
-          <p:cNvPr id="85" name="conclusion-heading-rule">
-            <a:extLst xmlns:a="http://schemas.openxmlformats.org/drawingml/2006/main">
-              <a:ext uri="{FF2B5EF4-FFF2-40B4-BE49-F238E27FC236}">
-                <a16:creationId xmlns:a16="http://schemas.microsoft.com/office/drawing/2014/main" id="{7B27B5E4-87F9-405C-BB44-34136E1A9E95}"/>
+          <p:cNvPr id="180" name="conclusion-heading-rule">
+            <a:extLst xmlns:a="http://schemas.openxmlformats.org/drawingml/2006/main">
+              <a:ext uri="{FF2B5EF4-FFF2-40B4-BE49-F238E27FC236}">
+                <a16:creationId xmlns:a16="http://schemas.microsoft.com/office/drawing/2014/main" id="{DAC6F5A7-9B4B-4C8A-B049-DC88859DE268}"/>
               </a:ext>
             </a:extLst>
           </p:cNvPr>
@@ -4978,20 +8113,20 @@
             </a:avLst>
           </a:prstGeom>
           <a:solidFill xmlns:a="http://schemas.openxmlformats.org/drawingml/2006/main">
-            <a:srgbClr val="E8B44C"/>
-          </a:solidFill>
-          <a:ln xmlns:a="http://schemas.openxmlformats.org/drawingml/2006/main" w="0">
-            <a:noFill/>
-            <a:prstDash val="solid"/>
-          </a:ln>
-        </p:spPr>
-      </p:sp>
-      <p:sp>
-        <p:nvSpPr>
-          <p:cNvPr id="86" name="conclusion-panel">
-            <a:extLst xmlns:a="http://schemas.openxmlformats.org/drawingml/2006/main">
-              <a:ext uri="{FF2B5EF4-FFF2-40B4-BE49-F238E27FC236}">
-                <a16:creationId xmlns:a16="http://schemas.microsoft.com/office/drawing/2014/main" id="{BCBD5395-E5D2-4753-8931-6BB71304BED2}"/>
+            <a:srgbClr val="E5BC6C"/>
+          </a:solidFill>
+          <a:ln xmlns:a="http://schemas.openxmlformats.org/drawingml/2006/main" w="0">
+            <a:noFill/>
+            <a:prstDash val="solid"/>
+          </a:ln>
+        </p:spPr>
+      </p:sp>
+      <p:sp>
+        <p:nvSpPr>
+          <p:cNvPr id="181" name="conclusion-panel">
+            <a:extLst xmlns:a="http://schemas.openxmlformats.org/drawingml/2006/main">
+              <a:ext uri="{FF2B5EF4-FFF2-40B4-BE49-F238E27FC236}">
+                <a16:creationId xmlns:a16="http://schemas.microsoft.com/office/drawing/2014/main" id="{91BC81A7-3F9C-4B4F-BFB8-6572BE1CB455}"/>
               </a:ext>
             </a:extLst>
           </p:cNvPr>
@@ -5015,7 +8150,7 @@
           </a:solidFill>
           <a:ln xmlns:a="http://schemas.openxmlformats.org/drawingml/2006/main" w="28575">
             <a:solidFill>
-              <a:srgbClr val="D9E2EC"/>
+              <a:srgbClr val="DDE5E7"/>
             </a:solidFill>
             <a:prstDash val="solid"/>
           </a:ln>
@@ -5023,10 +8158,10 @@
       </p:sp>
       <p:sp>
         <p:nvSpPr>
-          <p:cNvPr id="87" name="conclusion">
-            <a:extLst xmlns:a="http://schemas.openxmlformats.org/drawingml/2006/main">
-              <a:ext uri="{FF2B5EF4-FFF2-40B4-BE49-F238E27FC236}">
-                <a16:creationId xmlns:a16="http://schemas.microsoft.com/office/drawing/2014/main" id="{234B227D-39B4-48F2-8680-96E3DE9FEF0E}"/>
+          <p:cNvPr id="182" name="conclusion">
+            <a:extLst xmlns:a="http://schemas.openxmlformats.org/drawingml/2006/main">
+              <a:ext uri="{FF2B5EF4-FFF2-40B4-BE49-F238E27FC236}">
+                <a16:creationId xmlns:a16="http://schemas.microsoft.com/office/drawing/2014/main" id="{00F1D23B-59A4-404E-9875-FC72F1A6C17B}"/>
               </a:ext>
             </a:extLst>
           </p:cNvPr>
@@ -5056,14 +8191,14 @@
             <a:pPr>
               <a:defRPr sz="2850">
                 <a:solidFill>
-                  <a:srgbClr val="102A43"/>
+                  <a:srgbClr val="293F55"/>
                 </a:solidFill>
               </a:defRPr>
             </a:pPr>
             <a:r>
               <a:rPr sz="2850">
                 <a:solidFill>
-                  <a:srgbClr val="102A43"/>
+                  <a:srgbClr val="293F55"/>
                 </a:solidFill>
               </a:rPr>
               <a:t>Interpret findings only within the source study design, population, methods and reported uncertainty.</a:t>
@@ -5073,10 +8208,10 @@
       </p:sp>
       <p:sp>
         <p:nvSpPr>
-          <p:cNvPr id="88" name="conclusion-evidence">
-            <a:extLst xmlns:a="http://schemas.openxmlformats.org/drawingml/2006/main">
-              <a:ext uri="{FF2B5EF4-FFF2-40B4-BE49-F238E27FC236}">
-                <a16:creationId xmlns:a16="http://schemas.microsoft.com/office/drawing/2014/main" id="{BBC80C51-C26E-4625-9358-1C78E2E2D72D}"/>
+          <p:cNvPr id="183" name="conclusion-evidence">
+            <a:extLst xmlns:a="http://schemas.openxmlformats.org/drawingml/2006/main">
+              <a:ext uri="{FF2B5EF4-FFF2-40B4-BE49-F238E27FC236}">
+                <a16:creationId xmlns:a16="http://schemas.microsoft.com/office/drawing/2014/main" id="{931A488C-90D6-4771-AFE1-0710B7DAAB3E}"/>
               </a:ext>
             </a:extLst>
           </p:cNvPr>
@@ -5106,14 +8241,14 @@
             <a:pPr>
               <a:defRPr sz="1875" i="1">
                 <a:solidFill>
-                  <a:srgbClr val="2C8C99"/>
+                  <a:srgbClr val="487AA1"/>
                 </a:solidFill>
               </a:defRPr>
             </a:pPr>
             <a:r>
               <a:rPr sz="1875" i="1">
                 <a:solidFill>
-                  <a:srgbClr val="2C8C99"/>
+                  <a:srgbClr val="487AA1"/>
                 </a:solidFill>
               </a:rPr>
               <a:t>Source and license: POSTEX-SYNTH-2026-001 · CC0-1.0</a:t>
@@ -5123,10 +8258,10 @@
       </p:sp>
       <p:sp>
         <p:nvSpPr>
-          <p:cNvPr id="89" name="footer-band">
-            <a:extLst xmlns:a="http://schemas.openxmlformats.org/drawingml/2006/main">
-              <a:ext uri="{FF2B5EF4-FFF2-40B4-BE49-F238E27FC236}">
-                <a16:creationId xmlns:a16="http://schemas.microsoft.com/office/drawing/2014/main" id="{DD05FEEC-C0B0-415C-BF9D-1B1A1C292841}"/>
+          <p:cNvPr id="184" name="footer-band">
+            <a:extLst xmlns:a="http://schemas.openxmlformats.org/drawingml/2006/main">
+              <a:ext uri="{FF2B5EF4-FFF2-40B4-BE49-F238E27FC236}">
+                <a16:creationId xmlns:a16="http://schemas.microsoft.com/office/drawing/2014/main" id="{B9B0BFA0-BB8A-453B-913E-F53737880478}"/>
               </a:ext>
             </a:extLst>
           </p:cNvPr>
@@ -5146,20 +8281,20 @@
             </a:avLst>
           </a:prstGeom>
           <a:solidFill xmlns:a="http://schemas.openxmlformats.org/drawingml/2006/main">
-            <a:srgbClr val="102A43"/>
-          </a:solidFill>
-          <a:ln xmlns:a="http://schemas.openxmlformats.org/drawingml/2006/main" w="0">
-            <a:noFill/>
-            <a:prstDash val="solid"/>
-          </a:ln>
-        </p:spPr>
-      </p:sp>
-      <p:sp>
-        <p:nvSpPr>
-          <p:cNvPr id="90" name="footer-source">
-            <a:extLst xmlns:a="http://schemas.openxmlformats.org/drawingml/2006/main">
-              <a:ext uri="{FF2B5EF4-FFF2-40B4-BE49-F238E27FC236}">
-                <a16:creationId xmlns:a16="http://schemas.microsoft.com/office/drawing/2014/main" id="{1A5AE985-3092-40B9-AEB6-CE255266F528}"/>
+            <a:srgbClr val="293F55"/>
+          </a:solidFill>
+          <a:ln xmlns:a="http://schemas.openxmlformats.org/drawingml/2006/main" w="0">
+            <a:noFill/>
+            <a:prstDash val="solid"/>
+          </a:ln>
+        </p:spPr>
+      </p:sp>
+      <p:sp>
+        <p:nvSpPr>
+          <p:cNvPr id="185" name="footer-source">
+            <a:extLst xmlns:a="http://schemas.openxmlformats.org/drawingml/2006/main">
+              <a:ext uri="{FF2B5EF4-FFF2-40B4-BE49-F238E27FC236}">
+                <a16:creationId xmlns:a16="http://schemas.microsoft.com/office/drawing/2014/main" id="{395A6E8F-7B24-4D9B-A279-5B70C8ACC4B4}"/>
               </a:ext>
             </a:extLst>
           </p:cNvPr>
@@ -5206,10 +8341,10 @@
       </p:sp>
       <p:sp>
         <p:nvSpPr>
-          <p:cNvPr id="91" name="footer-status">
-            <a:extLst xmlns:a="http://schemas.openxmlformats.org/drawingml/2006/main">
-              <a:ext uri="{FF2B5EF4-FFF2-40B4-BE49-F238E27FC236}">
-                <a16:creationId xmlns:a16="http://schemas.microsoft.com/office/drawing/2014/main" id="{62940CDC-6C5E-41D4-8B5C-9B5CBF267692}"/>
+          <p:cNvPr id="186" name="footer-status">
+            <a:extLst xmlns:a="http://schemas.openxmlformats.org/drawingml/2006/main">
+              <a:ext uri="{FF2B5EF4-FFF2-40B4-BE49-F238E27FC236}">
+                <a16:creationId xmlns:a16="http://schemas.microsoft.com/office/drawing/2014/main" id="{66A434DE-431F-4DA3-A81C-30BC8CE743EA}"/>
               </a:ext>
             </a:extLst>
           </p:cNvPr>
@@ -5239,14 +8374,14 @@
             <a:pPr algn="r">
               <a:defRPr sz="1875" b="1">
                 <a:solidFill>
-                  <a:srgbClr val="E8B44C"/>
+                  <a:srgbClr val="E5BC6C"/>
                 </a:solidFill>
               </a:defRPr>
             </a:pPr>
             <a:r>
               <a:rPr sz="1875" b="1">
                 <a:solidFill>
-                  <a:srgbClr val="E8B44C"/>
+                  <a:srgbClr val="E5BC6C"/>
                 </a:solidFill>
               </a:rPr>
               <a:t>Evaluation preview · not a release poster</a:t>
@@ -5257,7 +8392,7 @@
     </p:spTree>
     <p:extLst>
       <p:ext uri="{BB962C8B-B14F-4D97-AF65-F5344CB8AC3E}">
-        <p14:creationId xmlns:p14="http://schemas.microsoft.com/office/powerpoint/2010/main" val="1459075482"/>
+        <p14:creationId xmlns:p14="http://schemas.microsoft.com/office/powerpoint/2010/main" val="573410167"/>
       </p:ext>
     </p:extLst>
   </p:cSld>
